--- a/Airline_Satisfaction_Presentation.pptx
+++ b/Airline_Satisfaction_Presentation.pptx
@@ -4,28 +4,31 @@
   <p:sldMasterIdLst>
     <p:sldMasterId id="2147483648" r:id="rId1"/>
   </p:sldMasterIdLst>
+  <p:notesMasterIdLst>
+    <p:notesMasterId r:id="rId21"/>
+  </p:notesMasterIdLst>
   <p:sldIdLst>
-    <p:sldId id="256" r:id="rId7"/>
-    <p:sldId id="257" r:id="rId9"/>
-    <p:sldId id="258" r:id="rId10"/>
-    <p:sldId id="259" r:id="rId11"/>
-    <p:sldId id="260" r:id="rId12"/>
-    <p:sldId id="261" r:id="rId13"/>
-    <p:sldId id="262" r:id="rId14"/>
-    <p:sldId id="263" r:id="rId15"/>
-    <p:sldId id="264" r:id="rId16"/>
-    <p:sldId id="265" r:id="rId17"/>
-    <p:sldId id="266" r:id="rId18"/>
-    <p:sldId id="267" r:id="rId19"/>
-    <p:sldId id="268" r:id="rId20"/>
-    <p:sldId id="269" r:id="rId21"/>
-    <p:sldId id="270" r:id="rId22"/>
-    <p:sldId id="271" r:id="rId23"/>
-    <p:sldId id="272" r:id="rId24"/>
-    <p:sldId id="273" r:id="rId25"/>
-    <p:sldId id="274" r:id="rId26"/>
+    <p:sldId id="256" r:id="rId2"/>
+    <p:sldId id="257" r:id="rId3"/>
+    <p:sldId id="258" r:id="rId4"/>
+    <p:sldId id="259" r:id="rId5"/>
+    <p:sldId id="260" r:id="rId6"/>
+    <p:sldId id="261" r:id="rId7"/>
+    <p:sldId id="262" r:id="rId8"/>
+    <p:sldId id="263" r:id="rId9"/>
+    <p:sldId id="264" r:id="rId10"/>
+    <p:sldId id="265" r:id="rId11"/>
+    <p:sldId id="266" r:id="rId12"/>
+    <p:sldId id="267" r:id="rId13"/>
+    <p:sldId id="268" r:id="rId14"/>
+    <p:sldId id="269" r:id="rId15"/>
+    <p:sldId id="270" r:id="rId16"/>
+    <p:sldId id="271" r:id="rId17"/>
+    <p:sldId id="272" r:id="rId18"/>
+    <p:sldId id="273" r:id="rId19"/>
+    <p:sldId id="274" r:id="rId20"/>
   </p:sldIdLst>
-  <p:sldSz cx="12191695" cy="6858000" type="screen4x3"/>
+  <p:sldSz cx="12192000" cy="6858000"/>
   <p:notesSz cx="6858000" cy="9144000"/>
   <p:defaultTextStyle>
     <a:defPPr>
@@ -122,13 +125,83 @@
       </a:defRPr>
     </a:lvl9pPr>
   </p:defaultTextStyle>
+  <p:extLst>
+    <p:ext uri="{EFAFB233-063F-42B5-8137-9DF3F51BA10A}">
+      <p15:sldGuideLst xmlns:p15="http://schemas.microsoft.com/office/powerpoint/2012/main">
+        <p15:guide id="1" orient="horz" pos="2160">
+          <p15:clr>
+            <a:srgbClr val="A4A3A4"/>
+          </p15:clr>
+        </p15:guide>
+        <p15:guide id="2" pos="2880">
+          <p15:clr>
+            <a:srgbClr val="A4A3A4"/>
+          </p15:clr>
+        </p15:guide>
+      </p15:sldGuideLst>
+    </p:ext>
+  </p:extLst>
 </p:presentation>
 </file>
 
+<file path=ppt/revisionInfo.xml><?xml version="1.0" encoding="utf-8"?>
+<p1510:revInfo xmlns:a="http://schemas.openxmlformats.org/drawingml/2006/main" xmlns:r="http://schemas.openxmlformats.org/officeDocument/2006/relationships" xmlns:p1510="http://schemas.microsoft.com/office/powerpoint/2015/10/main">
+  <p1510:revLst>
+    <p1510:client id="{C5BFE8E7-570B-4A5C-AE81-4369216DAB3A}" v="1" dt="2026-10-05T09:02:28.466"/>
+  </p1510:revLst>
+</p1510:revInfo>
+</file>
+
+<file path=ppt/changesInfos/changesInfo1.xml><?xml version="1.0" encoding="utf-8"?>
+<pc:chgInfo xmlns:a="http://schemas.openxmlformats.org/drawingml/2006/main" xmlns:r="http://schemas.openxmlformats.org/officeDocument/2006/relationships" xmlns:ac="http://schemas.microsoft.com/office/drawing/2013/main/command" xmlns:pc="http://schemas.microsoft.com/office/powerpoint/2013/main/command">
+  <pc:docChgLst>
+    <pc:chgData name="Hisham Mohamed Ahmed" userId="e29acc93-65b1-4b33-80c8-d632df28580f" providerId="ADAL" clId="{9741A459-0F71-4A5F-9168-5674C230F167}"/>
+    <pc:docChg chg="undo custSel modSld">
+      <pc:chgData name="Hisham Mohamed Ahmed" userId="e29acc93-65b1-4b33-80c8-d632df28580f" providerId="ADAL" clId="{9741A459-0F71-4A5F-9168-5674C230F167}" dt="2026-10-05T09:04:03.920" v="47" actId="20577"/>
+      <pc:docMkLst>
+        <pc:docMk/>
+      </pc:docMkLst>
+      <pc:sldChg chg="modSp mod">
+        <pc:chgData name="Hisham Mohamed Ahmed" userId="e29acc93-65b1-4b33-80c8-d632df28580f" providerId="ADAL" clId="{9741A459-0F71-4A5F-9168-5674C230F167}" dt="2026-10-05T09:02:28.466" v="45"/>
+        <pc:sldMkLst>
+          <pc:docMk/>
+          <pc:sldMk cId="0" sldId="256"/>
+        </pc:sldMkLst>
+        <pc:spChg chg="mod">
+          <ac:chgData name="Hisham Mohamed Ahmed" userId="e29acc93-65b1-4b33-80c8-d632df28580f" providerId="ADAL" clId="{9741A459-0F71-4A5F-9168-5674C230F167}" dt="2026-10-05T09:02:28.466" v="45"/>
+          <ac:spMkLst>
+            <pc:docMk/>
+            <pc:sldMk cId="0" sldId="256"/>
+            <ac:spMk id="10" creationId="{00000000-0000-0000-0000-000000000000}"/>
+          </ac:spMkLst>
+        </pc:spChg>
+      </pc:sldChg>
+      <pc:sldChg chg="modSp mod">
+        <pc:chgData name="Hisham Mohamed Ahmed" userId="e29acc93-65b1-4b33-80c8-d632df28580f" providerId="ADAL" clId="{9741A459-0F71-4A5F-9168-5674C230F167}" dt="2026-10-05T09:04:03.920" v="47" actId="20577"/>
+        <pc:sldMkLst>
+          <pc:docMk/>
+          <pc:sldMk cId="0" sldId="274"/>
+        </pc:sldMkLst>
+        <pc:spChg chg="mod">
+          <ac:chgData name="Hisham Mohamed Ahmed" userId="e29acc93-65b1-4b33-80c8-d632df28580f" providerId="ADAL" clId="{9741A459-0F71-4A5F-9168-5674C230F167}" dt="2026-10-05T09:04:03.920" v="47" actId="20577"/>
+          <ac:spMkLst>
+            <pc:docMk/>
+            <pc:sldMk cId="0" sldId="274"/>
+            <ac:spMk id="6" creationId="{00000000-0000-0000-0000-000000000000}"/>
+          </ac:spMkLst>
+        </pc:spChg>
+      </pc:sldChg>
+    </pc:docChg>
+  </pc:docChgLst>
+</pc:chgInfo>
+</file>
+
 <file path=ppt/charts/chart1.xml><?xml version="1.0" encoding="utf-8"?>
-<c:chartSpace xmlns:c="http://schemas.openxmlformats.org/drawingml/2006/chart" xmlns:a="http://schemas.openxmlformats.org/drawingml/2006/main" xmlns:r="http://schemas.openxmlformats.org/officeDocument/2006/relationships">
+<c:chartSpace xmlns:c="http://schemas.openxmlformats.org/drawingml/2006/chart" xmlns:a="http://schemas.openxmlformats.org/drawingml/2006/main" xmlns:r="http://schemas.openxmlformats.org/officeDocument/2006/relationships" xmlns:c16r2="http://schemas.microsoft.com/office/drawing/2015/06/chart">
   <c:date1904 val="0"/>
+  <c:lang val="en-US"/>
   <c:roundedCorners val="0"/>
+  <c:style val="2"/>
   <c:chart>
     <c:autoTitleDeleted val="1"/>
     <c:plotArea>
@@ -151,6 +224,7 @@
           </c:tx>
           <c:dPt>
             <c:idx val="0"/>
+            <c:bubble3D val="0"/>
             <c:spPr>
               <a:solidFill>
                 <a:srgbClr val="2A78D6"/>
@@ -161,9 +235,15 @@
                 </a:solidFill>
               </a:ln>
             </c:spPr>
+            <c:extLst>
+              <c:ext xmlns:c16="http://schemas.microsoft.com/office/drawing/2014/chart" uri="{C3380CC4-5D6E-409C-BE32-E72D297353CC}">
+                <c16:uniqueId val="{00000001-C086-4E79-A9FE-482C70F7F337}"/>
+              </c:ext>
+            </c:extLst>
           </c:dPt>
           <c:dPt>
             <c:idx val="1"/>
+            <c:bubble3D val="0"/>
             <c:spPr>
               <a:solidFill>
                 <a:srgbClr val="EB6834"/>
@@ -174,7 +254,46 @@
                 </a:solidFill>
               </a:ln>
             </c:spPr>
+            <c:extLst>
+              <c:ext xmlns:c16="http://schemas.microsoft.com/office/drawing/2014/chart" uri="{C3380CC4-5D6E-409C-BE32-E72D297353CC}">
+                <c16:uniqueId val="{00000003-C086-4E79-A9FE-482C70F7F337}"/>
+              </c:ext>
+            </c:extLst>
           </c:dPt>
+          <c:dLbls>
+            <c:numFmt formatCode="0.0%" sourceLinked="0"/>
+            <c:spPr>
+              <a:noFill/>
+              <a:ln>
+                <a:noFill/>
+              </a:ln>
+              <a:effectLst/>
+            </c:spPr>
+            <c:txPr>
+              <a:bodyPr/>
+              <a:lstStyle/>
+              <a:p>
+                <a:pPr>
+                  <a:defRPr sz="1600" b="1">
+                    <a:solidFill>
+                      <a:srgbClr val="FFFFFF"/>
+                    </a:solidFill>
+                  </a:defRPr>
+                </a:pPr>
+                <a:endParaRPr lang="en-US"/>
+              </a:p>
+            </c:txPr>
+            <c:showLegendKey val="0"/>
+            <c:showVal val="0"/>
+            <c:showCatName val="0"/>
+            <c:showSerName val="0"/>
+            <c:showPercent val="1"/>
+            <c:showBubbleSize val="0"/>
+            <c:showLeaderLines val="1"/>
+            <c:extLst>
+              <c:ext xmlns:c15="http://schemas.microsoft.com/office/drawing/2012/chart" uri="{CE6537A1-D6FC-4f65-9D91-7224C49458BB}"/>
+            </c:extLst>
+          </c:dLbls>
           <c:cat>
             <c:strRef>
               <c:f>Sheet1!$A$2:$A$3</c:f>
@@ -204,22 +323,13 @@
               </c:numCache>
             </c:numRef>
           </c:val>
+          <c:extLst>
+            <c:ext xmlns:c16="http://schemas.microsoft.com/office/drawing/2014/chart" uri="{C3380CC4-5D6E-409C-BE32-E72D297353CC}">
+              <c16:uniqueId val="{00000004-C086-4E79-A9FE-482C70F7F337}"/>
+            </c:ext>
+          </c:extLst>
         </c:ser>
         <c:dLbls>
-          <c:numFmt formatCode="0.0%" sourceLinked="0"/>
-          <c:txPr>
-            <a:bodyPr/>
-            <a:lstStyle/>
-            <a:p>
-              <a:pPr>
-                <a:defRPr sz="1600" b="1">
-                  <a:solidFill>
-                    <a:srgbClr val="FFFFFF"/>
-                  </a:solidFill>
-                </a:defRPr>
-              </a:pPr>
-            </a:p>
-          </c:txPr>
           <c:showLegendKey val="0"/>
           <c:showVal val="0"/>
           <c:showCatName val="0"/>
@@ -234,7 +344,6 @@
     </c:plotArea>
     <c:legend>
       <c:legendPos val="b"/>
-      <c:layout/>
       <c:overlay val="0"/>
       <c:txPr>
         <a:bodyPr/>
@@ -243,6 +352,7 @@
           <a:pPr>
             <a:defRPr sz="1400"/>
           </a:pPr>
+          <a:endParaRPr lang="en-US"/>
         </a:p>
       </c:txPr>
     </c:legend>
@@ -259,7 +369,7 @@
           <a:latin typeface="Calibri"/>
         </a:defRPr>
       </a:pPr>
-      <a:endParaRPr/>
+      <a:endParaRPr lang="en-US"/>
     </a:p>
   </c:txPr>
   <c:externalData r:id="rId1">
@@ -269,14 +379,19 @@
 </file>
 
 <file path=ppt/charts/chart2.xml><?xml version="1.0" encoding="utf-8"?>
-<c:chartSpace xmlns:c="http://schemas.openxmlformats.org/drawingml/2006/chart" xmlns:a="http://schemas.openxmlformats.org/drawingml/2006/main" xmlns:r="http://schemas.openxmlformats.org/officeDocument/2006/relationships">
+<c:chartSpace xmlns:c="http://schemas.openxmlformats.org/drawingml/2006/chart" xmlns:a="http://schemas.openxmlformats.org/drawingml/2006/main" xmlns:r="http://schemas.openxmlformats.org/officeDocument/2006/relationships" xmlns:c16r2="http://schemas.microsoft.com/office/drawing/2015/06/chart">
   <c:date1904 val="0"/>
+  <c:lang val="en-US"/>
+  <c:roundedCorners val="1"/>
+  <c:style val="2"/>
   <c:chart>
     <c:autoTitleDeleted val="1"/>
     <c:plotArea>
+      <c:layout/>
       <c:barChart>
         <c:barDir val="col"/>
         <c:grouping val="clustered"/>
+        <c:varyColors val="1"/>
         <c:ser>
           <c:idx val="0"/>
           <c:order val="0"/>
@@ -301,78 +416,179 @@
               </a:solidFill>
             </a:ln>
           </c:spPr>
+          <c:invertIfNegative val="1"/>
           <c:dPt>
             <c:idx val="0"/>
+            <c:invertIfNegative val="1"/>
+            <c:bubble3D val="0"/>
             <c:spPr>
               <a:solidFill>
                 <a:srgbClr val="2A78D6"/>
               </a:solidFill>
             </c:spPr>
+            <c:extLst>
+              <c:ext xmlns:c16="http://schemas.microsoft.com/office/drawing/2014/chart" uri="{C3380CC4-5D6E-409C-BE32-E72D297353CC}">
+                <c16:uniqueId val="{00000001-B2ED-4B67-B79F-E2668D4D46D5}"/>
+              </c:ext>
+            </c:extLst>
           </c:dPt>
           <c:dPt>
             <c:idx val="1"/>
+            <c:invertIfNegative val="1"/>
+            <c:bubble3D val="0"/>
             <c:spPr>
               <a:solidFill>
                 <a:srgbClr val="EB6834"/>
               </a:solidFill>
             </c:spPr>
+            <c:extLst>
+              <c:ext xmlns:c16="http://schemas.microsoft.com/office/drawing/2014/chart" uri="{C3380CC4-5D6E-409C-BE32-E72D297353CC}">
+                <c16:uniqueId val="{00000003-B2ED-4B67-B79F-E2668D4D46D5}"/>
+              </c:ext>
+            </c:extLst>
           </c:dPt>
           <c:dPt>
             <c:idx val="2"/>
+            <c:invertIfNegative val="1"/>
+            <c:bubble3D val="0"/>
             <c:spPr>
               <a:solidFill>
                 <a:srgbClr val="EB6834"/>
               </a:solidFill>
             </c:spPr>
+            <c:extLst>
+              <c:ext xmlns:c16="http://schemas.microsoft.com/office/drawing/2014/chart" uri="{C3380CC4-5D6E-409C-BE32-E72D297353CC}">
+                <c16:uniqueId val="{00000005-B2ED-4B67-B79F-E2668D4D46D5}"/>
+              </c:ext>
+            </c:extLst>
           </c:dPt>
           <c:dPt>
             <c:idx val="3"/>
+            <c:invertIfNegative val="1"/>
+            <c:bubble3D val="0"/>
             <c:spPr>
               <a:solidFill>
                 <a:srgbClr val="2A78D6"/>
               </a:solidFill>
             </c:spPr>
+            <c:extLst>
+              <c:ext xmlns:c16="http://schemas.microsoft.com/office/drawing/2014/chart" uri="{C3380CC4-5D6E-409C-BE32-E72D297353CC}">
+                <c16:uniqueId val="{00000007-B2ED-4B67-B79F-E2668D4D46D5}"/>
+              </c:ext>
+            </c:extLst>
           </c:dPt>
           <c:dPt>
             <c:idx val="4"/>
+            <c:invertIfNegative val="1"/>
+            <c:bubble3D val="0"/>
             <c:spPr>
               <a:solidFill>
                 <a:srgbClr val="EB6834"/>
               </a:solidFill>
             </c:spPr>
+            <c:extLst>
+              <c:ext xmlns:c16="http://schemas.microsoft.com/office/drawing/2014/chart" uri="{C3380CC4-5D6E-409C-BE32-E72D297353CC}">
+                <c16:uniqueId val="{00000009-B2ED-4B67-B79F-E2668D4D46D5}"/>
+              </c:ext>
+            </c:extLst>
           </c:dPt>
           <c:dPt>
             <c:idx val="5"/>
+            <c:invertIfNegative val="1"/>
+            <c:bubble3D val="0"/>
             <c:spPr>
               <a:solidFill>
                 <a:srgbClr val="2A78D6"/>
               </a:solidFill>
             </c:spPr>
+            <c:extLst>
+              <c:ext xmlns:c16="http://schemas.microsoft.com/office/drawing/2014/chart" uri="{C3380CC4-5D6E-409C-BE32-E72D297353CC}">
+                <c16:uniqueId val="{0000000B-B2ED-4B67-B79F-E2668D4D46D5}"/>
+              </c:ext>
+            </c:extLst>
           </c:dPt>
           <c:dPt>
             <c:idx val="6"/>
+            <c:invertIfNegative val="1"/>
+            <c:bubble3D val="0"/>
             <c:spPr>
               <a:solidFill>
                 <a:srgbClr val="EB6834"/>
               </a:solidFill>
             </c:spPr>
+            <c:extLst>
+              <c:ext xmlns:c16="http://schemas.microsoft.com/office/drawing/2014/chart" uri="{C3380CC4-5D6E-409C-BE32-E72D297353CC}">
+                <c16:uniqueId val="{0000000D-B2ED-4B67-B79F-E2668D4D46D5}"/>
+              </c:ext>
+            </c:extLst>
           </c:dPt>
           <c:dPt>
             <c:idx val="7"/>
+            <c:invertIfNegative val="1"/>
+            <c:bubble3D val="0"/>
             <c:spPr>
               <a:solidFill>
                 <a:srgbClr val="EB6834"/>
               </a:solidFill>
             </c:spPr>
+            <c:extLst>
+              <c:ext xmlns:c16="http://schemas.microsoft.com/office/drawing/2014/chart" uri="{C3380CC4-5D6E-409C-BE32-E72D297353CC}">
+                <c16:uniqueId val="{0000000F-B2ED-4B67-B79F-E2668D4D46D5}"/>
+              </c:ext>
+            </c:extLst>
           </c:dPt>
           <c:dPt>
             <c:idx val="8"/>
+            <c:invertIfNegative val="1"/>
+            <c:bubble3D val="0"/>
             <c:spPr>
               <a:solidFill>
                 <a:srgbClr val="2A78D6"/>
               </a:solidFill>
             </c:spPr>
+            <c:extLst>
+              <c:ext xmlns:c16="http://schemas.microsoft.com/office/drawing/2014/chart" uri="{C3380CC4-5D6E-409C-BE32-E72D297353CC}">
+                <c16:uniqueId val="{00000011-B2ED-4B67-B79F-E2668D4D46D5}"/>
+              </c:ext>
+            </c:extLst>
           </c:dPt>
+          <c:dLbls>
+            <c:numFmt formatCode="0.0&quot;%&quot;" sourceLinked="0"/>
+            <c:spPr>
+              <a:noFill/>
+              <a:ln>
+                <a:noFill/>
+              </a:ln>
+              <a:effectLst/>
+            </c:spPr>
+            <c:txPr>
+              <a:bodyPr/>
+              <a:lstStyle/>
+              <a:p>
+                <a:pPr>
+                  <a:defRPr sz="1200" b="1">
+                    <a:solidFill>
+                      <a:srgbClr val="1B1F24"/>
+                    </a:solidFill>
+                  </a:defRPr>
+                </a:pPr>
+                <a:endParaRPr lang="en-US"/>
+              </a:p>
+            </c:txPr>
+            <c:dLblPos val="outEnd"/>
+            <c:showLegendKey val="0"/>
+            <c:showVal val="1"/>
+            <c:showCatName val="0"/>
+            <c:showSerName val="0"/>
+            <c:showPercent val="0"/>
+            <c:showBubbleSize val="0"/>
+            <c:showLeaderLines val="0"/>
+            <c:extLst>
+              <c:ext xmlns:c15="http://schemas.microsoft.com/office/drawing/2012/chart" uri="{CE6537A1-D6FC-4f65-9D91-7224C49458BB}">
+                <c15:showLeaderLines val="0"/>
+              </c:ext>
+            </c:extLst>
+          </c:dLbls>
           <c:cat>
             <c:strRef>
               <c:f>Sheet1!$A$2:$A$10</c:f>
@@ -421,13 +637,13 @@
                   <c:v>24.8</c:v>
                 </c:pt>
                 <c:pt idx="2">
-                  <c:v>19.4</c:v>
+                  <c:v>19.399999999999999</c:v>
                 </c:pt>
                 <c:pt idx="3">
                   <c:v>58.8</c:v>
                 </c:pt>
                 <c:pt idx="4">
-                  <c:v>10.0</c:v>
+                  <c:v>10</c:v>
                 </c:pt>
                 <c:pt idx="5">
                   <c:v>48.1</c:v>
@@ -444,22 +660,27 @@
               </c:numCache>
             </c:numRef>
           </c:val>
+          <c:extLst>
+            <c:ext xmlns:c14="http://schemas.microsoft.com/office/drawing/2007/8/2/chart" uri="{6F2FDCE9-48DA-4B69-8628-5D25D57E5C99}">
+              <c14:invertSolidFillFmt>
+                <c14:spPr xmlns:c14="http://schemas.microsoft.com/office/drawing/2007/8/2/chart">
+                  <a:solidFill>
+                    <a:srgbClr val="FFFFFF"/>
+                  </a:solidFill>
+                  <a:ln w="19050">
+                    <a:solidFill>
+                      <a:srgbClr val="FFFFFF"/>
+                    </a:solidFill>
+                  </a:ln>
+                </c14:spPr>
+              </c14:invertSolidFillFmt>
+            </c:ext>
+            <c:ext xmlns:c16="http://schemas.microsoft.com/office/drawing/2014/chart" uri="{C3380CC4-5D6E-409C-BE32-E72D297353CC}">
+              <c16:uniqueId val="{00000012-B2ED-4B67-B79F-E2668D4D46D5}"/>
+            </c:ext>
+          </c:extLst>
         </c:ser>
         <c:dLbls>
-          <c:numFmt formatCode="0.0&quot;%&quot;" sourceLinked="0"/>
-          <c:txPr>
-            <a:bodyPr/>
-            <a:lstStyle/>
-            <a:p>
-              <a:pPr>
-                <a:defRPr sz="1200" b="1">
-                  <a:solidFill>
-                    <a:srgbClr val="1B1F24"/>
-                  </a:solidFill>
-                </a:defRPr>
-              </a:pPr>
-            </a:p>
-          </c:txPr>
           <c:dLblPos val="outEnd"/>
           <c:showLegendKey val="0"/>
           <c:showVal val="1"/>
@@ -467,7 +688,6 @@
           <c:showSerName val="0"/>
           <c:showPercent val="0"/>
           <c:showBubbleSize val="0"/>
-          <c:showLeaderLines val="1"/>
         </c:dLbls>
         <c:gapWidth val="45"/>
         <c:axId val="-2068027336"/>
@@ -480,6 +700,7 @@
         </c:scaling>
         <c:delete val="0"/>
         <c:axPos val="b"/>
+        <c:numFmt formatCode="General" sourceLinked="0"/>
         <c:majorTickMark val="out"/>
         <c:minorTickMark val="none"/>
         <c:tickLblPos val="nextTo"/>
@@ -501,6 +722,7 @@
                 </a:solidFill>
               </a:defRPr>
             </a:pPr>
+            <a:endParaRPr lang="en-US"/>
           </a:p>
         </c:txPr>
         <c:crossAx val="-2113994440"/>
@@ -513,8 +735,9 @@
       <c:valAx>
         <c:axId val="-2113994440"/>
         <c:scaling>
-          <c:max val="100.0"/>
-          <c:min val="0.0"/>
+          <c:orientation val="minMax"/>
+          <c:max val="100"/>
+          <c:min val="0"/>
         </c:scaling>
         <c:delete val="0"/>
         <c:axPos val="l"/>
@@ -543,13 +766,17 @@
             <a:pPr>
               <a:defRPr sz="1100"/>
             </a:pPr>
+            <a:endParaRPr lang="en-US"/>
           </a:p>
         </c:txPr>
         <c:crossAx val="-2068027336"/>
         <c:crosses val="autoZero"/>
+        <c:crossBetween val="between"/>
       </c:valAx>
     </c:plotArea>
+    <c:plotVisOnly val="1"/>
     <c:dispBlanksAs val="gap"/>
+    <c:showDLblsOverMax val="1"/>
   </c:chart>
   <c:txPr>
     <a:bodyPr/>
@@ -573,11 +800,15 @@
 </file>
 
 <file path=ppt/charts/chart3.xml><?xml version="1.0" encoding="utf-8"?>
-<c:chartSpace xmlns:c="http://schemas.openxmlformats.org/drawingml/2006/chart" xmlns:a="http://schemas.openxmlformats.org/drawingml/2006/main" xmlns:r="http://schemas.openxmlformats.org/officeDocument/2006/relationships">
+<c:chartSpace xmlns:c="http://schemas.openxmlformats.org/drawingml/2006/chart" xmlns:a="http://schemas.openxmlformats.org/drawingml/2006/main" xmlns:r="http://schemas.openxmlformats.org/officeDocument/2006/relationships" xmlns:c16r2="http://schemas.microsoft.com/office/drawing/2015/06/chart">
   <c:date1904 val="0"/>
+  <c:lang val="en-US"/>
+  <c:roundedCorners val="1"/>
+  <c:style val="2"/>
   <c:chart>
     <c:autoTitleDeleted val="1"/>
     <c:plotArea>
+      <c:layout/>
       <c:lineChart>
         <c:grouping val="standard"/>
         <c:varyColors val="0"/>
@@ -603,6 +834,7 @@
             </a:ln>
           </c:spPr>
           <c:marker>
+            <c:symbol val="diamond"/>
             <c:size val="12"/>
             <c:spPr>
               <a:solidFill>
@@ -615,6 +847,43 @@
               </a:ln>
             </c:spPr>
           </c:marker>
+          <c:dLbls>
+            <c:numFmt formatCode="0.0&quot;%&quot;" sourceLinked="0"/>
+            <c:spPr>
+              <a:noFill/>
+              <a:ln>
+                <a:noFill/>
+              </a:ln>
+              <a:effectLst/>
+            </c:spPr>
+            <c:txPr>
+              <a:bodyPr/>
+              <a:lstStyle/>
+              <a:p>
+                <a:pPr>
+                  <a:defRPr sz="1200" b="1">
+                    <a:solidFill>
+                      <a:srgbClr val="1B1F24"/>
+                    </a:solidFill>
+                  </a:defRPr>
+                </a:pPr>
+                <a:endParaRPr lang="en-US"/>
+              </a:p>
+            </c:txPr>
+            <c:dLblPos val="t"/>
+            <c:showLegendKey val="0"/>
+            <c:showVal val="1"/>
+            <c:showCatName val="0"/>
+            <c:showSerName val="0"/>
+            <c:showPercent val="0"/>
+            <c:showBubbleSize val="0"/>
+            <c:showLeaderLines val="0"/>
+            <c:extLst>
+              <c:ext xmlns:c15="http://schemas.microsoft.com/office/drawing/2012/chart" uri="{CE6537A1-D6FC-4f65-9D91-7224C49458BB}">
+                <c15:showLeaderLines val="0"/>
+              </c:ext>
+            </c:extLst>
+          </c:dLbls>
           <c:cat>
             <c:strRef>
               <c:f>Sheet1!$A$2:$A$6</c:f>
@@ -650,10 +919,10 @@
                 <c:formatCode>General</c:formatCode>
                 <c:ptCount val="5"/>
                 <c:pt idx="0">
-                  <c:v>18.1</c:v>
+                  <c:v>18.100000000000001</c:v>
                 </c:pt>
                 <c:pt idx="1">
-                  <c:v>36.0</c:v>
+                  <c:v>36</c:v>
                 </c:pt>
                 <c:pt idx="2">
                   <c:v>47.7</c:v>
@@ -668,22 +937,13 @@
             </c:numRef>
           </c:val>
           <c:smooth val="0"/>
+          <c:extLst>
+            <c:ext xmlns:c16="http://schemas.microsoft.com/office/drawing/2014/chart" uri="{C3380CC4-5D6E-409C-BE32-E72D297353CC}">
+              <c16:uniqueId val="{00000000-ECA8-40C5-886E-E85AA4087971}"/>
+            </c:ext>
+          </c:extLst>
         </c:ser>
         <c:dLbls>
-          <c:numFmt formatCode="0.0&quot;%&quot;" sourceLinked="0"/>
-          <c:txPr>
-            <a:bodyPr/>
-            <a:lstStyle/>
-            <a:p>
-              <a:pPr>
-                <a:defRPr sz="1200" b="1">
-                  <a:solidFill>
-                    <a:srgbClr val="1B1F24"/>
-                  </a:solidFill>
-                </a:defRPr>
-              </a:pPr>
-            </a:p>
-          </c:txPr>
           <c:dLblPos val="t"/>
           <c:showLegendKey val="0"/>
           <c:showVal val="1"/>
@@ -691,7 +951,6 @@
           <c:showSerName val="0"/>
           <c:showPercent val="0"/>
           <c:showBubbleSize val="0"/>
-          <c:showLeaderLines val="1"/>
         </c:dLbls>
         <c:marker val="1"/>
         <c:smooth val="0"/>
@@ -705,6 +964,7 @@
         </c:scaling>
         <c:delete val="0"/>
         <c:axPos val="b"/>
+        <c:numFmt formatCode="General" sourceLinked="0"/>
         <c:majorTickMark val="out"/>
         <c:minorTickMark val="none"/>
         <c:tickLblPos val="nextTo"/>
@@ -726,6 +986,7 @@
                 </a:solidFill>
               </a:defRPr>
             </a:pPr>
+            <a:endParaRPr lang="en-US"/>
           </a:p>
         </c:txPr>
         <c:crossAx val="2140495176"/>
@@ -738,8 +999,9 @@
       <c:valAx>
         <c:axId val="2140495176"/>
         <c:scaling>
-          <c:max val="80.0"/>
-          <c:min val="0.0"/>
+          <c:orientation val="minMax"/>
+          <c:max val="80"/>
+          <c:min val="0"/>
         </c:scaling>
         <c:delete val="0"/>
         <c:axPos val="l"/>
@@ -768,10 +1030,12 @@
             <a:pPr>
               <a:defRPr sz="1100"/>
             </a:pPr>
+            <a:endParaRPr lang="en-US"/>
           </a:p>
         </c:txPr>
         <c:crossAx val="2118791784"/>
         <c:crosses val="autoZero"/>
+        <c:crossBetween val="between"/>
       </c:valAx>
     </c:plotArea>
     <c:plotVisOnly val="1"/>
@@ -800,14 +1064,19 @@
 </file>
 
 <file path=ppt/charts/chart4.xml><?xml version="1.0" encoding="utf-8"?>
-<c:chartSpace xmlns:c="http://schemas.openxmlformats.org/drawingml/2006/chart" xmlns:a="http://schemas.openxmlformats.org/drawingml/2006/main" xmlns:r="http://schemas.openxmlformats.org/officeDocument/2006/relationships">
+<c:chartSpace xmlns:c="http://schemas.openxmlformats.org/drawingml/2006/chart" xmlns:a="http://schemas.openxmlformats.org/drawingml/2006/main" xmlns:r="http://schemas.openxmlformats.org/officeDocument/2006/relationships" xmlns:c16r2="http://schemas.microsoft.com/office/drawing/2015/06/chart">
   <c:date1904 val="0"/>
+  <c:lang val="en-US"/>
+  <c:roundedCorners val="1"/>
+  <c:style val="2"/>
   <c:chart>
     <c:autoTitleDeleted val="1"/>
     <c:plotArea>
+      <c:layout/>
       <c:barChart>
         <c:barDir val="bar"/>
         <c:grouping val="clustered"/>
+        <c:varyColors val="1"/>
         <c:ser>
           <c:idx val="0"/>
           <c:order val="0"/>
@@ -832,6 +1101,7 @@
               </a:solidFill>
             </a:ln>
           </c:spPr>
+          <c:invertIfNegative val="1"/>
           <c:cat>
             <c:strRef>
               <c:f>Sheet1!$A$2:$A$15</c:f>
@@ -892,7 +1162,7 @@
                   <c:v>3.29</c:v>
                 </c:pt>
                 <c:pt idx="1">
-                  <c:v>3.0</c:v>
+                  <c:v>3</c:v>
                 </c:pt>
                 <c:pt idx="2">
                   <c:v>2.96</c:v>
@@ -933,6 +1203,25 @@
               </c:numCache>
             </c:numRef>
           </c:val>
+          <c:extLst>
+            <c:ext xmlns:c14="http://schemas.microsoft.com/office/drawing/2007/8/2/chart" uri="{6F2FDCE9-48DA-4B69-8628-5D25D57E5C99}">
+              <c14:invertSolidFillFmt>
+                <c14:spPr xmlns:c14="http://schemas.microsoft.com/office/drawing/2007/8/2/chart">
+                  <a:solidFill>
+                    <a:srgbClr val="FFFFFF"/>
+                  </a:solidFill>
+                  <a:ln w="19050">
+                    <a:solidFill>
+                      <a:srgbClr val="FFFFFF"/>
+                    </a:solidFill>
+                  </a:ln>
+                </c14:spPr>
+              </c14:invertSolidFillFmt>
+            </c:ext>
+            <c:ext xmlns:c16="http://schemas.microsoft.com/office/drawing/2014/chart" uri="{C3380CC4-5D6E-409C-BE32-E72D297353CC}">
+              <c16:uniqueId val="{00000000-953A-437F-8B7A-EBB7446B74E8}"/>
+            </c:ext>
+          </c:extLst>
         </c:ser>
         <c:ser>
           <c:idx val="1"/>
@@ -958,6 +1247,7 @@
               </a:solidFill>
             </a:ln>
           </c:spPr>
+          <c:invertIfNegative val="1"/>
           <c:cat>
             <c:strRef>
               <c:f>Sheet1!$A$2:$A$15</c:f>
@@ -1059,7 +1349,34 @@
               </c:numCache>
             </c:numRef>
           </c:val>
+          <c:extLst>
+            <c:ext xmlns:c14="http://schemas.microsoft.com/office/drawing/2007/8/2/chart" uri="{6F2FDCE9-48DA-4B69-8628-5D25D57E5C99}">
+              <c14:invertSolidFillFmt>
+                <c14:spPr xmlns:c14="http://schemas.microsoft.com/office/drawing/2007/8/2/chart">
+                  <a:solidFill>
+                    <a:srgbClr val="FFFFFF"/>
+                  </a:solidFill>
+                  <a:ln w="19050">
+                    <a:solidFill>
+                      <a:srgbClr val="FFFFFF"/>
+                    </a:solidFill>
+                  </a:ln>
+                </c14:spPr>
+              </c14:invertSolidFillFmt>
+            </c:ext>
+            <c:ext xmlns:c16="http://schemas.microsoft.com/office/drawing/2014/chart" uri="{C3380CC4-5D6E-409C-BE32-E72D297353CC}">
+              <c16:uniqueId val="{00000001-953A-437F-8B7A-EBB7446B74E8}"/>
+            </c:ext>
+          </c:extLst>
         </c:ser>
+        <c:dLbls>
+          <c:showLegendKey val="0"/>
+          <c:showVal val="0"/>
+          <c:showCatName val="0"/>
+          <c:showSerName val="0"/>
+          <c:showPercent val="0"/>
+          <c:showBubbleSize val="0"/>
+        </c:dLbls>
         <c:gapWidth val="40"/>
         <c:axId val="-2068027336"/>
         <c:axId val="-2113994440"/>
@@ -1071,6 +1388,7 @@
         </c:scaling>
         <c:delete val="0"/>
         <c:axPos val="l"/>
+        <c:numFmt formatCode="General" sourceLinked="0"/>
         <c:majorTickMark val="out"/>
         <c:minorTickMark val="none"/>
         <c:tickLblPos val="nextTo"/>
@@ -1092,6 +1410,7 @@
                 </a:solidFill>
               </a:defRPr>
             </a:pPr>
+            <a:endParaRPr lang="en-US"/>
           </a:p>
         </c:txPr>
         <c:crossAx val="-2113994440"/>
@@ -1104,8 +1423,9 @@
       <c:valAx>
         <c:axId val="-2113994440"/>
         <c:scaling>
-          <c:max val="5.0"/>
-          <c:min val="0.0"/>
+          <c:orientation val="minMax"/>
+          <c:max val="5"/>
+          <c:min val="0"/>
         </c:scaling>
         <c:delete val="0"/>
         <c:axPos val="b"/>
@@ -1134,11 +1454,13 @@
             <a:pPr>
               <a:defRPr sz="1100"/>
             </a:pPr>
+            <a:endParaRPr lang="en-US"/>
           </a:p>
         </c:txPr>
         <c:crossAx val="-2068027336"/>
         <c:crosses val="autoZero"/>
-        <c:majorUnit val="1.0"/>
+        <c:crossBetween val="between"/>
+        <c:majorUnit val="1"/>
       </c:valAx>
     </c:plotArea>
     <c:legend>
@@ -1155,10 +1477,13 @@
               </a:solidFill>
             </a:defRPr>
           </a:pPr>
+          <a:endParaRPr lang="en-US"/>
         </a:p>
       </c:txPr>
     </c:legend>
+    <c:plotVisOnly val="1"/>
     <c:dispBlanksAs val="gap"/>
+    <c:showDLblsOverMax val="1"/>
   </c:chart>
   <c:txPr>
     <a:bodyPr/>
@@ -1182,14 +1507,19 @@
 </file>
 
 <file path=ppt/charts/chart5.xml><?xml version="1.0" encoding="utf-8"?>
-<c:chartSpace xmlns:c="http://schemas.openxmlformats.org/drawingml/2006/chart" xmlns:a="http://schemas.openxmlformats.org/drawingml/2006/main" xmlns:r="http://schemas.openxmlformats.org/officeDocument/2006/relationships">
+<c:chartSpace xmlns:c="http://schemas.openxmlformats.org/drawingml/2006/chart" xmlns:a="http://schemas.openxmlformats.org/drawingml/2006/main" xmlns:r="http://schemas.openxmlformats.org/officeDocument/2006/relationships" xmlns:c16r2="http://schemas.microsoft.com/office/drawing/2015/06/chart">
   <c:date1904 val="0"/>
+  <c:lang val="en-US"/>
+  <c:roundedCorners val="1"/>
+  <c:style val="2"/>
   <c:chart>
     <c:autoTitleDeleted val="1"/>
     <c:plotArea>
+      <c:layout/>
       <c:barChart>
         <c:barDir val="col"/>
         <c:grouping val="clustered"/>
+        <c:varyColors val="1"/>
         <c:ser>
           <c:idx val="0"/>
           <c:order val="0"/>
@@ -1214,6 +1544,44 @@
               </a:solidFill>
             </a:ln>
           </c:spPr>
+          <c:invertIfNegative val="1"/>
+          <c:dLbls>
+            <c:numFmt formatCode="0.0&quot;%&quot;" sourceLinked="0"/>
+            <c:spPr>
+              <a:noFill/>
+              <a:ln>
+                <a:noFill/>
+              </a:ln>
+              <a:effectLst/>
+            </c:spPr>
+            <c:txPr>
+              <a:bodyPr/>
+              <a:lstStyle/>
+              <a:p>
+                <a:pPr>
+                  <a:defRPr sz="1200" b="1">
+                    <a:solidFill>
+                      <a:srgbClr val="1B1F24"/>
+                    </a:solidFill>
+                  </a:defRPr>
+                </a:pPr>
+                <a:endParaRPr lang="en-US"/>
+              </a:p>
+            </c:txPr>
+            <c:dLblPos val="outEnd"/>
+            <c:showLegendKey val="0"/>
+            <c:showVal val="1"/>
+            <c:showCatName val="0"/>
+            <c:showSerName val="0"/>
+            <c:showPercent val="0"/>
+            <c:showBubbleSize val="0"/>
+            <c:showLeaderLines val="0"/>
+            <c:extLst>
+              <c:ext xmlns:c15="http://schemas.microsoft.com/office/drawing/2012/chart" uri="{CE6537A1-D6FC-4f65-9D91-7224C49458BB}">
+                <c15:showLeaderLines val="0"/>
+              </c:ext>
+            </c:extLst>
+          </c:dLbls>
           <c:cat>
             <c:strRef>
               <c:f>Sheet1!$A$2:$A$5</c:f>
@@ -1244,33 +1612,38 @@
                   <c:v>47.9</c:v>
                 </c:pt>
                 <c:pt idx="1">
-                  <c:v>40.7</c:v>
+                  <c:v>40.700000000000003</c:v>
                 </c:pt>
                 <c:pt idx="2">
-                  <c:v>37.7</c:v>
+                  <c:v>37.700000000000003</c:v>
                 </c:pt>
                 <c:pt idx="3">
-                  <c:v>35.2</c:v>
+                  <c:v>35.200000000000003</c:v>
                 </c:pt>
               </c:numCache>
             </c:numRef>
           </c:val>
+          <c:extLst>
+            <c:ext xmlns:c14="http://schemas.microsoft.com/office/drawing/2007/8/2/chart" uri="{6F2FDCE9-48DA-4B69-8628-5D25D57E5C99}">
+              <c14:invertSolidFillFmt>
+                <c14:spPr xmlns:c14="http://schemas.microsoft.com/office/drawing/2007/8/2/chart">
+                  <a:solidFill>
+                    <a:srgbClr val="FFFFFF"/>
+                  </a:solidFill>
+                  <a:ln w="19050">
+                    <a:solidFill>
+                      <a:srgbClr val="FFFFFF"/>
+                    </a:solidFill>
+                  </a:ln>
+                </c14:spPr>
+              </c14:invertSolidFillFmt>
+            </c:ext>
+            <c:ext xmlns:c16="http://schemas.microsoft.com/office/drawing/2014/chart" uri="{C3380CC4-5D6E-409C-BE32-E72D297353CC}">
+              <c16:uniqueId val="{00000000-E31B-4818-B218-FDF132DE26CB}"/>
+            </c:ext>
+          </c:extLst>
         </c:ser>
         <c:dLbls>
-          <c:numFmt formatCode="0.0&quot;%&quot;" sourceLinked="0"/>
-          <c:txPr>
-            <a:bodyPr/>
-            <a:lstStyle/>
-            <a:p>
-              <a:pPr>
-                <a:defRPr sz="1200" b="1">
-                  <a:solidFill>
-                    <a:srgbClr val="1B1F24"/>
-                  </a:solidFill>
-                </a:defRPr>
-              </a:pPr>
-            </a:p>
-          </c:txPr>
           <c:dLblPos val="outEnd"/>
           <c:showLegendKey val="0"/>
           <c:showVal val="1"/>
@@ -1278,7 +1651,6 @@
           <c:showSerName val="0"/>
           <c:showPercent val="0"/>
           <c:showBubbleSize val="0"/>
-          <c:showLeaderLines val="1"/>
         </c:dLbls>
         <c:gapWidth val="60"/>
         <c:axId val="-2068027336"/>
@@ -1304,9 +1676,9 @@
               </a:p>
             </c:rich>
           </c:tx>
-          <c:layout/>
           <c:overlay val="0"/>
         </c:title>
+        <c:numFmt formatCode="General" sourceLinked="0"/>
         <c:majorTickMark val="out"/>
         <c:minorTickMark val="none"/>
         <c:tickLblPos val="nextTo"/>
@@ -1328,6 +1700,7 @@
                 </a:solidFill>
               </a:defRPr>
             </a:pPr>
+            <a:endParaRPr lang="en-US"/>
           </a:p>
         </c:txPr>
         <c:crossAx val="-2113994440"/>
@@ -1340,8 +1713,9 @@
       <c:valAx>
         <c:axId val="-2113994440"/>
         <c:scaling>
-          <c:max val="60.0"/>
-          <c:min val="0.0"/>
+          <c:orientation val="minMax"/>
+          <c:max val="60"/>
+          <c:min val="0"/>
         </c:scaling>
         <c:delete val="0"/>
         <c:axPos val="l"/>
@@ -1370,13 +1744,17 @@
             <a:pPr>
               <a:defRPr sz="1100"/>
             </a:pPr>
+            <a:endParaRPr lang="en-US"/>
           </a:p>
         </c:txPr>
         <c:crossAx val="-2068027336"/>
         <c:crosses val="autoZero"/>
+        <c:crossBetween val="between"/>
       </c:valAx>
     </c:plotArea>
+    <c:plotVisOnly val="1"/>
     <c:dispBlanksAs val="gap"/>
+    <c:showDLblsOverMax val="1"/>
   </c:chart>
   <c:txPr>
     <a:bodyPr/>
@@ -1400,14 +1778,19 @@
 </file>
 
 <file path=ppt/charts/chart6.xml><?xml version="1.0" encoding="utf-8"?>
-<c:chartSpace xmlns:c="http://schemas.openxmlformats.org/drawingml/2006/chart" xmlns:a="http://schemas.openxmlformats.org/drawingml/2006/main" xmlns:r="http://schemas.openxmlformats.org/officeDocument/2006/relationships">
+<c:chartSpace xmlns:c="http://schemas.openxmlformats.org/drawingml/2006/chart" xmlns:a="http://schemas.openxmlformats.org/drawingml/2006/main" xmlns:r="http://schemas.openxmlformats.org/officeDocument/2006/relationships" xmlns:c16r2="http://schemas.microsoft.com/office/drawing/2015/06/chart">
   <c:date1904 val="0"/>
+  <c:lang val="en-US"/>
+  <c:roundedCorners val="1"/>
+  <c:style val="2"/>
   <c:chart>
     <c:autoTitleDeleted val="1"/>
     <c:plotArea>
+      <c:layout/>
       <c:barChart>
         <c:barDir val="col"/>
         <c:grouping val="clustered"/>
+        <c:varyColors val="1"/>
         <c:ser>
           <c:idx val="0"/>
           <c:order val="0"/>
@@ -1432,6 +1815,44 @@
               </a:solidFill>
             </a:ln>
           </c:spPr>
+          <c:invertIfNegative val="1"/>
+          <c:dLbls>
+            <c:numFmt formatCode="0&quot;%&quot;" sourceLinked="0"/>
+            <c:spPr>
+              <a:noFill/>
+              <a:ln>
+                <a:noFill/>
+              </a:ln>
+              <a:effectLst/>
+            </c:spPr>
+            <c:txPr>
+              <a:bodyPr/>
+              <a:lstStyle/>
+              <a:p>
+                <a:pPr>
+                  <a:defRPr sz="1100" b="1">
+                    <a:solidFill>
+                      <a:srgbClr val="1B1F24"/>
+                    </a:solidFill>
+                  </a:defRPr>
+                </a:pPr>
+                <a:endParaRPr lang="en-US"/>
+              </a:p>
+            </c:txPr>
+            <c:dLblPos val="outEnd"/>
+            <c:showLegendKey val="0"/>
+            <c:showVal val="1"/>
+            <c:showCatName val="0"/>
+            <c:showSerName val="0"/>
+            <c:showPercent val="0"/>
+            <c:showBubbleSize val="0"/>
+            <c:showLeaderLines val="0"/>
+            <c:extLst>
+              <c:ext xmlns:c15="http://schemas.microsoft.com/office/drawing/2012/chart" uri="{CE6537A1-D6FC-4f65-9D91-7224C49458BB}">
+                <c15:showLeaderLines val="0"/>
+              </c:ext>
+            </c:extLst>
+          </c:dLbls>
           <c:cat>
             <c:strRef>
               <c:f>Sheet1!$A$2:$A$4</c:f>
@@ -1462,14 +1883,33 @@
                   <c:v>20.8</c:v>
                 </c:pt>
                 <c:pt idx="1">
-                  <c:v>16.9</c:v>
+                  <c:v>16.899999999999999</c:v>
                 </c:pt>
                 <c:pt idx="2">
-                  <c:v>18.0</c:v>
+                  <c:v>18</c:v>
                 </c:pt>
               </c:numCache>
             </c:numRef>
           </c:val>
+          <c:extLst>
+            <c:ext xmlns:c14="http://schemas.microsoft.com/office/drawing/2007/8/2/chart" uri="{6F2FDCE9-48DA-4B69-8628-5D25D57E5C99}">
+              <c14:invertSolidFillFmt>
+                <c14:spPr xmlns:c14="http://schemas.microsoft.com/office/drawing/2007/8/2/chart">
+                  <a:solidFill>
+                    <a:srgbClr val="FFFFFF"/>
+                  </a:solidFill>
+                  <a:ln w="19050">
+                    <a:solidFill>
+                      <a:srgbClr val="FFFFFF"/>
+                    </a:solidFill>
+                  </a:ln>
+                </c14:spPr>
+              </c14:invertSolidFillFmt>
+            </c:ext>
+            <c:ext xmlns:c16="http://schemas.microsoft.com/office/drawing/2014/chart" uri="{C3380CC4-5D6E-409C-BE32-E72D297353CC}">
+              <c16:uniqueId val="{00000000-9EFB-4E4A-8803-D8C9E0B9F698}"/>
+            </c:ext>
+          </c:extLst>
         </c:ser>
         <c:ser>
           <c:idx val="1"/>
@@ -1495,6 +1935,44 @@
               </a:solidFill>
             </a:ln>
           </c:spPr>
+          <c:invertIfNegative val="1"/>
+          <c:dLbls>
+            <c:numFmt formatCode="0&quot;%&quot;" sourceLinked="0"/>
+            <c:spPr>
+              <a:noFill/>
+              <a:ln>
+                <a:noFill/>
+              </a:ln>
+              <a:effectLst/>
+            </c:spPr>
+            <c:txPr>
+              <a:bodyPr/>
+              <a:lstStyle/>
+              <a:p>
+                <a:pPr>
+                  <a:defRPr sz="1100" b="1">
+                    <a:solidFill>
+                      <a:srgbClr val="1B1F24"/>
+                    </a:solidFill>
+                  </a:defRPr>
+                </a:pPr>
+                <a:endParaRPr lang="en-US"/>
+              </a:p>
+            </c:txPr>
+            <c:dLblPos val="outEnd"/>
+            <c:showLegendKey val="0"/>
+            <c:showVal val="1"/>
+            <c:showCatName val="0"/>
+            <c:showSerName val="0"/>
+            <c:showPercent val="0"/>
+            <c:showBubbleSize val="0"/>
+            <c:showLeaderLines val="0"/>
+            <c:extLst>
+              <c:ext xmlns:c15="http://schemas.microsoft.com/office/drawing/2012/chart" uri="{CE6537A1-D6FC-4f65-9D91-7224C49458BB}">
+                <c15:showLeaderLines val="0"/>
+              </c:ext>
+            </c:extLst>
+          </c:dLbls>
           <c:cat>
             <c:strRef>
               <c:f>Sheet1!$A$2:$A$4</c:f>
@@ -1533,6 +2011,25 @@
               </c:numCache>
             </c:numRef>
           </c:val>
+          <c:extLst>
+            <c:ext xmlns:c14="http://schemas.microsoft.com/office/drawing/2007/8/2/chart" uri="{6F2FDCE9-48DA-4B69-8628-5D25D57E5C99}">
+              <c14:invertSolidFillFmt>
+                <c14:spPr xmlns:c14="http://schemas.microsoft.com/office/drawing/2007/8/2/chart">
+                  <a:solidFill>
+                    <a:srgbClr val="FFFFFF"/>
+                  </a:solidFill>
+                  <a:ln w="19050">
+                    <a:solidFill>
+                      <a:srgbClr val="FFFFFF"/>
+                    </a:solidFill>
+                  </a:ln>
+                </c14:spPr>
+              </c14:invertSolidFillFmt>
+            </c:ext>
+            <c:ext xmlns:c16="http://schemas.microsoft.com/office/drawing/2014/chart" uri="{C3380CC4-5D6E-409C-BE32-E72D297353CC}">
+              <c16:uniqueId val="{00000001-9EFB-4E4A-8803-D8C9E0B9F698}"/>
+            </c:ext>
+          </c:extLst>
         </c:ser>
         <c:ser>
           <c:idx val="2"/>
@@ -1558,6 +2055,44 @@
               </a:solidFill>
             </a:ln>
           </c:spPr>
+          <c:invertIfNegative val="1"/>
+          <c:dLbls>
+            <c:numFmt formatCode="0&quot;%&quot;" sourceLinked="0"/>
+            <c:spPr>
+              <a:noFill/>
+              <a:ln>
+                <a:noFill/>
+              </a:ln>
+              <a:effectLst/>
+            </c:spPr>
+            <c:txPr>
+              <a:bodyPr/>
+              <a:lstStyle/>
+              <a:p>
+                <a:pPr>
+                  <a:defRPr sz="1100" b="1">
+                    <a:solidFill>
+                      <a:srgbClr val="1B1F24"/>
+                    </a:solidFill>
+                  </a:defRPr>
+                </a:pPr>
+                <a:endParaRPr lang="en-US"/>
+              </a:p>
+            </c:txPr>
+            <c:dLblPos val="outEnd"/>
+            <c:showLegendKey val="0"/>
+            <c:showVal val="1"/>
+            <c:showCatName val="0"/>
+            <c:showSerName val="0"/>
+            <c:showPercent val="0"/>
+            <c:showBubbleSize val="0"/>
+            <c:showLeaderLines val="0"/>
+            <c:extLst>
+              <c:ext xmlns:c15="http://schemas.microsoft.com/office/drawing/2012/chart" uri="{CE6537A1-D6FC-4f65-9D91-7224C49458BB}">
+                <c15:showLeaderLines val="0"/>
+              </c:ext>
+            </c:extLst>
+          </c:dLbls>
           <c:cat>
             <c:strRef>
               <c:f>Sheet1!$A$2:$A$4</c:f>
@@ -1588,30 +2123,35 @@
                   <c:v>60.3</c:v>
                 </c:pt>
                 <c:pt idx="1">
-                  <c:v>70.0</c:v>
+                  <c:v>70</c:v>
                 </c:pt>
                 <c:pt idx="2">
-                  <c:v>76.6</c:v>
+                  <c:v>76.599999999999994</c:v>
                 </c:pt>
               </c:numCache>
             </c:numRef>
           </c:val>
+          <c:extLst>
+            <c:ext xmlns:c14="http://schemas.microsoft.com/office/drawing/2007/8/2/chart" uri="{6F2FDCE9-48DA-4B69-8628-5D25D57E5C99}">
+              <c14:invertSolidFillFmt>
+                <c14:spPr xmlns:c14="http://schemas.microsoft.com/office/drawing/2007/8/2/chart">
+                  <a:solidFill>
+                    <a:srgbClr val="FFFFFF"/>
+                  </a:solidFill>
+                  <a:ln w="19050">
+                    <a:solidFill>
+                      <a:srgbClr val="FFFFFF"/>
+                    </a:solidFill>
+                  </a:ln>
+                </c14:spPr>
+              </c14:invertSolidFillFmt>
+            </c:ext>
+            <c:ext xmlns:c16="http://schemas.microsoft.com/office/drawing/2014/chart" uri="{C3380CC4-5D6E-409C-BE32-E72D297353CC}">
+              <c16:uniqueId val="{00000002-9EFB-4E4A-8803-D8C9E0B9F698}"/>
+            </c:ext>
+          </c:extLst>
         </c:ser>
         <c:dLbls>
-          <c:numFmt formatCode="0&quot;%&quot;" sourceLinked="0"/>
-          <c:txPr>
-            <a:bodyPr/>
-            <a:lstStyle/>
-            <a:p>
-              <a:pPr>
-                <a:defRPr sz="1100" b="1">
-                  <a:solidFill>
-                    <a:srgbClr val="1B1F24"/>
-                  </a:solidFill>
-                </a:defRPr>
-              </a:pPr>
-            </a:p>
-          </c:txPr>
           <c:dLblPos val="outEnd"/>
           <c:showLegendKey val="0"/>
           <c:showVal val="1"/>
@@ -1619,7 +2159,6 @@
           <c:showSerName val="0"/>
           <c:showPercent val="0"/>
           <c:showBubbleSize val="0"/>
-          <c:showLeaderLines val="1"/>
         </c:dLbls>
         <c:gapWidth val="60"/>
         <c:overlap val="-5"/>
@@ -1633,6 +2172,7 @@
         </c:scaling>
         <c:delete val="0"/>
         <c:axPos val="b"/>
+        <c:numFmt formatCode="General" sourceLinked="0"/>
         <c:majorTickMark val="out"/>
         <c:minorTickMark val="none"/>
         <c:tickLblPos val="nextTo"/>
@@ -1654,6 +2194,7 @@
                 </a:solidFill>
               </a:defRPr>
             </a:pPr>
+            <a:endParaRPr lang="en-US"/>
           </a:p>
         </c:txPr>
         <c:crossAx val="-2113994440"/>
@@ -1666,8 +2207,9 @@
       <c:valAx>
         <c:axId val="-2113994440"/>
         <c:scaling>
-          <c:max val="100.0"/>
-          <c:min val="0.0"/>
+          <c:orientation val="minMax"/>
+          <c:max val="100"/>
+          <c:min val="0"/>
         </c:scaling>
         <c:delete val="0"/>
         <c:axPos val="l"/>
@@ -1696,10 +2238,12 @@
             <a:pPr>
               <a:defRPr sz="1100"/>
             </a:pPr>
+            <a:endParaRPr lang="en-US"/>
           </a:p>
         </c:txPr>
         <c:crossAx val="-2068027336"/>
         <c:crosses val="autoZero"/>
+        <c:crossBetween val="between"/>
       </c:valAx>
     </c:plotArea>
     <c:legend>
@@ -1716,10 +2260,13 @@
               </a:solidFill>
             </a:defRPr>
           </a:pPr>
+          <a:endParaRPr lang="en-US"/>
         </a:p>
       </c:txPr>
     </c:legend>
+    <c:plotVisOnly val="1"/>
     <c:dispBlanksAs val="gap"/>
+    <c:showDLblsOverMax val="1"/>
   </c:chart>
   <c:txPr>
     <a:bodyPr/>
@@ -1743,14 +2290,19 @@
 </file>
 
 <file path=ppt/charts/chart7.xml><?xml version="1.0" encoding="utf-8"?>
-<c:chartSpace xmlns:c="http://schemas.openxmlformats.org/drawingml/2006/chart" xmlns:a="http://schemas.openxmlformats.org/drawingml/2006/main" xmlns:r="http://schemas.openxmlformats.org/officeDocument/2006/relationships">
+<c:chartSpace xmlns:c="http://schemas.openxmlformats.org/drawingml/2006/chart" xmlns:a="http://schemas.openxmlformats.org/drawingml/2006/main" xmlns:r="http://schemas.openxmlformats.org/officeDocument/2006/relationships" xmlns:c16r2="http://schemas.microsoft.com/office/drawing/2015/06/chart">
   <c:date1904 val="0"/>
+  <c:lang val="en-US"/>
+  <c:roundedCorners val="1"/>
+  <c:style val="2"/>
   <c:chart>
     <c:autoTitleDeleted val="1"/>
     <c:plotArea>
+      <c:layout/>
       <c:barChart>
         <c:barDir val="bar"/>
         <c:grouping val="clustered"/>
+        <c:varyColors val="1"/>
         <c:ser>
           <c:idx val="0"/>
           <c:order val="0"/>
@@ -1775,6 +2327,44 @@
               </a:solidFill>
             </a:ln>
           </c:spPr>
+          <c:invertIfNegative val="1"/>
+          <c:dLbls>
+            <c:numFmt formatCode="0.00" sourceLinked="0"/>
+            <c:spPr>
+              <a:noFill/>
+              <a:ln>
+                <a:noFill/>
+              </a:ln>
+              <a:effectLst/>
+            </c:spPr>
+            <c:txPr>
+              <a:bodyPr/>
+              <a:lstStyle/>
+              <a:p>
+                <a:pPr>
+                  <a:defRPr sz="1200" b="1">
+                    <a:solidFill>
+                      <a:srgbClr val="1B1F24"/>
+                    </a:solidFill>
+                  </a:defRPr>
+                </a:pPr>
+                <a:endParaRPr lang="en-US"/>
+              </a:p>
+            </c:txPr>
+            <c:dLblPos val="outEnd"/>
+            <c:showLegendKey val="0"/>
+            <c:showVal val="1"/>
+            <c:showCatName val="0"/>
+            <c:showSerName val="0"/>
+            <c:showPercent val="0"/>
+            <c:showBubbleSize val="0"/>
+            <c:showLeaderLines val="0"/>
+            <c:extLst>
+              <c:ext xmlns:c15="http://schemas.microsoft.com/office/drawing/2012/chart" uri="{CE6537A1-D6FC-4f65-9D91-7224C49458BB}">
+                <c15:showLeaderLines val="0"/>
+              </c:ext>
+            </c:extLst>
+          </c:dLbls>
           <c:cat>
             <c:strRef>
               <c:f>Sheet1!$A$2:$A$7</c:f>
@@ -1828,22 +2418,27 @@
               </c:numCache>
             </c:numRef>
           </c:val>
+          <c:extLst>
+            <c:ext xmlns:c14="http://schemas.microsoft.com/office/drawing/2007/8/2/chart" uri="{6F2FDCE9-48DA-4B69-8628-5D25D57E5C99}">
+              <c14:invertSolidFillFmt>
+                <c14:spPr xmlns:c14="http://schemas.microsoft.com/office/drawing/2007/8/2/chart">
+                  <a:solidFill>
+                    <a:srgbClr val="FFFFFF"/>
+                  </a:solidFill>
+                  <a:ln w="19050">
+                    <a:solidFill>
+                      <a:srgbClr val="FFFFFF"/>
+                    </a:solidFill>
+                  </a:ln>
+                </c14:spPr>
+              </c14:invertSolidFillFmt>
+            </c:ext>
+            <c:ext xmlns:c16="http://schemas.microsoft.com/office/drawing/2014/chart" uri="{C3380CC4-5D6E-409C-BE32-E72D297353CC}">
+              <c16:uniqueId val="{00000000-D45B-4D13-9B27-4F43FF2DC410}"/>
+            </c:ext>
+          </c:extLst>
         </c:ser>
         <c:dLbls>
-          <c:numFmt formatCode="0.00" sourceLinked="0"/>
-          <c:txPr>
-            <a:bodyPr/>
-            <a:lstStyle/>
-            <a:p>
-              <a:pPr>
-                <a:defRPr sz="1200" b="1">
-                  <a:solidFill>
-                    <a:srgbClr val="1B1F24"/>
-                  </a:solidFill>
-                </a:defRPr>
-              </a:pPr>
-            </a:p>
-          </c:txPr>
           <c:dLblPos val="outEnd"/>
           <c:showLegendKey val="0"/>
           <c:showVal val="1"/>
@@ -1851,7 +2446,6 @@
           <c:showSerName val="0"/>
           <c:showPercent val="0"/>
           <c:showBubbleSize val="0"/>
-          <c:showLeaderLines val="1"/>
         </c:dLbls>
         <c:gapWidth val="50"/>
         <c:axId val="-2068027336"/>
@@ -1864,6 +2458,7 @@
         </c:scaling>
         <c:delete val="0"/>
         <c:axPos val="l"/>
+        <c:numFmt formatCode="General" sourceLinked="0"/>
         <c:majorTickMark val="out"/>
         <c:minorTickMark val="none"/>
         <c:tickLblPos val="nextTo"/>
@@ -1885,6 +2480,7 @@
                 </a:solidFill>
               </a:defRPr>
             </a:pPr>
+            <a:endParaRPr lang="en-US"/>
           </a:p>
         </c:txPr>
         <c:crossAx val="-2113994440"/>
@@ -1897,8 +2493,9 @@
       <c:valAx>
         <c:axId val="-2113994440"/>
         <c:scaling>
+          <c:orientation val="minMax"/>
           <c:max val="0.6"/>
-          <c:min val="0.0"/>
+          <c:min val="0"/>
         </c:scaling>
         <c:delete val="0"/>
         <c:axPos val="b"/>
@@ -1927,13 +2524,17 @@
             <a:pPr>
               <a:defRPr sz="1100"/>
             </a:pPr>
+            <a:endParaRPr lang="en-US"/>
           </a:p>
         </c:txPr>
         <c:crossAx val="-2068027336"/>
         <c:crosses val="autoZero"/>
+        <c:crossBetween val="between"/>
       </c:valAx>
     </c:plotArea>
+    <c:plotVisOnly val="1"/>
     <c:dispBlanksAs val="gap"/>
+    <c:showDLblsOverMax val="1"/>
   </c:chart>
   <c:txPr>
     <a:bodyPr/>
@@ -1957,7 +2558,7 @@
 </file>
 
 <file path=ppt/notesMasters/notesMaster1.xml><?xml version="1.0" encoding="utf-8"?>
-<p:notesMaster xmlns:a="http://schemas.openxmlformats.org/drawingml/2006/main" xmlns:p="http://schemas.openxmlformats.org/presentationml/2006/main" xmlns:r="http://schemas.openxmlformats.org/officeDocument/2006/relationships">
+<p:notesMaster xmlns:a="http://schemas.openxmlformats.org/drawingml/2006/main" xmlns:r="http://schemas.openxmlformats.org/officeDocument/2006/relationships" xmlns:p="http://schemas.openxmlformats.org/presentationml/2006/main">
   <p:cSld>
     <p:bg>
       <p:bgRef idx="1001">
@@ -1978,241 +2579,16 @@
           <a:chExt cx="0" cy="0"/>
         </a:xfrm>
       </p:grpSpPr>
-      <p:sp>
-        <p:nvSpPr>
-          <p:cNvPr id="2" name="Header Placeholder 1"/>
-          <p:cNvSpPr>
-            <a:spLocks noGrp="1"/>
-          </p:cNvSpPr>
-          <p:nvPr>
-            <p:ph type="hdr" sz="quarter"/>
-          </p:nvPr>
-        </p:nvSpPr>
-        <p:spPr>
-          <a:xfrm>
-            <a:off x="0" y="0"/>
-            <a:ext cx="2971800" cy="457200"/>
-          </a:xfrm>
-          <a:prstGeom prst="rect">
-            <a:avLst/>
-          </a:prstGeom>
-        </p:spPr>
-        <p:txBody>
-          <a:bodyPr vert="horz" lIns="91440" tIns="45720" rIns="91440" bIns="45720" rtlCol="0"/>
-          <a:lstStyle>
-            <a:lvl1pPr algn="l">
-              <a:defRPr sz="1200"/>
-            </a:lvl1pPr>
-          </a:lstStyle>
-          <a:p>
-            <a:endParaRPr lang="en-US"/>
-          </a:p>
-        </p:txBody>
-      </p:sp>
-      <p:sp>
-        <p:nvSpPr>
-          <p:cNvPr id="3" name="Date Placeholder 2"/>
-          <p:cNvSpPr>
-            <a:spLocks noGrp="1"/>
-          </p:cNvSpPr>
-          <p:nvPr>
-            <p:ph type="dt" idx="1"/>
-          </p:nvPr>
-        </p:nvSpPr>
-        <p:spPr>
-          <a:xfrm>
-            <a:off x="3884613" y="0"/>
-            <a:ext cx="2971800" cy="457200"/>
-          </a:xfrm>
-          <a:prstGeom prst="rect">
-            <a:avLst/>
-          </a:prstGeom>
-        </p:spPr>
-        <p:txBody>
-          <a:bodyPr vert="horz" lIns="91440" tIns="45720" rIns="91440" bIns="45720" rtlCol="0"/>
-          <a:lstStyle>
-            <a:lvl1pPr algn="r">
-              <a:defRPr sz="1200"/>
-            </a:lvl1pPr>
-          </a:lstStyle>
-          <a:p>
-            <a:fld id="{0F89C1C7-3DCD-1040-A9CF-14679D8B5DDD}" type="datetimeFigureOut">
-              <a:rPr lang="en-US" smtClean="0"/>
-              <a:t>10/17/16</a:t>
-            </a:fld>
-            <a:endParaRPr lang="en-US"/>
-          </a:p>
-        </p:txBody>
-      </p:sp>
-      <p:sp>
-        <p:nvSpPr>
-          <p:cNvPr id="4" name="Slide Image Placeholder 3"/>
-          <p:cNvSpPr>
-            <a:spLocks noGrp="1" noRot="1" noChangeAspect="1"/>
-          </p:cNvSpPr>
-          <p:nvPr>
-            <p:ph type="sldImg" idx="2"/>
-          </p:nvPr>
-        </p:nvSpPr>
-        <p:spPr>
-          <a:xfrm>
-            <a:off x="1143000" y="685800"/>
-            <a:ext cx="4572000" cy="3429000"/>
-          </a:xfrm>
-          <a:prstGeom prst="rect">
-            <a:avLst/>
-          </a:prstGeom>
-          <a:noFill/>
-          <a:ln w="12700">
-            <a:solidFill>
-              <a:prstClr val="black"/>
-            </a:solidFill>
-          </a:ln>
-        </p:spPr>
-        <p:txBody>
-          <a:bodyPr vert="horz" lIns="91440" tIns="45720" rIns="91440" bIns="45720" rtlCol="0" anchor="ctr"/>
-          <a:lstStyle/>
-          <a:p>
-            <a:endParaRPr lang="en-US"/>
-          </a:p>
-        </p:txBody>
-      </p:sp>
-      <p:sp>
-        <p:nvSpPr>
-          <p:cNvPr id="5" name="Notes Placeholder 4"/>
-          <p:cNvSpPr>
-            <a:spLocks noGrp="1"/>
-          </p:cNvSpPr>
-          <p:nvPr>
-            <p:ph type="body" sz="quarter" idx="3"/>
-          </p:nvPr>
-        </p:nvSpPr>
-        <p:spPr>
-          <a:xfrm>
-            <a:off x="685800" y="4343400"/>
-            <a:ext cx="5486400" cy="4114800"/>
-          </a:xfrm>
-          <a:prstGeom prst="rect">
-            <a:avLst/>
-          </a:prstGeom>
-        </p:spPr>
-        <p:txBody>
-          <a:bodyPr vert="horz" lIns="91440" tIns="45720" rIns="91440" bIns="45720" rtlCol="0"/>
-          <a:lstStyle/>
-          <a:p>
-            <a:pPr lvl="0"/>
-            <a:r>
-              <a:rPr lang="en-US" smtClean="0"/>
-              <a:t>Click to edit Master text styles</a:t>
-            </a:r>
-          </a:p>
-          <a:p>
-            <a:pPr lvl="1"/>
-            <a:r>
-              <a:rPr lang="en-US" smtClean="0"/>
-              <a:t>Second level</a:t>
-            </a:r>
-          </a:p>
-          <a:p>
-            <a:pPr lvl="2"/>
-            <a:r>
-              <a:rPr lang="en-US" smtClean="0"/>
-              <a:t>Third level</a:t>
-            </a:r>
-          </a:p>
-          <a:p>
-            <a:pPr lvl="3"/>
-            <a:r>
-              <a:rPr lang="en-US" smtClean="0"/>
-              <a:t>Fourth level</a:t>
-            </a:r>
-          </a:p>
-          <a:p>
-            <a:pPr lvl="4"/>
-            <a:r>
-              <a:rPr lang="en-US" smtClean="0"/>
-              <a:t>Fifth level</a:t>
-            </a:r>
-            <a:endParaRPr lang="en-US"/>
-          </a:p>
-        </p:txBody>
-      </p:sp>
-      <p:sp>
-        <p:nvSpPr>
-          <p:cNvPr id="6" name="Footer Placeholder 5"/>
-          <p:cNvSpPr>
-            <a:spLocks noGrp="1"/>
-          </p:cNvSpPr>
-          <p:nvPr>
-            <p:ph type="ftr" sz="quarter" idx="4"/>
-          </p:nvPr>
-        </p:nvSpPr>
-        <p:spPr>
-          <a:xfrm>
-            <a:off x="0" y="8685213"/>
-            <a:ext cx="2971800" cy="457200"/>
-          </a:xfrm>
-          <a:prstGeom prst="rect">
-            <a:avLst/>
-          </a:prstGeom>
-        </p:spPr>
-        <p:txBody>
-          <a:bodyPr vert="horz" lIns="91440" tIns="45720" rIns="91440" bIns="45720" rtlCol="0" anchor="b"/>
-          <a:lstStyle>
-            <a:lvl1pPr algn="l">
-              <a:defRPr sz="1200"/>
-            </a:lvl1pPr>
-          </a:lstStyle>
-          <a:p>
-            <a:endParaRPr lang="en-US"/>
-          </a:p>
-        </p:txBody>
-      </p:sp>
-      <p:sp>
-        <p:nvSpPr>
-          <p:cNvPr id="7" name="Slide Number Placeholder 6"/>
-          <p:cNvSpPr>
-            <a:spLocks noGrp="1"/>
-          </p:cNvSpPr>
-          <p:nvPr>
-            <p:ph type="sldNum" sz="quarter" idx="5"/>
-          </p:nvPr>
-        </p:nvSpPr>
-        <p:spPr>
-          <a:xfrm>
-            <a:off x="3884613" y="8685213"/>
-            <a:ext cx="2971800" cy="457200"/>
-          </a:xfrm>
-          <a:prstGeom prst="rect">
-            <a:avLst/>
-          </a:prstGeom>
-        </p:spPr>
-        <p:txBody>
-          <a:bodyPr vert="horz" lIns="91440" tIns="45720" rIns="91440" bIns="45720" rtlCol="0" anchor="b"/>
-          <a:lstStyle>
-            <a:lvl1pPr algn="r">
-              <a:defRPr sz="1200"/>
-            </a:lvl1pPr>
-          </a:lstStyle>
-          <a:p>
-            <a:fld id="{BB5E49A5-4136-284D-997B-48E1D791AD67}" type="slidenum">
-              <a:rPr lang="en-US" smtClean="0"/>
-              <a:t>‹#›</a:t>
-            </a:fld>
-            <a:endParaRPr lang="en-US"/>
-          </a:p>
-        </p:txBody>
-      </p:sp>
     </p:spTree>
     <p:extLst>
       <p:ext uri="{BB962C8B-B14F-4D97-AF65-F5344CB8AC3E}">
-        <p14:creationId xmlns:p14="http://schemas.microsoft.com/office/powerpoint/2010/main" val="2623252185"/>
+        <p14:creationId xmlns:p14="http://schemas.microsoft.com/office/powerpoint/2010/main" val="263618791"/>
       </p:ext>
     </p:extLst>
   </p:cSld>
   <p:clrMap bg1="lt1" tx1="dk1" bg2="lt2" tx2="dk2" accent1="accent1" accent2="accent2" accent3="accent3" accent4="accent4" accent5="accent5" accent6="accent6" hlink="hlink" folHlink="folHlink"/>
   <p:notesStyle>
-    <a:lvl1pPr marL="0" algn="l" defTabSz="457200" rtl="0" eaLnBrk="1" latinLnBrk="0" hangingPunct="1">
+    <a:lvl1pPr marL="0" algn="l" defTabSz="914400" rtl="0" eaLnBrk="1" latinLnBrk="0" hangingPunct="1">
       <a:defRPr sz="1200" kern="1200">
         <a:solidFill>
           <a:schemeClr val="tx1"/>
@@ -2222,7 +2598,7 @@
         <a:cs typeface="+mn-cs"/>
       </a:defRPr>
     </a:lvl1pPr>
-    <a:lvl2pPr marL="457200" algn="l" defTabSz="457200" rtl="0" eaLnBrk="1" latinLnBrk="0" hangingPunct="1">
+    <a:lvl2pPr marL="457200" algn="l" defTabSz="914400" rtl="0" eaLnBrk="1" latinLnBrk="0" hangingPunct="1">
       <a:defRPr sz="1200" kern="1200">
         <a:solidFill>
           <a:schemeClr val="tx1"/>
@@ -2232,7 +2608,7 @@
         <a:cs typeface="+mn-cs"/>
       </a:defRPr>
     </a:lvl2pPr>
-    <a:lvl3pPr marL="914400" algn="l" defTabSz="457200" rtl="0" eaLnBrk="1" latinLnBrk="0" hangingPunct="1">
+    <a:lvl3pPr marL="914400" algn="l" defTabSz="914400" rtl="0" eaLnBrk="1" latinLnBrk="0" hangingPunct="1">
       <a:defRPr sz="1200" kern="1200">
         <a:solidFill>
           <a:schemeClr val="tx1"/>
@@ -2242,7 +2618,7 @@
         <a:cs typeface="+mn-cs"/>
       </a:defRPr>
     </a:lvl3pPr>
-    <a:lvl4pPr marL="1371600" algn="l" defTabSz="457200" rtl="0" eaLnBrk="1" latinLnBrk="0" hangingPunct="1">
+    <a:lvl4pPr marL="1371600" algn="l" defTabSz="914400" rtl="0" eaLnBrk="1" latinLnBrk="0" hangingPunct="1">
       <a:defRPr sz="1200" kern="1200">
         <a:solidFill>
           <a:schemeClr val="tx1"/>
@@ -2252,7 +2628,7 @@
         <a:cs typeface="+mn-cs"/>
       </a:defRPr>
     </a:lvl4pPr>
-    <a:lvl5pPr marL="1828800" algn="l" defTabSz="457200" rtl="0" eaLnBrk="1" latinLnBrk="0" hangingPunct="1">
+    <a:lvl5pPr marL="1828800" algn="l" defTabSz="914400" rtl="0" eaLnBrk="1" latinLnBrk="0" hangingPunct="1">
       <a:defRPr sz="1200" kern="1200">
         <a:solidFill>
           <a:schemeClr val="tx1"/>
@@ -2262,7 +2638,7 @@
         <a:cs typeface="+mn-cs"/>
       </a:defRPr>
     </a:lvl5pPr>
-    <a:lvl6pPr marL="2286000" algn="l" defTabSz="457200" rtl="0" eaLnBrk="1" latinLnBrk="0" hangingPunct="1">
+    <a:lvl6pPr marL="2286000" algn="l" defTabSz="914400" rtl="0" eaLnBrk="1" latinLnBrk="0" hangingPunct="1">
       <a:defRPr sz="1200" kern="1200">
         <a:solidFill>
           <a:schemeClr val="tx1"/>
@@ -2272,7 +2648,7 @@
         <a:cs typeface="+mn-cs"/>
       </a:defRPr>
     </a:lvl6pPr>
-    <a:lvl7pPr marL="2743200" algn="l" defTabSz="457200" rtl="0" eaLnBrk="1" latinLnBrk="0" hangingPunct="1">
+    <a:lvl7pPr marL="2743200" algn="l" defTabSz="914400" rtl="0" eaLnBrk="1" latinLnBrk="0" hangingPunct="1">
       <a:defRPr sz="1200" kern="1200">
         <a:solidFill>
           <a:schemeClr val="tx1"/>
@@ -2282,7 +2658,7 @@
         <a:cs typeface="+mn-cs"/>
       </a:defRPr>
     </a:lvl7pPr>
-    <a:lvl8pPr marL="3200400" algn="l" defTabSz="457200" rtl="0" eaLnBrk="1" latinLnBrk="0" hangingPunct="1">
+    <a:lvl8pPr marL="3200400" algn="l" defTabSz="914400" rtl="0" eaLnBrk="1" latinLnBrk="0" hangingPunct="1">
       <a:defRPr sz="1200" kern="1200">
         <a:solidFill>
           <a:schemeClr val="tx1"/>
@@ -2292,7 +2668,7 @@
         <a:cs typeface="+mn-cs"/>
       </a:defRPr>
     </a:lvl8pPr>
-    <a:lvl9pPr marL="3657600" algn="l" defTabSz="457200" rtl="0" eaLnBrk="1" latinLnBrk="0" hangingPunct="1">
+    <a:lvl9pPr marL="3657600" algn="l" defTabSz="914400" rtl="0" eaLnBrk="1" latinLnBrk="0" hangingPunct="1">
       <a:defRPr sz="1200" kern="1200">
         <a:solidFill>
           <a:schemeClr val="tx1"/>
@@ -2307,7 +2683,7 @@
 </file>
 
 <file path=ppt/notesSlides/notesSlide1.xml><?xml version="1.0" encoding="utf-8"?>
-<p:notes xmlns:a="http://schemas.openxmlformats.org/drawingml/2006/main" xmlns:p="http://schemas.openxmlformats.org/presentationml/2006/main" xmlns:r="http://schemas.openxmlformats.org/officeDocument/2006/relationships">
+<p:notes xmlns:a="http://schemas.openxmlformats.org/drawingml/2006/main" xmlns:r="http://schemas.openxmlformats.org/officeDocument/2006/relationships" xmlns:p="http://schemas.openxmlformats.org/presentationml/2006/main">
   <p:cSld>
     <p:spTree>
       <p:nvGrpSpPr>
@@ -2327,7 +2703,7 @@
         <p:nvSpPr>
           <p:cNvPr id="2" name="Slide Image Placeholder 1"/>
           <p:cNvSpPr>
-            <a:spLocks noGrp="1"/>
+            <a:spLocks noGrp="1" noRot="1" noChangeAspect="1"/>
           </p:cNvSpPr>
           <p:nvPr>
             <p:ph type="sldImg" idx="2"/>
@@ -2342,7 +2718,7 @@
             <a:spLocks noGrp="1"/>
           </p:cNvSpPr>
           <p:nvPr>
-            <p:ph type="body" idx="3" sz="quarter"/>
+            <p:ph type="body" sz="quarter" idx="3"/>
           </p:nvPr>
         </p:nvSpPr>
         <p:spPr/>
@@ -2363,7 +2739,7 @@
             <a:spLocks noGrp="1"/>
           </p:cNvSpPr>
           <p:nvPr>
-            <p:ph type="sldNum" idx="5" sz="quarter"/>
+            <p:ph type="sldNum" sz="quarter" idx="5"/>
           </p:nvPr>
         </p:nvSpPr>
         <p:spPr/>
@@ -2377,7 +2753,7 @@
 </file>
 
 <file path=ppt/notesSlides/notesSlide10.xml><?xml version="1.0" encoding="utf-8"?>
-<p:notes xmlns:a="http://schemas.openxmlformats.org/drawingml/2006/main" xmlns:p="http://schemas.openxmlformats.org/presentationml/2006/main" xmlns:r="http://schemas.openxmlformats.org/officeDocument/2006/relationships">
+<p:notes xmlns:a="http://schemas.openxmlformats.org/drawingml/2006/main" xmlns:r="http://schemas.openxmlformats.org/officeDocument/2006/relationships" xmlns:p="http://schemas.openxmlformats.org/presentationml/2006/main">
   <p:cSld>
     <p:spTree>
       <p:nvGrpSpPr>
@@ -2397,7 +2773,7 @@
         <p:nvSpPr>
           <p:cNvPr id="2" name="Slide Image Placeholder 1"/>
           <p:cNvSpPr>
-            <a:spLocks noGrp="1"/>
+            <a:spLocks noGrp="1" noRot="1" noChangeAspect="1"/>
           </p:cNvSpPr>
           <p:nvPr>
             <p:ph type="sldImg" idx="2"/>
@@ -2412,7 +2788,7 @@
             <a:spLocks noGrp="1"/>
           </p:cNvSpPr>
           <p:nvPr>
-            <p:ph type="body" idx="3" sz="quarter"/>
+            <p:ph type="body" sz="quarter" idx="3"/>
           </p:nvPr>
         </p:nvSpPr>
         <p:spPr/>
@@ -2433,7 +2809,7 @@
             <a:spLocks noGrp="1"/>
           </p:cNvSpPr>
           <p:nvPr>
-            <p:ph type="sldNum" idx="5" sz="quarter"/>
+            <p:ph type="sldNum" sz="quarter" idx="5"/>
           </p:nvPr>
         </p:nvSpPr>
         <p:spPr/>
@@ -2447,7 +2823,7 @@
 </file>
 
 <file path=ppt/notesSlides/notesSlide11.xml><?xml version="1.0" encoding="utf-8"?>
-<p:notes xmlns:a="http://schemas.openxmlformats.org/drawingml/2006/main" xmlns:p="http://schemas.openxmlformats.org/presentationml/2006/main" xmlns:r="http://schemas.openxmlformats.org/officeDocument/2006/relationships">
+<p:notes xmlns:a="http://schemas.openxmlformats.org/drawingml/2006/main" xmlns:r="http://schemas.openxmlformats.org/officeDocument/2006/relationships" xmlns:p="http://schemas.openxmlformats.org/presentationml/2006/main">
   <p:cSld>
     <p:spTree>
       <p:nvGrpSpPr>
@@ -2467,7 +2843,7 @@
         <p:nvSpPr>
           <p:cNvPr id="2" name="Slide Image Placeholder 1"/>
           <p:cNvSpPr>
-            <a:spLocks noGrp="1"/>
+            <a:spLocks noGrp="1" noRot="1" noChangeAspect="1"/>
           </p:cNvSpPr>
           <p:nvPr>
             <p:ph type="sldImg" idx="2"/>
@@ -2482,7 +2858,7 @@
             <a:spLocks noGrp="1"/>
           </p:cNvSpPr>
           <p:nvPr>
-            <p:ph type="body" idx="3" sz="quarter"/>
+            <p:ph type="body" sz="quarter" idx="3"/>
           </p:nvPr>
         </p:nvSpPr>
         <p:spPr/>
@@ -2503,7 +2879,7 @@
             <a:spLocks noGrp="1"/>
           </p:cNvSpPr>
           <p:nvPr>
-            <p:ph type="sldNum" idx="5" sz="quarter"/>
+            <p:ph type="sldNum" sz="quarter" idx="5"/>
           </p:nvPr>
         </p:nvSpPr>
         <p:spPr/>
@@ -2517,7 +2893,7 @@
 </file>
 
 <file path=ppt/notesSlides/notesSlide12.xml><?xml version="1.0" encoding="utf-8"?>
-<p:notes xmlns:a="http://schemas.openxmlformats.org/drawingml/2006/main" xmlns:p="http://schemas.openxmlformats.org/presentationml/2006/main" xmlns:r="http://schemas.openxmlformats.org/officeDocument/2006/relationships">
+<p:notes xmlns:a="http://schemas.openxmlformats.org/drawingml/2006/main" xmlns:r="http://schemas.openxmlformats.org/officeDocument/2006/relationships" xmlns:p="http://schemas.openxmlformats.org/presentationml/2006/main">
   <p:cSld>
     <p:spTree>
       <p:nvGrpSpPr>
@@ -2537,7 +2913,7 @@
         <p:nvSpPr>
           <p:cNvPr id="2" name="Slide Image Placeholder 1"/>
           <p:cNvSpPr>
-            <a:spLocks noGrp="1"/>
+            <a:spLocks noGrp="1" noRot="1" noChangeAspect="1"/>
           </p:cNvSpPr>
           <p:nvPr>
             <p:ph type="sldImg" idx="2"/>
@@ -2552,7 +2928,7 @@
             <a:spLocks noGrp="1"/>
           </p:cNvSpPr>
           <p:nvPr>
-            <p:ph type="body" idx="3" sz="quarter"/>
+            <p:ph type="body" sz="quarter" idx="3"/>
           </p:nvPr>
         </p:nvSpPr>
         <p:spPr/>
@@ -2573,7 +2949,7 @@
             <a:spLocks noGrp="1"/>
           </p:cNvSpPr>
           <p:nvPr>
-            <p:ph type="sldNum" idx="5" sz="quarter"/>
+            <p:ph type="sldNum" sz="quarter" idx="5"/>
           </p:nvPr>
         </p:nvSpPr>
         <p:spPr/>
@@ -2587,7 +2963,7 @@
 </file>
 
 <file path=ppt/notesSlides/notesSlide13.xml><?xml version="1.0" encoding="utf-8"?>
-<p:notes xmlns:a="http://schemas.openxmlformats.org/drawingml/2006/main" xmlns:p="http://schemas.openxmlformats.org/presentationml/2006/main" xmlns:r="http://schemas.openxmlformats.org/officeDocument/2006/relationships">
+<p:notes xmlns:a="http://schemas.openxmlformats.org/drawingml/2006/main" xmlns:r="http://schemas.openxmlformats.org/officeDocument/2006/relationships" xmlns:p="http://schemas.openxmlformats.org/presentationml/2006/main">
   <p:cSld>
     <p:spTree>
       <p:nvGrpSpPr>
@@ -2607,7 +2983,7 @@
         <p:nvSpPr>
           <p:cNvPr id="2" name="Slide Image Placeholder 1"/>
           <p:cNvSpPr>
-            <a:spLocks noGrp="1"/>
+            <a:spLocks noGrp="1" noRot="1" noChangeAspect="1"/>
           </p:cNvSpPr>
           <p:nvPr>
             <p:ph type="sldImg" idx="2"/>
@@ -2622,7 +2998,7 @@
             <a:spLocks noGrp="1"/>
           </p:cNvSpPr>
           <p:nvPr>
-            <p:ph type="body" idx="3" sz="quarter"/>
+            <p:ph type="body" sz="quarter" idx="3"/>
           </p:nvPr>
         </p:nvSpPr>
         <p:spPr/>
@@ -2643,7 +3019,7 @@
             <a:spLocks noGrp="1"/>
           </p:cNvSpPr>
           <p:nvPr>
-            <p:ph type="sldNum" idx="5" sz="quarter"/>
+            <p:ph type="sldNum" sz="quarter" idx="5"/>
           </p:nvPr>
         </p:nvSpPr>
         <p:spPr/>
@@ -2657,7 +3033,7 @@
 </file>
 
 <file path=ppt/notesSlides/notesSlide14.xml><?xml version="1.0" encoding="utf-8"?>
-<p:notes xmlns:a="http://schemas.openxmlformats.org/drawingml/2006/main" xmlns:p="http://schemas.openxmlformats.org/presentationml/2006/main" xmlns:r="http://schemas.openxmlformats.org/officeDocument/2006/relationships">
+<p:notes xmlns:a="http://schemas.openxmlformats.org/drawingml/2006/main" xmlns:r="http://schemas.openxmlformats.org/officeDocument/2006/relationships" xmlns:p="http://schemas.openxmlformats.org/presentationml/2006/main">
   <p:cSld>
     <p:spTree>
       <p:nvGrpSpPr>
@@ -2677,7 +3053,7 @@
         <p:nvSpPr>
           <p:cNvPr id="2" name="Slide Image Placeholder 1"/>
           <p:cNvSpPr>
-            <a:spLocks noGrp="1"/>
+            <a:spLocks noGrp="1" noRot="1" noChangeAspect="1"/>
           </p:cNvSpPr>
           <p:nvPr>
             <p:ph type="sldImg" idx="2"/>
@@ -2692,7 +3068,7 @@
             <a:spLocks noGrp="1"/>
           </p:cNvSpPr>
           <p:nvPr>
-            <p:ph type="body" idx="3" sz="quarter"/>
+            <p:ph type="body" sz="quarter" idx="3"/>
           </p:nvPr>
         </p:nvSpPr>
         <p:spPr/>
@@ -2713,7 +3089,7 @@
             <a:spLocks noGrp="1"/>
           </p:cNvSpPr>
           <p:nvPr>
-            <p:ph type="sldNum" idx="5" sz="quarter"/>
+            <p:ph type="sldNum" sz="quarter" idx="5"/>
           </p:nvPr>
         </p:nvSpPr>
         <p:spPr/>
@@ -2727,7 +3103,7 @@
 </file>
 
 <file path=ppt/notesSlides/notesSlide15.xml><?xml version="1.0" encoding="utf-8"?>
-<p:notes xmlns:a="http://schemas.openxmlformats.org/drawingml/2006/main" xmlns:p="http://schemas.openxmlformats.org/presentationml/2006/main" xmlns:r="http://schemas.openxmlformats.org/officeDocument/2006/relationships">
+<p:notes xmlns:a="http://schemas.openxmlformats.org/drawingml/2006/main" xmlns:r="http://schemas.openxmlformats.org/officeDocument/2006/relationships" xmlns:p="http://schemas.openxmlformats.org/presentationml/2006/main">
   <p:cSld>
     <p:spTree>
       <p:nvGrpSpPr>
@@ -2747,7 +3123,7 @@
         <p:nvSpPr>
           <p:cNvPr id="2" name="Slide Image Placeholder 1"/>
           <p:cNvSpPr>
-            <a:spLocks noGrp="1"/>
+            <a:spLocks noGrp="1" noRot="1" noChangeAspect="1"/>
           </p:cNvSpPr>
           <p:nvPr>
             <p:ph type="sldImg" idx="2"/>
@@ -2762,7 +3138,7 @@
             <a:spLocks noGrp="1"/>
           </p:cNvSpPr>
           <p:nvPr>
-            <p:ph type="body" idx="3" sz="quarter"/>
+            <p:ph type="body" sz="quarter" idx="3"/>
           </p:nvPr>
         </p:nvSpPr>
         <p:spPr/>
@@ -2783,7 +3159,7 @@
             <a:spLocks noGrp="1"/>
           </p:cNvSpPr>
           <p:nvPr>
-            <p:ph type="sldNum" idx="5" sz="quarter"/>
+            <p:ph type="sldNum" sz="quarter" idx="5"/>
           </p:nvPr>
         </p:nvSpPr>
         <p:spPr/>
@@ -2797,7 +3173,7 @@
 </file>
 
 <file path=ppt/notesSlides/notesSlide16.xml><?xml version="1.0" encoding="utf-8"?>
-<p:notes xmlns:a="http://schemas.openxmlformats.org/drawingml/2006/main" xmlns:p="http://schemas.openxmlformats.org/presentationml/2006/main" xmlns:r="http://schemas.openxmlformats.org/officeDocument/2006/relationships">
+<p:notes xmlns:a="http://schemas.openxmlformats.org/drawingml/2006/main" xmlns:r="http://schemas.openxmlformats.org/officeDocument/2006/relationships" xmlns:p="http://schemas.openxmlformats.org/presentationml/2006/main">
   <p:cSld>
     <p:spTree>
       <p:nvGrpSpPr>
@@ -2817,7 +3193,7 @@
         <p:nvSpPr>
           <p:cNvPr id="2" name="Slide Image Placeholder 1"/>
           <p:cNvSpPr>
-            <a:spLocks noGrp="1"/>
+            <a:spLocks noGrp="1" noRot="1" noChangeAspect="1"/>
           </p:cNvSpPr>
           <p:nvPr>
             <p:ph type="sldImg" idx="2"/>
@@ -2832,7 +3208,7 @@
             <a:spLocks noGrp="1"/>
           </p:cNvSpPr>
           <p:nvPr>
-            <p:ph type="body" idx="3" sz="quarter"/>
+            <p:ph type="body" sz="quarter" idx="3"/>
           </p:nvPr>
         </p:nvSpPr>
         <p:spPr/>
@@ -2853,7 +3229,7 @@
             <a:spLocks noGrp="1"/>
           </p:cNvSpPr>
           <p:nvPr>
-            <p:ph type="sldNum" idx="5" sz="quarter"/>
+            <p:ph type="sldNum" sz="quarter" idx="5"/>
           </p:nvPr>
         </p:nvSpPr>
         <p:spPr/>
@@ -2867,7 +3243,7 @@
 </file>
 
 <file path=ppt/notesSlides/notesSlide17.xml><?xml version="1.0" encoding="utf-8"?>
-<p:notes xmlns:a="http://schemas.openxmlformats.org/drawingml/2006/main" xmlns:p="http://schemas.openxmlformats.org/presentationml/2006/main" xmlns:r="http://schemas.openxmlformats.org/officeDocument/2006/relationships">
+<p:notes xmlns:a="http://schemas.openxmlformats.org/drawingml/2006/main" xmlns:r="http://schemas.openxmlformats.org/officeDocument/2006/relationships" xmlns:p="http://schemas.openxmlformats.org/presentationml/2006/main">
   <p:cSld>
     <p:spTree>
       <p:nvGrpSpPr>
@@ -2887,7 +3263,7 @@
         <p:nvSpPr>
           <p:cNvPr id="2" name="Slide Image Placeholder 1"/>
           <p:cNvSpPr>
-            <a:spLocks noGrp="1"/>
+            <a:spLocks noGrp="1" noRot="1" noChangeAspect="1"/>
           </p:cNvSpPr>
           <p:nvPr>
             <p:ph type="sldImg" idx="2"/>
@@ -2902,7 +3278,7 @@
             <a:spLocks noGrp="1"/>
           </p:cNvSpPr>
           <p:nvPr>
-            <p:ph type="body" idx="3" sz="quarter"/>
+            <p:ph type="body" sz="quarter" idx="3"/>
           </p:nvPr>
         </p:nvSpPr>
         <p:spPr/>
@@ -2923,7 +3299,7 @@
             <a:spLocks noGrp="1"/>
           </p:cNvSpPr>
           <p:nvPr>
-            <p:ph type="sldNum" idx="5" sz="quarter"/>
+            <p:ph type="sldNum" sz="quarter" idx="5"/>
           </p:nvPr>
         </p:nvSpPr>
         <p:spPr/>
@@ -2937,7 +3313,7 @@
 </file>
 
 <file path=ppt/notesSlides/notesSlide2.xml><?xml version="1.0" encoding="utf-8"?>
-<p:notes xmlns:a="http://schemas.openxmlformats.org/drawingml/2006/main" xmlns:p="http://schemas.openxmlformats.org/presentationml/2006/main" xmlns:r="http://schemas.openxmlformats.org/officeDocument/2006/relationships">
+<p:notes xmlns:a="http://schemas.openxmlformats.org/drawingml/2006/main" xmlns:r="http://schemas.openxmlformats.org/officeDocument/2006/relationships" xmlns:p="http://schemas.openxmlformats.org/presentationml/2006/main">
   <p:cSld>
     <p:spTree>
       <p:nvGrpSpPr>
@@ -2957,7 +3333,7 @@
         <p:nvSpPr>
           <p:cNvPr id="2" name="Slide Image Placeholder 1"/>
           <p:cNvSpPr>
-            <a:spLocks noGrp="1"/>
+            <a:spLocks noGrp="1" noRot="1" noChangeAspect="1"/>
           </p:cNvSpPr>
           <p:nvPr>
             <p:ph type="sldImg" idx="2"/>
@@ -2972,7 +3348,7 @@
             <a:spLocks noGrp="1"/>
           </p:cNvSpPr>
           <p:nvPr>
-            <p:ph type="body" idx="3" sz="quarter"/>
+            <p:ph type="body" sz="quarter" idx="3"/>
           </p:nvPr>
         </p:nvSpPr>
         <p:spPr/>
@@ -2993,7 +3369,7 @@
             <a:spLocks noGrp="1"/>
           </p:cNvSpPr>
           <p:nvPr>
-            <p:ph type="sldNum" idx="5" sz="quarter"/>
+            <p:ph type="sldNum" sz="quarter" idx="5"/>
           </p:nvPr>
         </p:nvSpPr>
         <p:spPr/>
@@ -3007,7 +3383,7 @@
 </file>
 
 <file path=ppt/notesSlides/notesSlide3.xml><?xml version="1.0" encoding="utf-8"?>
-<p:notes xmlns:a="http://schemas.openxmlformats.org/drawingml/2006/main" xmlns:p="http://schemas.openxmlformats.org/presentationml/2006/main" xmlns:r="http://schemas.openxmlformats.org/officeDocument/2006/relationships">
+<p:notes xmlns:a="http://schemas.openxmlformats.org/drawingml/2006/main" xmlns:r="http://schemas.openxmlformats.org/officeDocument/2006/relationships" xmlns:p="http://schemas.openxmlformats.org/presentationml/2006/main">
   <p:cSld>
     <p:spTree>
       <p:nvGrpSpPr>
@@ -3027,7 +3403,7 @@
         <p:nvSpPr>
           <p:cNvPr id="2" name="Slide Image Placeholder 1"/>
           <p:cNvSpPr>
-            <a:spLocks noGrp="1"/>
+            <a:spLocks noGrp="1" noRot="1" noChangeAspect="1"/>
           </p:cNvSpPr>
           <p:nvPr>
             <p:ph type="sldImg" idx="2"/>
@@ -3042,7 +3418,7 @@
             <a:spLocks noGrp="1"/>
           </p:cNvSpPr>
           <p:nvPr>
-            <p:ph type="body" idx="3" sz="quarter"/>
+            <p:ph type="body" sz="quarter" idx="3"/>
           </p:nvPr>
         </p:nvSpPr>
         <p:spPr/>
@@ -3063,7 +3439,7 @@
             <a:spLocks noGrp="1"/>
           </p:cNvSpPr>
           <p:nvPr>
-            <p:ph type="sldNum" idx="5" sz="quarter"/>
+            <p:ph type="sldNum" sz="quarter" idx="5"/>
           </p:nvPr>
         </p:nvSpPr>
         <p:spPr/>
@@ -3077,7 +3453,7 @@
 </file>
 
 <file path=ppt/notesSlides/notesSlide4.xml><?xml version="1.0" encoding="utf-8"?>
-<p:notes xmlns:a="http://schemas.openxmlformats.org/drawingml/2006/main" xmlns:p="http://schemas.openxmlformats.org/presentationml/2006/main" xmlns:r="http://schemas.openxmlformats.org/officeDocument/2006/relationships">
+<p:notes xmlns:a="http://schemas.openxmlformats.org/drawingml/2006/main" xmlns:r="http://schemas.openxmlformats.org/officeDocument/2006/relationships" xmlns:p="http://schemas.openxmlformats.org/presentationml/2006/main">
   <p:cSld>
     <p:spTree>
       <p:nvGrpSpPr>
@@ -3097,7 +3473,7 @@
         <p:nvSpPr>
           <p:cNvPr id="2" name="Slide Image Placeholder 1"/>
           <p:cNvSpPr>
-            <a:spLocks noGrp="1"/>
+            <a:spLocks noGrp="1" noRot="1" noChangeAspect="1"/>
           </p:cNvSpPr>
           <p:nvPr>
             <p:ph type="sldImg" idx="2"/>
@@ -3112,7 +3488,7 @@
             <a:spLocks noGrp="1"/>
           </p:cNvSpPr>
           <p:nvPr>
-            <p:ph type="body" idx="3" sz="quarter"/>
+            <p:ph type="body" sz="quarter" idx="3"/>
           </p:nvPr>
         </p:nvSpPr>
         <p:spPr/>
@@ -3133,7 +3509,7 @@
             <a:spLocks noGrp="1"/>
           </p:cNvSpPr>
           <p:nvPr>
-            <p:ph type="sldNum" idx="5" sz="quarter"/>
+            <p:ph type="sldNum" sz="quarter" idx="5"/>
           </p:nvPr>
         </p:nvSpPr>
         <p:spPr/>
@@ -3147,7 +3523,7 @@
 </file>
 
 <file path=ppt/notesSlides/notesSlide5.xml><?xml version="1.0" encoding="utf-8"?>
-<p:notes xmlns:a="http://schemas.openxmlformats.org/drawingml/2006/main" xmlns:p="http://schemas.openxmlformats.org/presentationml/2006/main" xmlns:r="http://schemas.openxmlformats.org/officeDocument/2006/relationships">
+<p:notes xmlns:a="http://schemas.openxmlformats.org/drawingml/2006/main" xmlns:r="http://schemas.openxmlformats.org/officeDocument/2006/relationships" xmlns:p="http://schemas.openxmlformats.org/presentationml/2006/main">
   <p:cSld>
     <p:spTree>
       <p:nvGrpSpPr>
@@ -3167,7 +3543,7 @@
         <p:nvSpPr>
           <p:cNvPr id="2" name="Slide Image Placeholder 1"/>
           <p:cNvSpPr>
-            <a:spLocks noGrp="1"/>
+            <a:spLocks noGrp="1" noRot="1" noChangeAspect="1"/>
           </p:cNvSpPr>
           <p:nvPr>
             <p:ph type="sldImg" idx="2"/>
@@ -3182,7 +3558,7 @@
             <a:spLocks noGrp="1"/>
           </p:cNvSpPr>
           <p:nvPr>
-            <p:ph type="body" idx="3" sz="quarter"/>
+            <p:ph type="body" sz="quarter" idx="3"/>
           </p:nvPr>
         </p:nvSpPr>
         <p:spPr/>
@@ -3203,7 +3579,7 @@
             <a:spLocks noGrp="1"/>
           </p:cNvSpPr>
           <p:nvPr>
-            <p:ph type="sldNum" idx="5" sz="quarter"/>
+            <p:ph type="sldNum" sz="quarter" idx="5"/>
           </p:nvPr>
         </p:nvSpPr>
         <p:spPr/>
@@ -3217,7 +3593,7 @@
 </file>
 
 <file path=ppt/notesSlides/notesSlide6.xml><?xml version="1.0" encoding="utf-8"?>
-<p:notes xmlns:a="http://schemas.openxmlformats.org/drawingml/2006/main" xmlns:p="http://schemas.openxmlformats.org/presentationml/2006/main" xmlns:r="http://schemas.openxmlformats.org/officeDocument/2006/relationships">
+<p:notes xmlns:a="http://schemas.openxmlformats.org/drawingml/2006/main" xmlns:r="http://schemas.openxmlformats.org/officeDocument/2006/relationships" xmlns:p="http://schemas.openxmlformats.org/presentationml/2006/main">
   <p:cSld>
     <p:spTree>
       <p:nvGrpSpPr>
@@ -3237,7 +3613,7 @@
         <p:nvSpPr>
           <p:cNvPr id="2" name="Slide Image Placeholder 1"/>
           <p:cNvSpPr>
-            <a:spLocks noGrp="1"/>
+            <a:spLocks noGrp="1" noRot="1" noChangeAspect="1"/>
           </p:cNvSpPr>
           <p:nvPr>
             <p:ph type="sldImg" idx="2"/>
@@ -3252,7 +3628,7 @@
             <a:spLocks noGrp="1"/>
           </p:cNvSpPr>
           <p:nvPr>
-            <p:ph type="body" idx="3" sz="quarter"/>
+            <p:ph type="body" sz="quarter" idx="3"/>
           </p:nvPr>
         </p:nvSpPr>
         <p:spPr/>
@@ -3273,7 +3649,7 @@
             <a:spLocks noGrp="1"/>
           </p:cNvSpPr>
           <p:nvPr>
-            <p:ph type="sldNum" idx="5" sz="quarter"/>
+            <p:ph type="sldNum" sz="quarter" idx="5"/>
           </p:nvPr>
         </p:nvSpPr>
         <p:spPr/>
@@ -3287,7 +3663,7 @@
 </file>
 
 <file path=ppt/notesSlides/notesSlide7.xml><?xml version="1.0" encoding="utf-8"?>
-<p:notes xmlns:a="http://schemas.openxmlformats.org/drawingml/2006/main" xmlns:p="http://schemas.openxmlformats.org/presentationml/2006/main" xmlns:r="http://schemas.openxmlformats.org/officeDocument/2006/relationships">
+<p:notes xmlns:a="http://schemas.openxmlformats.org/drawingml/2006/main" xmlns:r="http://schemas.openxmlformats.org/officeDocument/2006/relationships" xmlns:p="http://schemas.openxmlformats.org/presentationml/2006/main">
   <p:cSld>
     <p:spTree>
       <p:nvGrpSpPr>
@@ -3307,7 +3683,7 @@
         <p:nvSpPr>
           <p:cNvPr id="2" name="Slide Image Placeholder 1"/>
           <p:cNvSpPr>
-            <a:spLocks noGrp="1"/>
+            <a:spLocks noGrp="1" noRot="1" noChangeAspect="1"/>
           </p:cNvSpPr>
           <p:nvPr>
             <p:ph type="sldImg" idx="2"/>
@@ -3322,7 +3698,7 @@
             <a:spLocks noGrp="1"/>
           </p:cNvSpPr>
           <p:nvPr>
-            <p:ph type="body" idx="3" sz="quarter"/>
+            <p:ph type="body" sz="quarter" idx="3"/>
           </p:nvPr>
         </p:nvSpPr>
         <p:spPr/>
@@ -3343,7 +3719,7 @@
             <a:spLocks noGrp="1"/>
           </p:cNvSpPr>
           <p:nvPr>
-            <p:ph type="sldNum" idx="5" sz="quarter"/>
+            <p:ph type="sldNum" sz="quarter" idx="5"/>
           </p:nvPr>
         </p:nvSpPr>
         <p:spPr/>
@@ -3357,7 +3733,7 @@
 </file>
 
 <file path=ppt/notesSlides/notesSlide8.xml><?xml version="1.0" encoding="utf-8"?>
-<p:notes xmlns:a="http://schemas.openxmlformats.org/drawingml/2006/main" xmlns:p="http://schemas.openxmlformats.org/presentationml/2006/main" xmlns:r="http://schemas.openxmlformats.org/officeDocument/2006/relationships">
+<p:notes xmlns:a="http://schemas.openxmlformats.org/drawingml/2006/main" xmlns:r="http://schemas.openxmlformats.org/officeDocument/2006/relationships" xmlns:p="http://schemas.openxmlformats.org/presentationml/2006/main">
   <p:cSld>
     <p:spTree>
       <p:nvGrpSpPr>
@@ -3377,7 +3753,7 @@
         <p:nvSpPr>
           <p:cNvPr id="2" name="Slide Image Placeholder 1"/>
           <p:cNvSpPr>
-            <a:spLocks noGrp="1"/>
+            <a:spLocks noGrp="1" noRot="1" noChangeAspect="1"/>
           </p:cNvSpPr>
           <p:nvPr>
             <p:ph type="sldImg" idx="2"/>
@@ -3392,7 +3768,7 @@
             <a:spLocks noGrp="1"/>
           </p:cNvSpPr>
           <p:nvPr>
-            <p:ph type="body" idx="3" sz="quarter"/>
+            <p:ph type="body" sz="quarter" idx="3"/>
           </p:nvPr>
         </p:nvSpPr>
         <p:spPr/>
@@ -3413,7 +3789,7 @@
             <a:spLocks noGrp="1"/>
           </p:cNvSpPr>
           <p:nvPr>
-            <p:ph type="sldNum" idx="5" sz="quarter"/>
+            <p:ph type="sldNum" sz="quarter" idx="5"/>
           </p:nvPr>
         </p:nvSpPr>
         <p:spPr/>
@@ -3427,7 +3803,7 @@
 </file>
 
 <file path=ppt/notesSlides/notesSlide9.xml><?xml version="1.0" encoding="utf-8"?>
-<p:notes xmlns:a="http://schemas.openxmlformats.org/drawingml/2006/main" xmlns:p="http://schemas.openxmlformats.org/presentationml/2006/main" xmlns:r="http://schemas.openxmlformats.org/officeDocument/2006/relationships">
+<p:notes xmlns:a="http://schemas.openxmlformats.org/drawingml/2006/main" xmlns:r="http://schemas.openxmlformats.org/officeDocument/2006/relationships" xmlns:p="http://schemas.openxmlformats.org/presentationml/2006/main">
   <p:cSld>
     <p:spTree>
       <p:nvGrpSpPr>
@@ -3447,7 +3823,7 @@
         <p:nvSpPr>
           <p:cNvPr id="2" name="Slide Image Placeholder 1"/>
           <p:cNvSpPr>
-            <a:spLocks noGrp="1"/>
+            <a:spLocks noGrp="1" noRot="1" noChangeAspect="1"/>
           </p:cNvSpPr>
           <p:nvPr>
             <p:ph type="sldImg" idx="2"/>
@@ -3462,7 +3838,7 @@
             <a:spLocks noGrp="1"/>
           </p:cNvSpPr>
           <p:nvPr>
-            <p:ph type="body" idx="3" sz="quarter"/>
+            <p:ph type="body" sz="quarter" idx="3"/>
           </p:nvPr>
         </p:nvSpPr>
         <p:spPr/>
@@ -3483,7 +3859,7 @@
             <a:spLocks noGrp="1"/>
           </p:cNvSpPr>
           <p:nvPr>
-            <p:ph type="sldNum" idx="5" sz="quarter"/>
+            <p:ph type="sldNum" sz="quarter" idx="5"/>
           </p:nvPr>
         </p:nvSpPr>
         <p:spPr/>
@@ -3534,10 +3910,9 @@
           <a:lstStyle/>
           <a:p>
             <a:r>
-              <a:rPr lang="en-US" smtClean="0"/>
+              <a:rPr lang="en-US"/>
               <a:t>Click to edit Master title style</a:t>
             </a:r>
-            <a:endParaRPr lang="en-US"/>
           </a:p>
         </p:txBody>
       </p:sp>
@@ -3653,10 +4028,9 @@
           </a:lstStyle>
           <a:p>
             <a:r>
-              <a:rPr lang="en-US" smtClean="0"/>
+              <a:rPr lang="en-US"/>
               <a:t>Click to edit Master subtitle style</a:t>
             </a:r>
-            <a:endParaRPr lang="en-US"/>
           </a:p>
         </p:txBody>
       </p:sp>
@@ -3677,7 +4051,7 @@
           <a:p>
             <a:fld id="{5BCAD085-E8A6-8845-BD4E-CB4CCA059FC4}" type="datetimeFigureOut">
               <a:rPr lang="en-US" smtClean="0"/>
-              <a:t>1/27/13</a:t>
+              <a:t>10/5/2026</a:t>
             </a:fld>
             <a:endParaRPr lang="en-US"/>
           </a:p>
@@ -3771,10 +4145,9 @@
           <a:lstStyle/>
           <a:p>
             <a:r>
-              <a:rPr lang="en-US" smtClean="0"/>
+              <a:rPr lang="en-US"/>
               <a:t>Click to edit Master title style</a:t>
             </a:r>
-            <a:endParaRPr lang="en-US"/>
           </a:p>
         </p:txBody>
       </p:sp>
@@ -3795,38 +4168,37 @@
           <a:p>
             <a:pPr lvl="0"/>
             <a:r>
-              <a:rPr lang="en-US" smtClean="0"/>
+              <a:rPr lang="en-US"/>
               <a:t>Click to edit Master text styles</a:t>
             </a:r>
           </a:p>
           <a:p>
             <a:pPr lvl="1"/>
             <a:r>
-              <a:rPr lang="en-US" smtClean="0"/>
+              <a:rPr lang="en-US"/>
               <a:t>Second level</a:t>
             </a:r>
           </a:p>
           <a:p>
             <a:pPr lvl="2"/>
             <a:r>
-              <a:rPr lang="en-US" smtClean="0"/>
+              <a:rPr lang="en-US"/>
               <a:t>Third level</a:t>
             </a:r>
           </a:p>
           <a:p>
             <a:pPr lvl="3"/>
             <a:r>
-              <a:rPr lang="en-US" smtClean="0"/>
+              <a:rPr lang="en-US"/>
               <a:t>Fourth level</a:t>
             </a:r>
           </a:p>
           <a:p>
             <a:pPr lvl="4"/>
             <a:r>
-              <a:rPr lang="en-US" smtClean="0"/>
+              <a:rPr lang="en-US"/>
               <a:t>Fifth level</a:t>
             </a:r>
-            <a:endParaRPr lang="en-US"/>
           </a:p>
         </p:txBody>
       </p:sp>
@@ -3847,7 +4219,7 @@
           <a:p>
             <a:fld id="{5BCAD085-E8A6-8845-BD4E-CB4CCA059FC4}" type="datetimeFigureOut">
               <a:rPr lang="en-US" smtClean="0"/>
-              <a:t>1/27/13</a:t>
+              <a:t>10/5/2026</a:t>
             </a:fld>
             <a:endParaRPr lang="en-US"/>
           </a:p>
@@ -3946,10 +4318,9 @@
           <a:lstStyle/>
           <a:p>
             <a:r>
-              <a:rPr lang="en-US" smtClean="0"/>
+              <a:rPr lang="en-US"/>
               <a:t>Click to edit Master title style</a:t>
             </a:r>
-            <a:endParaRPr lang="en-US"/>
           </a:p>
         </p:txBody>
       </p:sp>
@@ -3975,38 +4346,37 @@
           <a:p>
             <a:pPr lvl="0"/>
             <a:r>
-              <a:rPr lang="en-US" smtClean="0"/>
+              <a:rPr lang="en-US"/>
               <a:t>Click to edit Master text styles</a:t>
             </a:r>
           </a:p>
           <a:p>
             <a:pPr lvl="1"/>
             <a:r>
-              <a:rPr lang="en-US" smtClean="0"/>
+              <a:rPr lang="en-US"/>
               <a:t>Second level</a:t>
             </a:r>
           </a:p>
           <a:p>
             <a:pPr lvl="2"/>
             <a:r>
-              <a:rPr lang="en-US" smtClean="0"/>
+              <a:rPr lang="en-US"/>
               <a:t>Third level</a:t>
             </a:r>
           </a:p>
           <a:p>
             <a:pPr lvl="3"/>
             <a:r>
-              <a:rPr lang="en-US" smtClean="0"/>
+              <a:rPr lang="en-US"/>
               <a:t>Fourth level</a:t>
             </a:r>
           </a:p>
           <a:p>
             <a:pPr lvl="4"/>
             <a:r>
-              <a:rPr lang="en-US" smtClean="0"/>
+              <a:rPr lang="en-US"/>
               <a:t>Fifth level</a:t>
             </a:r>
-            <a:endParaRPr lang="en-US"/>
           </a:p>
         </p:txBody>
       </p:sp>
@@ -4027,7 +4397,7 @@
           <a:p>
             <a:fld id="{5BCAD085-E8A6-8845-BD4E-CB4CCA059FC4}" type="datetimeFigureOut">
               <a:rPr lang="en-US" smtClean="0"/>
-              <a:t>1/27/13</a:t>
+              <a:t>10/5/2026</a:t>
             </a:fld>
             <a:endParaRPr lang="en-US"/>
           </a:p>
@@ -4121,10 +4491,9 @@
           <a:lstStyle/>
           <a:p>
             <a:r>
-              <a:rPr lang="en-US" smtClean="0"/>
+              <a:rPr lang="en-US"/>
               <a:t>Click to edit Master title style</a:t>
             </a:r>
-            <a:endParaRPr lang="en-US"/>
           </a:p>
         </p:txBody>
       </p:sp>
@@ -4145,38 +4514,37 @@
           <a:p>
             <a:pPr lvl="0"/>
             <a:r>
-              <a:rPr lang="en-US" smtClean="0"/>
+              <a:rPr lang="en-US"/>
               <a:t>Click to edit Master text styles</a:t>
             </a:r>
           </a:p>
           <a:p>
             <a:pPr lvl="1"/>
             <a:r>
-              <a:rPr lang="en-US" smtClean="0"/>
+              <a:rPr lang="en-US"/>
               <a:t>Second level</a:t>
             </a:r>
           </a:p>
           <a:p>
             <a:pPr lvl="2"/>
             <a:r>
-              <a:rPr lang="en-US" smtClean="0"/>
+              <a:rPr lang="en-US"/>
               <a:t>Third level</a:t>
             </a:r>
           </a:p>
           <a:p>
             <a:pPr lvl="3"/>
             <a:r>
-              <a:rPr lang="en-US" smtClean="0"/>
+              <a:rPr lang="en-US"/>
               <a:t>Fourth level</a:t>
             </a:r>
           </a:p>
           <a:p>
             <a:pPr lvl="4"/>
             <a:r>
-              <a:rPr lang="en-US" smtClean="0"/>
+              <a:rPr lang="en-US"/>
               <a:t>Fifth level</a:t>
             </a:r>
-            <a:endParaRPr lang="en-US"/>
           </a:p>
         </p:txBody>
       </p:sp>
@@ -4197,7 +4565,7 @@
           <a:p>
             <a:fld id="{5BCAD085-E8A6-8845-BD4E-CB4CCA059FC4}" type="datetimeFigureOut">
               <a:rPr lang="en-US" smtClean="0"/>
-              <a:t>1/27/13</a:t>
+              <a:t>10/5/2026</a:t>
             </a:fld>
             <a:endParaRPr lang="en-US"/>
           </a:p>
@@ -4300,10 +4668,9 @@
           </a:lstStyle>
           <a:p>
             <a:r>
-              <a:rPr lang="en-US" smtClean="0"/>
+              <a:rPr lang="en-US"/>
               <a:t>Click to edit Master title style</a:t>
             </a:r>
-            <a:endParaRPr lang="en-US"/>
           </a:p>
         </p:txBody>
       </p:sp>
@@ -4420,7 +4787,7 @@
           <a:p>
             <a:pPr lvl="0"/>
             <a:r>
-              <a:rPr lang="en-US" smtClean="0"/>
+              <a:rPr lang="en-US"/>
               <a:t>Click to edit Master text styles</a:t>
             </a:r>
           </a:p>
@@ -4443,7 +4810,7 @@
           <a:p>
             <a:fld id="{5BCAD085-E8A6-8845-BD4E-CB4CCA059FC4}" type="datetimeFigureOut">
               <a:rPr lang="en-US" smtClean="0"/>
-              <a:t>1/27/13</a:t>
+              <a:t>10/5/2026</a:t>
             </a:fld>
             <a:endParaRPr lang="en-US"/>
           </a:p>
@@ -4537,10 +4904,9 @@
           <a:lstStyle/>
           <a:p>
             <a:r>
-              <a:rPr lang="en-US" smtClean="0"/>
+              <a:rPr lang="en-US"/>
               <a:t>Click to edit Master title style</a:t>
             </a:r>
-            <a:endParaRPr lang="en-US"/>
           </a:p>
         </p:txBody>
       </p:sp>
@@ -4594,38 +4960,37 @@
           <a:p>
             <a:pPr lvl="0"/>
             <a:r>
-              <a:rPr lang="en-US" smtClean="0"/>
+              <a:rPr lang="en-US"/>
               <a:t>Click to edit Master text styles</a:t>
             </a:r>
           </a:p>
           <a:p>
             <a:pPr lvl="1"/>
             <a:r>
-              <a:rPr lang="en-US" smtClean="0"/>
+              <a:rPr lang="en-US"/>
               <a:t>Second level</a:t>
             </a:r>
           </a:p>
           <a:p>
             <a:pPr lvl="2"/>
             <a:r>
-              <a:rPr lang="en-US" smtClean="0"/>
+              <a:rPr lang="en-US"/>
               <a:t>Third level</a:t>
             </a:r>
           </a:p>
           <a:p>
             <a:pPr lvl="3"/>
             <a:r>
-              <a:rPr lang="en-US" smtClean="0"/>
+              <a:rPr lang="en-US"/>
               <a:t>Fourth level</a:t>
             </a:r>
           </a:p>
           <a:p>
             <a:pPr lvl="4"/>
             <a:r>
-              <a:rPr lang="en-US" smtClean="0"/>
+              <a:rPr lang="en-US"/>
               <a:t>Fifth level</a:t>
             </a:r>
-            <a:endParaRPr lang="en-US"/>
           </a:p>
         </p:txBody>
       </p:sp>
@@ -4679,38 +5044,37 @@
           <a:p>
             <a:pPr lvl="0"/>
             <a:r>
-              <a:rPr lang="en-US" smtClean="0"/>
+              <a:rPr lang="en-US"/>
               <a:t>Click to edit Master text styles</a:t>
             </a:r>
           </a:p>
           <a:p>
             <a:pPr lvl="1"/>
             <a:r>
-              <a:rPr lang="en-US" smtClean="0"/>
+              <a:rPr lang="en-US"/>
               <a:t>Second level</a:t>
             </a:r>
           </a:p>
           <a:p>
             <a:pPr lvl="2"/>
             <a:r>
-              <a:rPr lang="en-US" smtClean="0"/>
+              <a:rPr lang="en-US"/>
               <a:t>Third level</a:t>
             </a:r>
           </a:p>
           <a:p>
             <a:pPr lvl="3"/>
             <a:r>
-              <a:rPr lang="en-US" smtClean="0"/>
+              <a:rPr lang="en-US"/>
               <a:t>Fourth level</a:t>
             </a:r>
           </a:p>
           <a:p>
             <a:pPr lvl="4"/>
             <a:r>
-              <a:rPr lang="en-US" smtClean="0"/>
+              <a:rPr lang="en-US"/>
               <a:t>Fifth level</a:t>
             </a:r>
-            <a:endParaRPr lang="en-US"/>
           </a:p>
         </p:txBody>
       </p:sp>
@@ -4731,7 +5095,7 @@
           <a:p>
             <a:fld id="{5BCAD085-E8A6-8845-BD4E-CB4CCA059FC4}" type="datetimeFigureOut">
               <a:rPr lang="en-US" smtClean="0"/>
-              <a:t>1/27/13</a:t>
+              <a:t>10/5/2026</a:t>
             </a:fld>
             <a:endParaRPr lang="en-US"/>
           </a:p>
@@ -4829,10 +5193,9 @@
           </a:lstStyle>
           <a:p>
             <a:r>
-              <a:rPr lang="en-US" smtClean="0"/>
+              <a:rPr lang="en-US"/>
               <a:t>Click to edit Master title style</a:t>
             </a:r>
-            <a:endParaRPr lang="en-US"/>
           </a:p>
         </p:txBody>
       </p:sp>
@@ -4895,7 +5258,7 @@
           <a:p>
             <a:pPr lvl="0"/>
             <a:r>
-              <a:rPr lang="en-US" smtClean="0"/>
+              <a:rPr lang="en-US"/>
               <a:t>Click to edit Master text styles</a:t>
             </a:r>
           </a:p>
@@ -4951,38 +5314,37 @@
           <a:p>
             <a:pPr lvl="0"/>
             <a:r>
-              <a:rPr lang="en-US" smtClean="0"/>
+              <a:rPr lang="en-US"/>
               <a:t>Click to edit Master text styles</a:t>
             </a:r>
           </a:p>
           <a:p>
             <a:pPr lvl="1"/>
             <a:r>
-              <a:rPr lang="en-US" smtClean="0"/>
+              <a:rPr lang="en-US"/>
               <a:t>Second level</a:t>
             </a:r>
           </a:p>
           <a:p>
             <a:pPr lvl="2"/>
             <a:r>
-              <a:rPr lang="en-US" smtClean="0"/>
+              <a:rPr lang="en-US"/>
               <a:t>Third level</a:t>
             </a:r>
           </a:p>
           <a:p>
             <a:pPr lvl="3"/>
             <a:r>
-              <a:rPr lang="en-US" smtClean="0"/>
+              <a:rPr lang="en-US"/>
               <a:t>Fourth level</a:t>
             </a:r>
           </a:p>
           <a:p>
             <a:pPr lvl="4"/>
             <a:r>
-              <a:rPr lang="en-US" smtClean="0"/>
+              <a:rPr lang="en-US"/>
               <a:t>Fifth level</a:t>
             </a:r>
-            <a:endParaRPr lang="en-US"/>
           </a:p>
         </p:txBody>
       </p:sp>
@@ -5045,7 +5407,7 @@
           <a:p>
             <a:pPr lvl="0"/>
             <a:r>
-              <a:rPr lang="en-US" smtClean="0"/>
+              <a:rPr lang="en-US"/>
               <a:t>Click to edit Master text styles</a:t>
             </a:r>
           </a:p>
@@ -5101,38 +5463,37 @@
           <a:p>
             <a:pPr lvl="0"/>
             <a:r>
-              <a:rPr lang="en-US" smtClean="0"/>
+              <a:rPr lang="en-US"/>
               <a:t>Click to edit Master text styles</a:t>
             </a:r>
           </a:p>
           <a:p>
             <a:pPr lvl="1"/>
             <a:r>
-              <a:rPr lang="en-US" smtClean="0"/>
+              <a:rPr lang="en-US"/>
               <a:t>Second level</a:t>
             </a:r>
           </a:p>
           <a:p>
             <a:pPr lvl="2"/>
             <a:r>
-              <a:rPr lang="en-US" smtClean="0"/>
+              <a:rPr lang="en-US"/>
               <a:t>Third level</a:t>
             </a:r>
           </a:p>
           <a:p>
             <a:pPr lvl="3"/>
             <a:r>
-              <a:rPr lang="en-US" smtClean="0"/>
+              <a:rPr lang="en-US"/>
               <a:t>Fourth level</a:t>
             </a:r>
           </a:p>
           <a:p>
             <a:pPr lvl="4"/>
             <a:r>
-              <a:rPr lang="en-US" smtClean="0"/>
+              <a:rPr lang="en-US"/>
               <a:t>Fifth level</a:t>
             </a:r>
-            <a:endParaRPr lang="en-US"/>
           </a:p>
         </p:txBody>
       </p:sp>
@@ -5153,7 +5514,7 @@
           <a:p>
             <a:fld id="{5BCAD085-E8A6-8845-BD4E-CB4CCA059FC4}" type="datetimeFigureOut">
               <a:rPr lang="en-US" smtClean="0"/>
-              <a:t>1/27/13</a:t>
+              <a:t>10/5/2026</a:t>
             </a:fld>
             <a:endParaRPr lang="en-US"/>
           </a:p>
@@ -5247,10 +5608,9 @@
           <a:lstStyle/>
           <a:p>
             <a:r>
-              <a:rPr lang="en-US" smtClean="0"/>
+              <a:rPr lang="en-US"/>
               <a:t>Click to edit Master title style</a:t>
             </a:r>
-            <a:endParaRPr lang="en-US"/>
           </a:p>
         </p:txBody>
       </p:sp>
@@ -5271,7 +5631,7 @@
           <a:p>
             <a:fld id="{5BCAD085-E8A6-8845-BD4E-CB4CCA059FC4}" type="datetimeFigureOut">
               <a:rPr lang="en-US" smtClean="0"/>
-              <a:t>1/27/13</a:t>
+              <a:t>10/5/2026</a:t>
             </a:fld>
             <a:endParaRPr lang="en-US"/>
           </a:p>
@@ -5366,7 +5726,7 @@
           <a:p>
             <a:fld id="{5BCAD085-E8A6-8845-BD4E-CB4CCA059FC4}" type="datetimeFigureOut">
               <a:rPr lang="en-US" smtClean="0"/>
-              <a:t>1/27/13</a:t>
+              <a:t>10/5/2026</a:t>
             </a:fld>
             <a:endParaRPr lang="en-US"/>
           </a:p>
@@ -5469,10 +5829,9 @@
           </a:lstStyle>
           <a:p>
             <a:r>
-              <a:rPr lang="en-US" smtClean="0"/>
+              <a:rPr lang="en-US"/>
               <a:t>Click to edit Master title style</a:t>
             </a:r>
-            <a:endParaRPr lang="en-US"/>
           </a:p>
         </p:txBody>
       </p:sp>
@@ -5526,38 +5885,37 @@
           <a:p>
             <a:pPr lvl="0"/>
             <a:r>
-              <a:rPr lang="en-US" smtClean="0"/>
+              <a:rPr lang="en-US"/>
               <a:t>Click to edit Master text styles</a:t>
             </a:r>
           </a:p>
           <a:p>
             <a:pPr lvl="1"/>
             <a:r>
-              <a:rPr lang="en-US" smtClean="0"/>
+              <a:rPr lang="en-US"/>
               <a:t>Second level</a:t>
             </a:r>
           </a:p>
           <a:p>
             <a:pPr lvl="2"/>
             <a:r>
-              <a:rPr lang="en-US" smtClean="0"/>
+              <a:rPr lang="en-US"/>
               <a:t>Third level</a:t>
             </a:r>
           </a:p>
           <a:p>
             <a:pPr lvl="3"/>
             <a:r>
-              <a:rPr lang="en-US" smtClean="0"/>
+              <a:rPr lang="en-US"/>
               <a:t>Fourth level</a:t>
             </a:r>
           </a:p>
           <a:p>
             <a:pPr lvl="4"/>
             <a:r>
-              <a:rPr lang="en-US" smtClean="0"/>
+              <a:rPr lang="en-US"/>
               <a:t>Fifth level</a:t>
             </a:r>
-            <a:endParaRPr lang="en-US"/>
           </a:p>
         </p:txBody>
       </p:sp>
@@ -5620,7 +5978,7 @@
           <a:p>
             <a:pPr lvl="0"/>
             <a:r>
-              <a:rPr lang="en-US" smtClean="0"/>
+              <a:rPr lang="en-US"/>
               <a:t>Click to edit Master text styles</a:t>
             </a:r>
           </a:p>
@@ -5643,7 +6001,7 @@
           <a:p>
             <a:fld id="{5BCAD085-E8A6-8845-BD4E-CB4CCA059FC4}" type="datetimeFigureOut">
               <a:rPr lang="en-US" smtClean="0"/>
-              <a:t>1/27/13</a:t>
+              <a:t>10/5/2026</a:t>
             </a:fld>
             <a:endParaRPr lang="en-US"/>
           </a:p>
@@ -5746,10 +6104,9 @@
           </a:lstStyle>
           <a:p>
             <a:r>
-              <a:rPr lang="en-US" smtClean="0"/>
+              <a:rPr lang="en-US"/>
               <a:t>Click to edit Master title style</a:t>
             </a:r>
-            <a:endParaRPr lang="en-US"/>
           </a:p>
         </p:txBody>
       </p:sp>
@@ -5873,7 +6230,7 @@
           <a:p>
             <a:pPr lvl="0"/>
             <a:r>
-              <a:rPr lang="en-US" smtClean="0"/>
+              <a:rPr lang="en-US"/>
               <a:t>Click to edit Master text styles</a:t>
             </a:r>
           </a:p>
@@ -5896,7 +6253,7 @@
           <a:p>
             <a:fld id="{5BCAD085-E8A6-8845-BD4E-CB4CCA059FC4}" type="datetimeFigureOut">
               <a:rPr lang="en-US" smtClean="0"/>
-              <a:t>1/27/13</a:t>
+              <a:t>10/5/2026</a:t>
             </a:fld>
             <a:endParaRPr lang="en-US"/>
           </a:p>
@@ -6005,10 +6362,9 @@
           <a:lstStyle/>
           <a:p>
             <a:r>
-              <a:rPr lang="en-US" smtClean="0"/>
+              <a:rPr lang="en-US"/>
               <a:t>Click to edit Master title style</a:t>
             </a:r>
-            <a:endParaRPr lang="en-US"/>
           </a:p>
         </p:txBody>
       </p:sp>
@@ -6039,38 +6395,37 @@
           <a:p>
             <a:pPr lvl="0"/>
             <a:r>
-              <a:rPr lang="en-US" smtClean="0"/>
+              <a:rPr lang="en-US"/>
               <a:t>Click to edit Master text styles</a:t>
             </a:r>
           </a:p>
           <a:p>
             <a:pPr lvl="1"/>
             <a:r>
-              <a:rPr lang="en-US" smtClean="0"/>
+              <a:rPr lang="en-US"/>
               <a:t>Second level</a:t>
             </a:r>
           </a:p>
           <a:p>
             <a:pPr lvl="2"/>
             <a:r>
-              <a:rPr lang="en-US" smtClean="0"/>
+              <a:rPr lang="en-US"/>
               <a:t>Third level</a:t>
             </a:r>
           </a:p>
           <a:p>
             <a:pPr lvl="3"/>
             <a:r>
-              <a:rPr lang="en-US" smtClean="0"/>
+              <a:rPr lang="en-US"/>
               <a:t>Fourth level</a:t>
             </a:r>
           </a:p>
           <a:p>
             <a:pPr lvl="4"/>
             <a:r>
-              <a:rPr lang="en-US" smtClean="0"/>
+              <a:rPr lang="en-US"/>
               <a:t>Fifth level</a:t>
             </a:r>
-            <a:endParaRPr lang="en-US"/>
           </a:p>
         </p:txBody>
       </p:sp>
@@ -6109,7 +6464,7 @@
           <a:p>
             <a:fld id="{5BCAD085-E8A6-8845-BD4E-CB4CCA059FC4}" type="datetimeFigureOut">
               <a:rPr lang="en-US" smtClean="0"/>
-              <a:t>1/27/13</a:t>
+              <a:t>10/5/2026</a:t>
             </a:fld>
             <a:endParaRPr lang="en-US"/>
           </a:p>
@@ -6468,7 +6823,7 @@
 </file>
 
 <file path=ppt/slides/slide1.xml><?xml version="1.0" encoding="utf-8"?>
-<p:sld xmlns:a="http://schemas.openxmlformats.org/drawingml/2006/main" xmlns:p="http://schemas.openxmlformats.org/presentationml/2006/main" xmlns:r="http://schemas.openxmlformats.org/officeDocument/2006/relationships">
+<p:sld xmlns:a="http://schemas.openxmlformats.org/drawingml/2006/main" xmlns:r="http://schemas.openxmlformats.org/officeDocument/2006/relationships" xmlns:p="http://schemas.openxmlformats.org/presentationml/2006/main">
   <p:cSld>
     <p:bg>
       <p:bgPr>
@@ -6484,7 +6839,14 @@
         <p:cNvGrpSpPr/>
         <p:nvPr/>
       </p:nvGrpSpPr>
-      <p:grpSpPr/>
+      <p:grpSpPr>
+        <a:xfrm>
+          <a:off x="0" y="0"/>
+          <a:ext cx="0" cy="0"/>
+          <a:chOff x="0" y="0"/>
+          <a:chExt cx="0" cy="0"/>
+        </a:xfrm>
+      </p:grpSpPr>
       <p:sp>
         <p:nvSpPr>
           <p:cNvPr id="2" name="Oval 1"/>
@@ -6526,6 +6888,7 @@
           <a:lstStyle/>
           <a:p>
             <a:pPr algn="ctr"/>
+            <a:endParaRPr/>
           </a:p>
         </p:txBody>
       </p:sp>
@@ -6570,6 +6933,7 @@
           <a:lstStyle/>
           <a:p>
             <a:pPr algn="ctr"/>
+            <a:endParaRPr/>
           </a:p>
         </p:txBody>
       </p:sp>
@@ -6590,7 +6954,7 @@
           <a:noFill/>
         </p:spPr>
         <p:txBody>
-          <a:bodyPr wrap="square" lIns="0" rIns="0" tIns="0" bIns="0" anchor="t">
+          <a:bodyPr wrap="square" lIns="0" tIns="0" rIns="0" bIns="0" anchor="t">
             <a:spAutoFit/>
           </a:bodyPr>
           <a:lstStyle/>
@@ -6629,7 +6993,7 @@
           <a:noFill/>
         </p:spPr>
         <p:txBody>
-          <a:bodyPr wrap="square" lIns="0" rIns="0" tIns="0" bIns="0" anchor="t">
+          <a:bodyPr wrap="square" lIns="0" tIns="0" rIns="0" bIns="0" anchor="t">
             <a:spAutoFit/>
           </a:bodyPr>
           <a:lstStyle/>
@@ -6668,7 +7032,7 @@
           <a:noFill/>
         </p:spPr>
         <p:txBody>
-          <a:bodyPr wrap="square" lIns="0" rIns="0" tIns="0" bIns="0" anchor="t">
+          <a:bodyPr wrap="square" lIns="0" tIns="0" rIns="0" bIns="0" anchor="t">
             <a:spAutoFit/>
           </a:bodyPr>
           <a:lstStyle/>
@@ -6707,7 +7071,7 @@
           <a:noFill/>
         </p:spPr>
         <p:txBody>
-          <a:bodyPr wrap="square" lIns="0" rIns="0" tIns="0" bIns="0" anchor="t">
+          <a:bodyPr wrap="square" lIns="0" tIns="0" rIns="0" bIns="0" anchor="t">
             <a:spAutoFit/>
           </a:bodyPr>
           <a:lstStyle/>
@@ -6746,7 +7110,7 @@
           <a:noFill/>
         </p:spPr>
         <p:txBody>
-          <a:bodyPr wrap="square" lIns="0" rIns="0" tIns="0" bIns="0" anchor="t">
+          <a:bodyPr wrap="square" lIns="0" tIns="0" rIns="0" bIns="0" anchor="t">
             <a:spAutoFit/>
           </a:bodyPr>
           <a:lstStyle/>
@@ -6785,7 +7149,7 @@
           <a:noFill/>
         </p:spPr>
         <p:txBody>
-          <a:bodyPr wrap="square" lIns="0" rIns="0" tIns="0" bIns="0" anchor="t">
+          <a:bodyPr wrap="square" lIns="0" tIns="0" rIns="0" bIns="0" anchor="t">
             <a:spAutoFit/>
           </a:bodyPr>
           <a:lstStyle/>
@@ -6816,7 +7180,7 @@
         <p:spPr>
           <a:xfrm>
             <a:off x="731520" y="5532120"/>
-            <a:ext cx="7315200" cy="365760"/>
+            <a:ext cx="7315200" cy="215444"/>
           </a:xfrm>
           <a:prstGeom prst="rect">
             <a:avLst/>
@@ -6824,25 +7188,43 @@
           <a:noFill/>
         </p:spPr>
         <p:txBody>
-          <a:bodyPr wrap="square" lIns="0" rIns="0" tIns="0" bIns="0" anchor="t">
+          <a:bodyPr wrap="square" lIns="0" tIns="0" rIns="0" bIns="0" anchor="t">
             <a:spAutoFit/>
           </a:bodyPr>
           <a:lstStyle/>
           <a:p>
-            <a:pPr algn="l">
-              <a:spcAft>
-                <a:spcPts val="0"/>
-              </a:spcAft>
-            </a:pPr>
-            <a:r>
-              <a:rPr sz="1400" b="0" i="0">
+            <a:r>
+              <a:rPr sz="1400" b="0" i="0" dirty="0">
                 <a:solidFill>
                   <a:srgbClr val="B8C7DB"/>
                 </a:solidFill>
                 <a:latin typeface="Calibri"/>
               </a:rPr>
-              <a:t>Epsilon AI  ·  Data Science Program</a:t>
-            </a:r>
+              <a:t>Epsilon AI  ·  Data Science</a:t>
+            </a:r>
+            <a:r>
+              <a:rPr lang="en-US" sz="1400" b="0" i="0" dirty="0">
+                <a:solidFill>
+                  <a:srgbClr val="B8C7DB"/>
+                </a:solidFill>
+                <a:latin typeface="Calibri"/>
+              </a:rPr>
+              <a:t> </a:t>
+            </a:r>
+            <a:r>
+              <a:rPr lang="en-US" sz="1400" dirty="0">
+                <a:solidFill>
+                  <a:srgbClr val="B8C7DB"/>
+                </a:solidFill>
+              </a:rPr>
+              <a:t>&amp; Machine learning</a:t>
+            </a:r>
+            <a:endParaRPr sz="1400" b="0" i="0" dirty="0">
+              <a:solidFill>
+                <a:srgbClr val="B8C7DB"/>
+              </a:solidFill>
+              <a:latin typeface="Calibri"/>
+            </a:endParaRPr>
           </a:p>
         </p:txBody>
       </p:sp>
@@ -6855,7 +7237,7 @@
 </file>
 
 <file path=ppt/slides/slide10.xml><?xml version="1.0" encoding="utf-8"?>
-<p:sld xmlns:a="http://schemas.openxmlformats.org/drawingml/2006/main" xmlns:p="http://schemas.openxmlformats.org/presentationml/2006/main" xmlns:r="http://schemas.openxmlformats.org/officeDocument/2006/relationships">
+<p:sld xmlns:a="http://schemas.openxmlformats.org/drawingml/2006/main" xmlns:r="http://schemas.openxmlformats.org/officeDocument/2006/relationships" xmlns:p="http://schemas.openxmlformats.org/presentationml/2006/main">
   <p:cSld>
     <p:bg>
       <p:bgPr>
@@ -6871,7 +7253,14 @@
         <p:cNvGrpSpPr/>
         <p:nvPr/>
       </p:nvGrpSpPr>
-      <p:grpSpPr/>
+      <p:grpSpPr>
+        <a:xfrm>
+          <a:off x="0" y="0"/>
+          <a:ext cx="0" cy="0"/>
+          <a:chOff x="0" y="0"/>
+          <a:chExt cx="0" cy="0"/>
+        </a:xfrm>
+      </p:grpSpPr>
       <p:sp>
         <p:nvSpPr>
           <p:cNvPr id="2" name="TextBox 1"/>
@@ -6889,7 +7278,7 @@
           <a:noFill/>
         </p:spPr>
         <p:txBody>
-          <a:bodyPr wrap="square" lIns="0" rIns="0" tIns="0" bIns="0" anchor="t">
+          <a:bodyPr wrap="square" lIns="0" tIns="0" rIns="0" bIns="0" anchor="t">
             <a:spAutoFit/>
           </a:bodyPr>
           <a:lstStyle/>
@@ -6928,7 +7317,7 @@
           <a:noFill/>
         </p:spPr>
         <p:txBody>
-          <a:bodyPr wrap="square" lIns="0" rIns="0" tIns="0" bIns="0" anchor="t">
+          <a:bodyPr wrap="square" lIns="0" tIns="0" rIns="0" bIns="0" anchor="t">
             <a:spAutoFit/>
           </a:bodyPr>
           <a:lstStyle/>
@@ -6967,7 +7356,7 @@
           <a:noFill/>
         </p:spPr>
         <p:txBody>
-          <a:bodyPr wrap="square" lIns="0" rIns="0" tIns="0" bIns="0" anchor="t">
+          <a:bodyPr wrap="square" lIns="0" tIns="0" rIns="0" bIns="0" anchor="t">
             <a:spAutoFit/>
           </a:bodyPr>
           <a:lstStyle/>
@@ -7006,7 +7395,7 @@
           <a:noFill/>
         </p:spPr>
         <p:txBody>
-          <a:bodyPr wrap="square" lIns="0" rIns="0" tIns="0" bIns="0" anchor="t">
+          <a:bodyPr wrap="square" lIns="0" tIns="0" rIns="0" bIns="0" anchor="t">
             <a:spAutoFit/>
           </a:bodyPr>
           <a:lstStyle/>
@@ -7042,7 +7431,7 @@
         </p:xfrm>
         <a:graphic>
           <a:graphicData uri="http://schemas.openxmlformats.org/drawingml/2006/chart">
-            <c:chart xmlns:c="http://schemas.openxmlformats.org/drawingml/2006/chart" r:id="rId2"/>
+            <c:chart xmlns:c="http://schemas.openxmlformats.org/drawingml/2006/chart" xmlns:r="http://schemas.openxmlformats.org/officeDocument/2006/relationships" r:id="rId3"/>
           </a:graphicData>
         </a:graphic>
       </p:graphicFrame>
@@ -7089,6 +7478,7 @@
           <a:lstStyle/>
           <a:p>
             <a:pPr algn="ctr"/>
+            <a:endParaRPr/>
           </a:p>
         </p:txBody>
       </p:sp>
@@ -7109,7 +7499,7 @@
           <a:noFill/>
         </p:spPr>
         <p:txBody>
-          <a:bodyPr wrap="square" lIns="0" rIns="0" tIns="0" bIns="0" anchor="t">
+          <a:bodyPr wrap="square" lIns="0" tIns="0" rIns="0" bIns="0" anchor="t">
             <a:spAutoFit/>
           </a:bodyPr>
           <a:lstStyle/>
@@ -7256,7 +7646,7 @@
 </file>
 
 <file path=ppt/slides/slide11.xml><?xml version="1.0" encoding="utf-8"?>
-<p:sld xmlns:a="http://schemas.openxmlformats.org/drawingml/2006/main" xmlns:p="http://schemas.openxmlformats.org/presentationml/2006/main" xmlns:r="http://schemas.openxmlformats.org/officeDocument/2006/relationships">
+<p:sld xmlns:a="http://schemas.openxmlformats.org/drawingml/2006/main" xmlns:r="http://schemas.openxmlformats.org/officeDocument/2006/relationships" xmlns:p="http://schemas.openxmlformats.org/presentationml/2006/main">
   <p:cSld>
     <p:bg>
       <p:bgPr>
@@ -7272,7 +7662,14 @@
         <p:cNvGrpSpPr/>
         <p:nvPr/>
       </p:nvGrpSpPr>
-      <p:grpSpPr/>
+      <p:grpSpPr>
+        <a:xfrm>
+          <a:off x="0" y="0"/>
+          <a:ext cx="0" cy="0"/>
+          <a:chOff x="0" y="0"/>
+          <a:chExt cx="0" cy="0"/>
+        </a:xfrm>
+      </p:grpSpPr>
       <p:sp>
         <p:nvSpPr>
           <p:cNvPr id="2" name="TextBox 1"/>
@@ -7290,7 +7687,7 @@
           <a:noFill/>
         </p:spPr>
         <p:txBody>
-          <a:bodyPr wrap="square" lIns="0" rIns="0" tIns="0" bIns="0" anchor="t">
+          <a:bodyPr wrap="square" lIns="0" tIns="0" rIns="0" bIns="0" anchor="t">
             <a:spAutoFit/>
           </a:bodyPr>
           <a:lstStyle/>
@@ -7329,7 +7726,7 @@
           <a:noFill/>
         </p:spPr>
         <p:txBody>
-          <a:bodyPr wrap="square" lIns="0" rIns="0" tIns="0" bIns="0" anchor="t">
+          <a:bodyPr wrap="square" lIns="0" tIns="0" rIns="0" bIns="0" anchor="t">
             <a:spAutoFit/>
           </a:bodyPr>
           <a:lstStyle/>
@@ -7368,7 +7765,7 @@
           <a:noFill/>
         </p:spPr>
         <p:txBody>
-          <a:bodyPr wrap="square" lIns="0" rIns="0" tIns="0" bIns="0" anchor="t">
+          <a:bodyPr wrap="square" lIns="0" tIns="0" rIns="0" bIns="0" anchor="t">
             <a:spAutoFit/>
           </a:bodyPr>
           <a:lstStyle/>
@@ -7407,7 +7804,7 @@
           <a:noFill/>
         </p:spPr>
         <p:txBody>
-          <a:bodyPr wrap="square" lIns="0" rIns="0" tIns="0" bIns="0" anchor="t">
+          <a:bodyPr wrap="square" lIns="0" tIns="0" rIns="0" bIns="0" anchor="t">
             <a:spAutoFit/>
           </a:bodyPr>
           <a:lstStyle/>
@@ -7443,7 +7840,7 @@
         </p:xfrm>
         <a:graphic>
           <a:graphicData uri="http://schemas.openxmlformats.org/drawingml/2006/chart">
-            <c:chart xmlns:c="http://schemas.openxmlformats.org/drawingml/2006/chart" r:id="rId2"/>
+            <c:chart xmlns:c="http://schemas.openxmlformats.org/drawingml/2006/chart" xmlns:r="http://schemas.openxmlformats.org/officeDocument/2006/relationships" r:id="rId3"/>
           </a:graphicData>
         </a:graphic>
       </p:graphicFrame>
@@ -7490,6 +7887,7 @@
           <a:lstStyle/>
           <a:p>
             <a:pPr algn="ctr"/>
+            <a:endParaRPr/>
           </a:p>
         </p:txBody>
       </p:sp>
@@ -7510,7 +7908,7 @@
           <a:noFill/>
         </p:spPr>
         <p:txBody>
-          <a:bodyPr wrap="square" lIns="0" rIns="0" tIns="0" bIns="0" anchor="t">
+          <a:bodyPr wrap="square" lIns="0" tIns="0" rIns="0" bIns="0" anchor="t">
             <a:spAutoFit/>
           </a:bodyPr>
           <a:lstStyle/>
@@ -7589,7 +7987,7 @@
 </file>
 
 <file path=ppt/slides/slide12.xml><?xml version="1.0" encoding="utf-8"?>
-<p:sld xmlns:a="http://schemas.openxmlformats.org/drawingml/2006/main" xmlns:p="http://schemas.openxmlformats.org/presentationml/2006/main" xmlns:r="http://schemas.openxmlformats.org/officeDocument/2006/relationships">
+<p:sld xmlns:a="http://schemas.openxmlformats.org/drawingml/2006/main" xmlns:r="http://schemas.openxmlformats.org/officeDocument/2006/relationships" xmlns:p="http://schemas.openxmlformats.org/presentationml/2006/main">
   <p:cSld>
     <p:bg>
       <p:bgPr>
@@ -7605,7 +8003,14 @@
         <p:cNvGrpSpPr/>
         <p:nvPr/>
       </p:nvGrpSpPr>
-      <p:grpSpPr/>
+      <p:grpSpPr>
+        <a:xfrm>
+          <a:off x="0" y="0"/>
+          <a:ext cx="0" cy="0"/>
+          <a:chOff x="0" y="0"/>
+          <a:chExt cx="0" cy="0"/>
+        </a:xfrm>
+      </p:grpSpPr>
       <p:sp>
         <p:nvSpPr>
           <p:cNvPr id="2" name="TextBox 1"/>
@@ -7623,7 +8028,7 @@
           <a:noFill/>
         </p:spPr>
         <p:txBody>
-          <a:bodyPr wrap="square" lIns="0" rIns="0" tIns="0" bIns="0" anchor="t">
+          <a:bodyPr wrap="square" lIns="0" tIns="0" rIns="0" bIns="0" anchor="t">
             <a:spAutoFit/>
           </a:bodyPr>
           <a:lstStyle/>
@@ -7662,7 +8067,7 @@
           <a:noFill/>
         </p:spPr>
         <p:txBody>
-          <a:bodyPr wrap="square" lIns="0" rIns="0" tIns="0" bIns="0" anchor="t">
+          <a:bodyPr wrap="square" lIns="0" tIns="0" rIns="0" bIns="0" anchor="t">
             <a:spAutoFit/>
           </a:bodyPr>
           <a:lstStyle/>
@@ -7701,7 +8106,7 @@
           <a:noFill/>
         </p:spPr>
         <p:txBody>
-          <a:bodyPr wrap="square" lIns="0" rIns="0" tIns="0" bIns="0" anchor="t">
+          <a:bodyPr wrap="square" lIns="0" tIns="0" rIns="0" bIns="0" anchor="t">
             <a:spAutoFit/>
           </a:bodyPr>
           <a:lstStyle/>
@@ -7740,7 +8145,7 @@
           <a:noFill/>
         </p:spPr>
         <p:txBody>
-          <a:bodyPr wrap="square" lIns="0" rIns="0" tIns="0" bIns="0" anchor="t">
+          <a:bodyPr wrap="square" lIns="0" tIns="0" rIns="0" bIns="0" anchor="t">
             <a:spAutoFit/>
           </a:bodyPr>
           <a:lstStyle/>
@@ -7776,7 +8181,7 @@
         </p:xfrm>
         <a:graphic>
           <a:graphicData uri="http://schemas.openxmlformats.org/drawingml/2006/chart">
-            <c:chart xmlns:c="http://schemas.openxmlformats.org/drawingml/2006/chart" r:id="rId2"/>
+            <c:chart xmlns:c="http://schemas.openxmlformats.org/drawingml/2006/chart" xmlns:r="http://schemas.openxmlformats.org/officeDocument/2006/relationships" r:id="rId3"/>
           </a:graphicData>
         </a:graphic>
       </p:graphicFrame>
@@ -7823,6 +8228,7 @@
           <a:lstStyle/>
           <a:p>
             <a:pPr algn="ctr"/>
+            <a:endParaRPr/>
           </a:p>
         </p:txBody>
       </p:sp>
@@ -7843,7 +8249,7 @@
           <a:noFill/>
         </p:spPr>
         <p:txBody>
-          <a:bodyPr wrap="square" lIns="0" rIns="0" tIns="0" bIns="0" anchor="t">
+          <a:bodyPr wrap="square" lIns="0" tIns="0" rIns="0" bIns="0" anchor="t">
             <a:spAutoFit/>
           </a:bodyPr>
           <a:lstStyle/>
@@ -8015,7 +8421,7 @@
 </file>
 
 <file path=ppt/slides/slide13.xml><?xml version="1.0" encoding="utf-8"?>
-<p:sld xmlns:a="http://schemas.openxmlformats.org/drawingml/2006/main" xmlns:p="http://schemas.openxmlformats.org/presentationml/2006/main" xmlns:r="http://schemas.openxmlformats.org/officeDocument/2006/relationships">
+<p:sld xmlns:a="http://schemas.openxmlformats.org/drawingml/2006/main" xmlns:r="http://schemas.openxmlformats.org/officeDocument/2006/relationships" xmlns:p="http://schemas.openxmlformats.org/presentationml/2006/main">
   <p:cSld>
     <p:bg>
       <p:bgPr>
@@ -8031,7 +8437,14 @@
         <p:cNvGrpSpPr/>
         <p:nvPr/>
       </p:nvGrpSpPr>
-      <p:grpSpPr/>
+      <p:grpSpPr>
+        <a:xfrm>
+          <a:off x="0" y="0"/>
+          <a:ext cx="0" cy="0"/>
+          <a:chOff x="0" y="0"/>
+          <a:chExt cx="0" cy="0"/>
+        </a:xfrm>
+      </p:grpSpPr>
       <p:sp>
         <p:nvSpPr>
           <p:cNvPr id="2" name="TextBox 1"/>
@@ -8049,7 +8462,7 @@
           <a:noFill/>
         </p:spPr>
         <p:txBody>
-          <a:bodyPr wrap="square" lIns="0" rIns="0" tIns="0" bIns="0" anchor="t">
+          <a:bodyPr wrap="square" lIns="0" tIns="0" rIns="0" bIns="0" anchor="t">
             <a:spAutoFit/>
           </a:bodyPr>
           <a:lstStyle/>
@@ -8088,7 +8501,7 @@
           <a:noFill/>
         </p:spPr>
         <p:txBody>
-          <a:bodyPr wrap="square" lIns="0" rIns="0" tIns="0" bIns="0" anchor="t">
+          <a:bodyPr wrap="square" lIns="0" tIns="0" rIns="0" bIns="0" anchor="t">
             <a:spAutoFit/>
           </a:bodyPr>
           <a:lstStyle/>
@@ -8127,7 +8540,7 @@
           <a:noFill/>
         </p:spPr>
         <p:txBody>
-          <a:bodyPr wrap="square" lIns="0" rIns="0" tIns="0" bIns="0" anchor="t">
+          <a:bodyPr wrap="square" lIns="0" tIns="0" rIns="0" bIns="0" anchor="t">
             <a:spAutoFit/>
           </a:bodyPr>
           <a:lstStyle/>
@@ -8166,7 +8579,7 @@
           <a:noFill/>
         </p:spPr>
         <p:txBody>
-          <a:bodyPr wrap="square" lIns="0" rIns="0" tIns="0" bIns="0" anchor="t">
+          <a:bodyPr wrap="square" lIns="0" tIns="0" rIns="0" bIns="0" anchor="t">
             <a:spAutoFit/>
           </a:bodyPr>
           <a:lstStyle/>
@@ -8202,7 +8615,7 @@
         </p:xfrm>
         <a:graphic>
           <a:graphicData uri="http://schemas.openxmlformats.org/drawingml/2006/chart">
-            <c:chart xmlns:c="http://schemas.openxmlformats.org/drawingml/2006/chart" r:id="rId2"/>
+            <c:chart xmlns:c="http://schemas.openxmlformats.org/drawingml/2006/chart" xmlns:r="http://schemas.openxmlformats.org/officeDocument/2006/relationships" r:id="rId3"/>
           </a:graphicData>
         </a:graphic>
       </p:graphicFrame>
@@ -8249,6 +8662,7 @@
           <a:lstStyle/>
           <a:p>
             <a:pPr algn="ctr"/>
+            <a:endParaRPr/>
           </a:p>
         </p:txBody>
       </p:sp>
@@ -8269,7 +8683,7 @@
           <a:noFill/>
         </p:spPr>
         <p:txBody>
-          <a:bodyPr wrap="square" lIns="0" rIns="0" tIns="0" bIns="0" anchor="t">
+          <a:bodyPr wrap="square" lIns="0" tIns="0" rIns="0" bIns="0" anchor="t">
             <a:spAutoFit/>
           </a:bodyPr>
           <a:lstStyle/>
@@ -8308,7 +8722,7 @@
           <a:noFill/>
         </p:spPr>
         <p:txBody>
-          <a:bodyPr wrap="square" lIns="0" rIns="0" tIns="0" bIns="0" anchor="t">
+          <a:bodyPr wrap="square" lIns="0" tIns="0" rIns="0" bIns="0" anchor="t">
             <a:spAutoFit/>
           </a:bodyPr>
           <a:lstStyle/>
@@ -8373,6 +8787,7 @@
           <a:lstStyle/>
           <a:p>
             <a:pPr algn="ctr"/>
+            <a:endParaRPr/>
           </a:p>
         </p:txBody>
       </p:sp>
@@ -8393,7 +8808,7 @@
           <a:noFill/>
         </p:spPr>
         <p:txBody>
-          <a:bodyPr wrap="square" lIns="0" rIns="0" tIns="0" bIns="0" anchor="t">
+          <a:bodyPr wrap="square" lIns="0" tIns="0" rIns="0" bIns="0" anchor="t">
             <a:spAutoFit/>
           </a:bodyPr>
           <a:lstStyle/>
@@ -8432,7 +8847,7 @@
           <a:noFill/>
         </p:spPr>
         <p:txBody>
-          <a:bodyPr wrap="square" lIns="0" rIns="0" tIns="0" bIns="0" anchor="t">
+          <a:bodyPr wrap="square" lIns="0" tIns="0" rIns="0" bIns="0" anchor="t">
             <a:spAutoFit/>
           </a:bodyPr>
           <a:lstStyle/>
@@ -8497,6 +8912,7 @@
           <a:lstStyle/>
           <a:p>
             <a:pPr algn="ctr"/>
+            <a:endParaRPr/>
           </a:p>
         </p:txBody>
       </p:sp>
@@ -8517,7 +8933,7 @@
           <a:noFill/>
         </p:spPr>
         <p:txBody>
-          <a:bodyPr wrap="square" lIns="0" rIns="0" tIns="0" bIns="0" anchor="t">
+          <a:bodyPr wrap="square" lIns="0" tIns="0" rIns="0" bIns="0" anchor="t">
             <a:spAutoFit/>
           </a:bodyPr>
           <a:lstStyle/>
@@ -8556,7 +8972,7 @@
           <a:noFill/>
         </p:spPr>
         <p:txBody>
-          <a:bodyPr wrap="square" lIns="0" rIns="0" tIns="0" bIns="0" anchor="t">
+          <a:bodyPr wrap="square" lIns="0" tIns="0" rIns="0" bIns="0" anchor="t">
             <a:spAutoFit/>
           </a:bodyPr>
           <a:lstStyle/>
@@ -8587,7 +9003,7 @@
 </file>
 
 <file path=ppt/slides/slide14.xml><?xml version="1.0" encoding="utf-8"?>
-<p:sld xmlns:a="http://schemas.openxmlformats.org/drawingml/2006/main" xmlns:p="http://schemas.openxmlformats.org/presentationml/2006/main" xmlns:r="http://schemas.openxmlformats.org/officeDocument/2006/relationships">
+<p:sld xmlns:a="http://schemas.openxmlformats.org/drawingml/2006/main" xmlns:r="http://schemas.openxmlformats.org/officeDocument/2006/relationships" xmlns:p="http://schemas.openxmlformats.org/presentationml/2006/main">
   <p:cSld>
     <p:bg>
       <p:bgPr>
@@ -8603,7 +9019,14 @@
         <p:cNvGrpSpPr/>
         <p:nvPr/>
       </p:nvGrpSpPr>
-      <p:grpSpPr/>
+      <p:grpSpPr>
+        <a:xfrm>
+          <a:off x="0" y="0"/>
+          <a:ext cx="0" cy="0"/>
+          <a:chOff x="0" y="0"/>
+          <a:chExt cx="0" cy="0"/>
+        </a:xfrm>
+      </p:grpSpPr>
       <p:sp>
         <p:nvSpPr>
           <p:cNvPr id="2" name="TextBox 1"/>
@@ -8621,7 +9044,7 @@
           <a:noFill/>
         </p:spPr>
         <p:txBody>
-          <a:bodyPr wrap="square" lIns="0" rIns="0" tIns="0" bIns="0" anchor="t">
+          <a:bodyPr wrap="square" lIns="0" tIns="0" rIns="0" bIns="0" anchor="t">
             <a:spAutoFit/>
           </a:bodyPr>
           <a:lstStyle/>
@@ -8660,7 +9083,7 @@
           <a:noFill/>
         </p:spPr>
         <p:txBody>
-          <a:bodyPr wrap="square" lIns="0" rIns="0" tIns="0" bIns="0" anchor="t">
+          <a:bodyPr wrap="square" lIns="0" tIns="0" rIns="0" bIns="0" anchor="t">
             <a:spAutoFit/>
           </a:bodyPr>
           <a:lstStyle/>
@@ -8699,7 +9122,7 @@
           <a:noFill/>
         </p:spPr>
         <p:txBody>
-          <a:bodyPr wrap="square" lIns="0" rIns="0" tIns="0" bIns="0" anchor="t">
+          <a:bodyPr wrap="square" lIns="0" tIns="0" rIns="0" bIns="0" anchor="t">
             <a:spAutoFit/>
           </a:bodyPr>
           <a:lstStyle/>
@@ -8738,7 +9161,7 @@
           <a:noFill/>
         </p:spPr>
         <p:txBody>
-          <a:bodyPr wrap="square" lIns="0" rIns="0" tIns="0" bIns="0" anchor="t">
+          <a:bodyPr wrap="square" lIns="0" tIns="0" rIns="0" bIns="0" anchor="t">
             <a:spAutoFit/>
           </a:bodyPr>
           <a:lstStyle/>
@@ -8774,7 +9197,7 @@
         </p:xfrm>
         <a:graphic>
           <a:graphicData uri="http://schemas.openxmlformats.org/drawingml/2006/chart">
-            <c:chart xmlns:c="http://schemas.openxmlformats.org/drawingml/2006/chart" r:id="rId2"/>
+            <c:chart xmlns:c="http://schemas.openxmlformats.org/drawingml/2006/chart" xmlns:r="http://schemas.openxmlformats.org/officeDocument/2006/relationships" r:id="rId3"/>
           </a:graphicData>
         </a:graphic>
       </p:graphicFrame>
@@ -8821,6 +9244,7 @@
           <a:lstStyle/>
           <a:p>
             <a:pPr algn="ctr"/>
+            <a:endParaRPr/>
           </a:p>
         </p:txBody>
       </p:sp>
@@ -8841,7 +9265,7 @@
           <a:noFill/>
         </p:spPr>
         <p:txBody>
-          <a:bodyPr wrap="square" lIns="0" rIns="0" tIns="0" bIns="0" anchor="t">
+          <a:bodyPr wrap="square" lIns="0" tIns="0" rIns="0" bIns="0" anchor="t">
             <a:spAutoFit/>
           </a:bodyPr>
           <a:lstStyle/>
@@ -8929,7 +9353,7 @@
 </file>
 
 <file path=ppt/slides/slide15.xml><?xml version="1.0" encoding="utf-8"?>
-<p:sld xmlns:a="http://schemas.openxmlformats.org/drawingml/2006/main" xmlns:p="http://schemas.openxmlformats.org/presentationml/2006/main" xmlns:r="http://schemas.openxmlformats.org/officeDocument/2006/relationships">
+<p:sld xmlns:a="http://schemas.openxmlformats.org/drawingml/2006/main" xmlns:r="http://schemas.openxmlformats.org/officeDocument/2006/relationships" xmlns:p="http://schemas.openxmlformats.org/presentationml/2006/main">
   <p:cSld>
     <p:bg>
       <p:bgPr>
@@ -8945,7 +9369,14 @@
         <p:cNvGrpSpPr/>
         <p:nvPr/>
       </p:nvGrpSpPr>
-      <p:grpSpPr/>
+      <p:grpSpPr>
+        <a:xfrm>
+          <a:off x="0" y="0"/>
+          <a:ext cx="0" cy="0"/>
+          <a:chOff x="0" y="0"/>
+          <a:chExt cx="0" cy="0"/>
+        </a:xfrm>
+      </p:grpSpPr>
       <p:sp>
         <p:nvSpPr>
           <p:cNvPr id="2" name="TextBox 1"/>
@@ -8963,7 +9394,7 @@
           <a:noFill/>
         </p:spPr>
         <p:txBody>
-          <a:bodyPr wrap="square" lIns="0" rIns="0" tIns="0" bIns="0" anchor="t">
+          <a:bodyPr wrap="square" lIns="0" tIns="0" rIns="0" bIns="0" anchor="t">
             <a:spAutoFit/>
           </a:bodyPr>
           <a:lstStyle/>
@@ -9002,7 +9433,7 @@
           <a:noFill/>
         </p:spPr>
         <p:txBody>
-          <a:bodyPr wrap="square" lIns="0" rIns="0" tIns="0" bIns="0" anchor="t">
+          <a:bodyPr wrap="square" lIns="0" tIns="0" rIns="0" bIns="0" anchor="t">
             <a:spAutoFit/>
           </a:bodyPr>
           <a:lstStyle/>
@@ -9041,7 +9472,7 @@
           <a:noFill/>
         </p:spPr>
         <p:txBody>
-          <a:bodyPr wrap="square" lIns="0" rIns="0" tIns="0" bIns="0" anchor="t">
+          <a:bodyPr wrap="square" lIns="0" tIns="0" rIns="0" bIns="0" anchor="t">
             <a:spAutoFit/>
           </a:bodyPr>
           <a:lstStyle/>
@@ -9080,7 +9511,7 @@
           <a:noFill/>
         </p:spPr>
         <p:txBody>
-          <a:bodyPr wrap="square" lIns="0" rIns="0" tIns="0" bIns="0" anchor="t">
+          <a:bodyPr wrap="square" lIns="0" tIns="0" rIns="0" bIns="0" anchor="t">
             <a:spAutoFit/>
           </a:bodyPr>
           <a:lstStyle/>
@@ -9119,7 +9550,7 @@
           <a:noFill/>
         </p:spPr>
         <p:txBody>
-          <a:bodyPr wrap="square" lIns="0" rIns="0" tIns="0" bIns="0" anchor="t">
+          <a:bodyPr wrap="square" lIns="0" tIns="0" rIns="0" bIns="0" anchor="t">
             <a:spAutoFit/>
           </a:bodyPr>
           <a:lstStyle/>
@@ -9158,7 +9589,7 @@
           <a:noFill/>
         </p:spPr>
         <p:txBody>
-          <a:bodyPr wrap="square" lIns="0" rIns="0" tIns="0" bIns="0" anchor="t">
+          <a:bodyPr wrap="square" lIns="0" tIns="0" rIns="0" bIns="0" anchor="t">
             <a:spAutoFit/>
           </a:bodyPr>
           <a:lstStyle/>
@@ -9197,7 +9628,7 @@
           <a:noFill/>
         </p:spPr>
         <p:txBody>
-          <a:bodyPr wrap="square" lIns="0" rIns="0" tIns="0" bIns="0" anchor="t">
+          <a:bodyPr wrap="square" lIns="0" tIns="0" rIns="0" bIns="0" anchor="t">
             <a:spAutoFit/>
           </a:bodyPr>
           <a:lstStyle/>
@@ -9236,7 +9667,7 @@
           <a:noFill/>
         </p:spPr>
         <p:txBody>
-          <a:bodyPr wrap="square" lIns="0" rIns="0" tIns="0" bIns="0" anchor="t">
+          <a:bodyPr wrap="square" lIns="0" tIns="0" rIns="0" bIns="0" anchor="t">
             <a:spAutoFit/>
           </a:bodyPr>
           <a:lstStyle/>
@@ -9301,6 +9732,7 @@
           <a:lstStyle/>
           <a:p>
             <a:pPr algn="ctr"/>
+            <a:endParaRPr/>
           </a:p>
         </p:txBody>
       </p:sp>
@@ -9321,7 +9753,7 @@
           <a:noFill/>
         </p:spPr>
         <p:txBody>
-          <a:bodyPr wrap="square" lIns="0" rIns="0" tIns="0" bIns="0" anchor="t">
+          <a:bodyPr wrap="square" lIns="0" tIns="0" rIns="0" bIns="0" anchor="t">
             <a:spAutoFit/>
           </a:bodyPr>
           <a:lstStyle/>
@@ -9360,7 +9792,7 @@
           <a:noFill/>
         </p:spPr>
         <p:txBody>
-          <a:bodyPr wrap="square" lIns="0" rIns="0" tIns="0" bIns="0" anchor="t">
+          <a:bodyPr wrap="square" lIns="0" tIns="0" rIns="0" bIns="0" anchor="t">
             <a:spAutoFit/>
           </a:bodyPr>
           <a:lstStyle/>
@@ -9425,6 +9857,7 @@
           <a:lstStyle/>
           <a:p>
             <a:pPr algn="ctr"/>
+            <a:endParaRPr/>
           </a:p>
         </p:txBody>
       </p:sp>
@@ -9445,7 +9878,7 @@
           <a:noFill/>
         </p:spPr>
         <p:txBody>
-          <a:bodyPr wrap="square" lIns="0" rIns="0" tIns="0" bIns="0" anchor="t">
+          <a:bodyPr wrap="square" lIns="0" tIns="0" rIns="0" bIns="0" anchor="t">
             <a:spAutoFit/>
           </a:bodyPr>
           <a:lstStyle/>
@@ -9484,7 +9917,7 @@
           <a:noFill/>
         </p:spPr>
         <p:txBody>
-          <a:bodyPr wrap="square" lIns="0" rIns="0" tIns="0" bIns="0" anchor="t">
+          <a:bodyPr wrap="square" lIns="0" tIns="0" rIns="0" bIns="0" anchor="t">
             <a:spAutoFit/>
           </a:bodyPr>
           <a:lstStyle/>
@@ -9549,6 +9982,7 @@
           <a:lstStyle/>
           <a:p>
             <a:pPr algn="ctr"/>
+            <a:endParaRPr/>
           </a:p>
         </p:txBody>
       </p:sp>
@@ -9569,7 +10003,7 @@
           <a:noFill/>
         </p:spPr>
         <p:txBody>
-          <a:bodyPr wrap="square" lIns="0" rIns="0" tIns="0" bIns="0" anchor="t">
+          <a:bodyPr wrap="square" lIns="0" tIns="0" rIns="0" bIns="0" anchor="t">
             <a:spAutoFit/>
           </a:bodyPr>
           <a:lstStyle/>
@@ -9608,7 +10042,7 @@
           <a:noFill/>
         </p:spPr>
         <p:txBody>
-          <a:bodyPr wrap="square" lIns="0" rIns="0" tIns="0" bIns="0" anchor="t">
+          <a:bodyPr wrap="square" lIns="0" tIns="0" rIns="0" bIns="0" anchor="t">
             <a:spAutoFit/>
           </a:bodyPr>
           <a:lstStyle/>
@@ -9647,7 +10081,7 @@
           <a:noFill/>
         </p:spPr>
         <p:txBody>
-          <a:bodyPr wrap="square" lIns="0" rIns="0" tIns="0" bIns="0" anchor="t">
+          <a:bodyPr wrap="square" lIns="0" tIns="0" rIns="0" bIns="0" anchor="t">
             <a:spAutoFit/>
           </a:bodyPr>
           <a:lstStyle/>
@@ -9712,6 +10146,7 @@
           <a:lstStyle/>
           <a:p>
             <a:pPr algn="ctr"/>
+            <a:endParaRPr/>
           </a:p>
         </p:txBody>
       </p:sp>
@@ -9732,7 +10167,7 @@
           <a:noFill/>
         </p:spPr>
         <p:txBody>
-          <a:bodyPr wrap="square" lIns="0" rIns="0" tIns="0" bIns="0" anchor="t">
+          <a:bodyPr wrap="square" lIns="0" tIns="0" rIns="0" bIns="0" anchor="t">
             <a:spAutoFit/>
           </a:bodyPr>
           <a:lstStyle/>
@@ -9771,7 +10206,7 @@
           <a:noFill/>
         </p:spPr>
         <p:txBody>
-          <a:bodyPr wrap="square" lIns="0" rIns="0" tIns="0" bIns="0" anchor="t">
+          <a:bodyPr wrap="square" lIns="0" tIns="0" rIns="0" bIns="0" anchor="t">
             <a:spAutoFit/>
           </a:bodyPr>
           <a:lstStyle/>
@@ -9836,6 +10271,7 @@
           <a:lstStyle/>
           <a:p>
             <a:pPr algn="ctr"/>
+            <a:endParaRPr/>
           </a:p>
         </p:txBody>
       </p:sp>
@@ -9856,7 +10292,7 @@
           <a:noFill/>
         </p:spPr>
         <p:txBody>
-          <a:bodyPr wrap="square" lIns="0" rIns="0" tIns="0" bIns="0" anchor="t">
+          <a:bodyPr wrap="square" lIns="0" tIns="0" rIns="0" bIns="0" anchor="t">
             <a:spAutoFit/>
           </a:bodyPr>
           <a:lstStyle/>
@@ -9895,7 +10331,7 @@
           <a:noFill/>
         </p:spPr>
         <p:txBody>
-          <a:bodyPr wrap="square" lIns="0" rIns="0" tIns="0" bIns="0" anchor="t">
+          <a:bodyPr wrap="square" lIns="0" tIns="0" rIns="0" bIns="0" anchor="t">
             <a:spAutoFit/>
           </a:bodyPr>
           <a:lstStyle/>
@@ -9960,6 +10396,7 @@
           <a:lstStyle/>
           <a:p>
             <a:pPr algn="ctr"/>
+            <a:endParaRPr/>
           </a:p>
         </p:txBody>
       </p:sp>
@@ -9980,7 +10417,7 @@
           <a:noFill/>
         </p:spPr>
         <p:txBody>
-          <a:bodyPr wrap="square" lIns="0" rIns="0" tIns="0" bIns="0" anchor="t">
+          <a:bodyPr wrap="square" lIns="0" tIns="0" rIns="0" bIns="0" anchor="t">
             <a:spAutoFit/>
           </a:bodyPr>
           <a:lstStyle/>
@@ -10019,7 +10456,7 @@
           <a:noFill/>
         </p:spPr>
         <p:txBody>
-          <a:bodyPr wrap="square" lIns="0" rIns="0" tIns="0" bIns="0" anchor="t">
+          <a:bodyPr wrap="square" lIns="0" tIns="0" rIns="0" bIns="0" anchor="t">
             <a:spAutoFit/>
           </a:bodyPr>
           <a:lstStyle/>
@@ -10058,7 +10495,7 @@
           <a:noFill/>
         </p:spPr>
         <p:txBody>
-          <a:bodyPr wrap="square" lIns="0" rIns="0" tIns="0" bIns="0" anchor="t">
+          <a:bodyPr wrap="square" lIns="0" tIns="0" rIns="0" bIns="0" anchor="t">
             <a:spAutoFit/>
           </a:bodyPr>
           <a:lstStyle/>
@@ -10123,6 +10560,7 @@
           <a:lstStyle/>
           <a:p>
             <a:pPr algn="ctr"/>
+            <a:endParaRPr/>
           </a:p>
         </p:txBody>
       </p:sp>
@@ -10143,7 +10581,7 @@
           <a:noFill/>
         </p:spPr>
         <p:txBody>
-          <a:bodyPr wrap="square" lIns="0" rIns="0" tIns="0" bIns="0" anchor="t">
+          <a:bodyPr wrap="square" lIns="0" tIns="0" rIns="0" bIns="0" anchor="t">
             <a:spAutoFit/>
           </a:bodyPr>
           <a:lstStyle/>
@@ -10238,7 +10676,7 @@
 </file>
 
 <file path=ppt/slides/slide16.xml><?xml version="1.0" encoding="utf-8"?>
-<p:sld xmlns:a="http://schemas.openxmlformats.org/drawingml/2006/main" xmlns:p="http://schemas.openxmlformats.org/presentationml/2006/main" xmlns:r="http://schemas.openxmlformats.org/officeDocument/2006/relationships">
+<p:sld xmlns:a="http://schemas.openxmlformats.org/drawingml/2006/main" xmlns:r="http://schemas.openxmlformats.org/officeDocument/2006/relationships" xmlns:p="http://schemas.openxmlformats.org/presentationml/2006/main">
   <p:cSld>
     <p:bg>
       <p:bgPr>
@@ -10254,7 +10692,14 @@
         <p:cNvGrpSpPr/>
         <p:nvPr/>
       </p:nvGrpSpPr>
-      <p:grpSpPr/>
+      <p:grpSpPr>
+        <a:xfrm>
+          <a:off x="0" y="0"/>
+          <a:ext cx="0" cy="0"/>
+          <a:chOff x="0" y="0"/>
+          <a:chExt cx="0" cy="0"/>
+        </a:xfrm>
+      </p:grpSpPr>
       <p:sp>
         <p:nvSpPr>
           <p:cNvPr id="2" name="TextBox 1"/>
@@ -10272,7 +10717,7 @@
           <a:noFill/>
         </p:spPr>
         <p:txBody>
-          <a:bodyPr wrap="square" lIns="0" rIns="0" tIns="0" bIns="0" anchor="t">
+          <a:bodyPr wrap="square" lIns="0" tIns="0" rIns="0" bIns="0" anchor="t">
             <a:spAutoFit/>
           </a:bodyPr>
           <a:lstStyle/>
@@ -10311,7 +10756,7 @@
           <a:noFill/>
         </p:spPr>
         <p:txBody>
-          <a:bodyPr wrap="square" lIns="0" rIns="0" tIns="0" bIns="0" anchor="t">
+          <a:bodyPr wrap="square" lIns="0" tIns="0" rIns="0" bIns="0" anchor="t">
             <a:spAutoFit/>
           </a:bodyPr>
           <a:lstStyle/>
@@ -10350,7 +10795,7 @@
           <a:noFill/>
         </p:spPr>
         <p:txBody>
-          <a:bodyPr wrap="square" lIns="0" rIns="0" tIns="0" bIns="0" anchor="t">
+          <a:bodyPr wrap="square" lIns="0" tIns="0" rIns="0" bIns="0" anchor="t">
             <a:spAutoFit/>
           </a:bodyPr>
           <a:lstStyle/>
@@ -10389,7 +10834,7 @@
           <a:noFill/>
         </p:spPr>
         <p:txBody>
-          <a:bodyPr wrap="square" lIns="0" rIns="0" tIns="0" bIns="0" anchor="t">
+          <a:bodyPr wrap="square" lIns="0" tIns="0" rIns="0" bIns="0" anchor="t">
             <a:spAutoFit/>
           </a:bodyPr>
           <a:lstStyle/>
@@ -10425,7 +10870,7 @@
         </p:xfrm>
         <a:graphic>
           <a:graphicData uri="http://schemas.openxmlformats.org/drawingml/2006/chart">
-            <c:chart xmlns:c="http://schemas.openxmlformats.org/drawingml/2006/chart" r:id="rId2"/>
+            <c:chart xmlns:c="http://schemas.openxmlformats.org/drawingml/2006/chart" xmlns:r="http://schemas.openxmlformats.org/officeDocument/2006/relationships" r:id="rId3"/>
           </a:graphicData>
         </a:graphic>
       </p:graphicFrame>
@@ -10472,6 +10917,7 @@
           <a:lstStyle/>
           <a:p>
             <a:pPr algn="ctr"/>
+            <a:endParaRPr/>
           </a:p>
         </p:txBody>
       </p:sp>
@@ -10492,7 +10938,7 @@
           <a:noFill/>
         </p:spPr>
         <p:txBody>
-          <a:bodyPr wrap="square" lIns="0" rIns="0" tIns="0" bIns="0" anchor="t">
+          <a:bodyPr wrap="square" lIns="0" tIns="0" rIns="0" bIns="0" anchor="t">
             <a:spAutoFit/>
           </a:bodyPr>
           <a:lstStyle/>
@@ -10589,7 +11035,7 @@
 </file>
 
 <file path=ppt/slides/slide17.xml><?xml version="1.0" encoding="utf-8"?>
-<p:sld xmlns:a="http://schemas.openxmlformats.org/drawingml/2006/main" xmlns:p="http://schemas.openxmlformats.org/presentationml/2006/main" xmlns:r="http://schemas.openxmlformats.org/officeDocument/2006/relationships">
+<p:sld xmlns:a="http://schemas.openxmlformats.org/drawingml/2006/main" xmlns:r="http://schemas.openxmlformats.org/officeDocument/2006/relationships" xmlns:p="http://schemas.openxmlformats.org/presentationml/2006/main">
   <p:cSld>
     <p:bg>
       <p:bgPr>
@@ -10605,7 +11051,14 @@
         <p:cNvGrpSpPr/>
         <p:nvPr/>
       </p:nvGrpSpPr>
-      <p:grpSpPr/>
+      <p:grpSpPr>
+        <a:xfrm>
+          <a:off x="0" y="0"/>
+          <a:ext cx="0" cy="0"/>
+          <a:chOff x="0" y="0"/>
+          <a:chExt cx="0" cy="0"/>
+        </a:xfrm>
+      </p:grpSpPr>
       <p:sp>
         <p:nvSpPr>
           <p:cNvPr id="2" name="TextBox 1"/>
@@ -10623,7 +11076,7 @@
           <a:noFill/>
         </p:spPr>
         <p:txBody>
-          <a:bodyPr wrap="square" lIns="0" rIns="0" tIns="0" bIns="0" anchor="t">
+          <a:bodyPr wrap="square" lIns="0" tIns="0" rIns="0" bIns="0" anchor="t">
             <a:spAutoFit/>
           </a:bodyPr>
           <a:lstStyle/>
@@ -10662,7 +11115,7 @@
           <a:noFill/>
         </p:spPr>
         <p:txBody>
-          <a:bodyPr wrap="square" lIns="0" rIns="0" tIns="0" bIns="0" anchor="t">
+          <a:bodyPr wrap="square" lIns="0" tIns="0" rIns="0" bIns="0" anchor="t">
             <a:spAutoFit/>
           </a:bodyPr>
           <a:lstStyle/>
@@ -10701,7 +11154,7 @@
           <a:noFill/>
         </p:spPr>
         <p:txBody>
-          <a:bodyPr wrap="square" lIns="0" rIns="0" tIns="0" bIns="0" anchor="t">
+          <a:bodyPr wrap="square" lIns="0" tIns="0" rIns="0" bIns="0" anchor="t">
             <a:spAutoFit/>
           </a:bodyPr>
           <a:lstStyle/>
@@ -10740,7 +11193,7 @@
           <a:noFill/>
         </p:spPr>
         <p:txBody>
-          <a:bodyPr wrap="square" lIns="0" rIns="0" tIns="0" bIns="0" anchor="t">
+          <a:bodyPr wrap="square" lIns="0" tIns="0" rIns="0" bIns="0" anchor="t">
             <a:spAutoFit/>
           </a:bodyPr>
           <a:lstStyle/>
@@ -10805,6 +11258,7 @@
           <a:lstStyle/>
           <a:p>
             <a:pPr algn="ctr"/>
+            <a:endParaRPr/>
           </a:p>
         </p:txBody>
       </p:sp>
@@ -10845,7 +11299,7 @@
           </a:fontRef>
         </p:style>
         <p:txBody>
-          <a:bodyPr rtlCol="0" anchor="ctr" lIns="0" rIns="0" tIns="0" bIns="0"/>
+          <a:bodyPr lIns="0" tIns="0" rIns="0" bIns="0" rtlCol="0" anchor="ctr"/>
           <a:lstStyle/>
           <a:p>
             <a:pPr algn="ctr"/>
@@ -10878,7 +11332,7 @@
           <a:noFill/>
         </p:spPr>
         <p:txBody>
-          <a:bodyPr wrap="square" lIns="0" rIns="0" tIns="0" bIns="0" anchor="ctr">
+          <a:bodyPr wrap="square" lIns="0" tIns="0" rIns="0" bIns="0" anchor="ctr">
             <a:spAutoFit/>
           </a:bodyPr>
           <a:lstStyle/>
@@ -10917,7 +11371,7 @@
           <a:noFill/>
         </p:spPr>
         <p:txBody>
-          <a:bodyPr wrap="square" lIns="0" rIns="0" tIns="0" bIns="0" anchor="ctr">
+          <a:bodyPr wrap="square" lIns="0" tIns="0" rIns="0" bIns="0" anchor="ctr">
             <a:spAutoFit/>
           </a:bodyPr>
           <a:lstStyle/>
@@ -10982,6 +11436,7 @@
           <a:lstStyle/>
           <a:p>
             <a:pPr algn="ctr"/>
+            <a:endParaRPr/>
           </a:p>
         </p:txBody>
       </p:sp>
@@ -11022,7 +11477,7 @@
           </a:fontRef>
         </p:style>
         <p:txBody>
-          <a:bodyPr rtlCol="0" anchor="ctr" lIns="0" rIns="0" tIns="0" bIns="0"/>
+          <a:bodyPr lIns="0" tIns="0" rIns="0" bIns="0" rtlCol="0" anchor="ctr"/>
           <a:lstStyle/>
           <a:p>
             <a:pPr algn="ctr"/>
@@ -11055,7 +11510,7 @@
           <a:noFill/>
         </p:spPr>
         <p:txBody>
-          <a:bodyPr wrap="square" lIns="0" rIns="0" tIns="0" bIns="0" anchor="ctr">
+          <a:bodyPr wrap="square" lIns="0" tIns="0" rIns="0" bIns="0" anchor="ctr">
             <a:spAutoFit/>
           </a:bodyPr>
           <a:lstStyle/>
@@ -11094,7 +11549,7 @@
           <a:noFill/>
         </p:spPr>
         <p:txBody>
-          <a:bodyPr wrap="square" lIns="0" rIns="0" tIns="0" bIns="0" anchor="ctr">
+          <a:bodyPr wrap="square" lIns="0" tIns="0" rIns="0" bIns="0" anchor="ctr">
             <a:spAutoFit/>
           </a:bodyPr>
           <a:lstStyle/>
@@ -11159,6 +11614,7 @@
           <a:lstStyle/>
           <a:p>
             <a:pPr algn="ctr"/>
+            <a:endParaRPr/>
           </a:p>
         </p:txBody>
       </p:sp>
@@ -11199,7 +11655,7 @@
           </a:fontRef>
         </p:style>
         <p:txBody>
-          <a:bodyPr rtlCol="0" anchor="ctr" lIns="0" rIns="0" tIns="0" bIns="0"/>
+          <a:bodyPr lIns="0" tIns="0" rIns="0" bIns="0" rtlCol="0" anchor="ctr"/>
           <a:lstStyle/>
           <a:p>
             <a:pPr algn="ctr"/>
@@ -11232,7 +11688,7 @@
           <a:noFill/>
         </p:spPr>
         <p:txBody>
-          <a:bodyPr wrap="square" lIns="0" rIns="0" tIns="0" bIns="0" anchor="ctr">
+          <a:bodyPr wrap="square" lIns="0" tIns="0" rIns="0" bIns="0" anchor="ctr">
             <a:spAutoFit/>
           </a:bodyPr>
           <a:lstStyle/>
@@ -11271,7 +11727,7 @@
           <a:noFill/>
         </p:spPr>
         <p:txBody>
-          <a:bodyPr wrap="square" lIns="0" rIns="0" tIns="0" bIns="0" anchor="ctr">
+          <a:bodyPr wrap="square" lIns="0" tIns="0" rIns="0" bIns="0" anchor="ctr">
             <a:spAutoFit/>
           </a:bodyPr>
           <a:lstStyle/>
@@ -11336,6 +11792,7 @@
           <a:lstStyle/>
           <a:p>
             <a:pPr algn="ctr"/>
+            <a:endParaRPr/>
           </a:p>
         </p:txBody>
       </p:sp>
@@ -11376,7 +11833,7 @@
           </a:fontRef>
         </p:style>
         <p:txBody>
-          <a:bodyPr rtlCol="0" anchor="ctr" lIns="0" rIns="0" tIns="0" bIns="0"/>
+          <a:bodyPr lIns="0" tIns="0" rIns="0" bIns="0" rtlCol="0" anchor="ctr"/>
           <a:lstStyle/>
           <a:p>
             <a:pPr algn="ctr"/>
@@ -11409,7 +11866,7 @@
           <a:noFill/>
         </p:spPr>
         <p:txBody>
-          <a:bodyPr wrap="square" lIns="0" rIns="0" tIns="0" bIns="0" anchor="ctr">
+          <a:bodyPr wrap="square" lIns="0" tIns="0" rIns="0" bIns="0" anchor="ctr">
             <a:spAutoFit/>
           </a:bodyPr>
           <a:lstStyle/>
@@ -11448,7 +11905,7 @@
           <a:noFill/>
         </p:spPr>
         <p:txBody>
-          <a:bodyPr wrap="square" lIns="0" rIns="0" tIns="0" bIns="0" anchor="ctr">
+          <a:bodyPr wrap="square" lIns="0" tIns="0" rIns="0" bIns="0" anchor="ctr">
             <a:spAutoFit/>
           </a:bodyPr>
           <a:lstStyle/>
@@ -11513,6 +11970,7 @@
           <a:lstStyle/>
           <a:p>
             <a:pPr algn="ctr"/>
+            <a:endParaRPr/>
           </a:p>
         </p:txBody>
       </p:sp>
@@ -11553,7 +12011,7 @@
           </a:fontRef>
         </p:style>
         <p:txBody>
-          <a:bodyPr rtlCol="0" anchor="ctr" lIns="0" rIns="0" tIns="0" bIns="0"/>
+          <a:bodyPr lIns="0" tIns="0" rIns="0" bIns="0" rtlCol="0" anchor="ctr"/>
           <a:lstStyle/>
           <a:p>
             <a:pPr algn="ctr"/>
@@ -11586,7 +12044,7 @@
           <a:noFill/>
         </p:spPr>
         <p:txBody>
-          <a:bodyPr wrap="square" lIns="0" rIns="0" tIns="0" bIns="0" anchor="ctr">
+          <a:bodyPr wrap="square" lIns="0" tIns="0" rIns="0" bIns="0" anchor="ctr">
             <a:spAutoFit/>
           </a:bodyPr>
           <a:lstStyle/>
@@ -11625,7 +12083,7 @@
           <a:noFill/>
         </p:spPr>
         <p:txBody>
-          <a:bodyPr wrap="square" lIns="0" rIns="0" tIns="0" bIns="0" anchor="ctr">
+          <a:bodyPr wrap="square" lIns="0" tIns="0" rIns="0" bIns="0" anchor="ctr">
             <a:spAutoFit/>
           </a:bodyPr>
           <a:lstStyle/>
@@ -11656,7 +12114,7 @@
 </file>
 
 <file path=ppt/slides/slide18.xml><?xml version="1.0" encoding="utf-8"?>
-<p:sld xmlns:a="http://schemas.openxmlformats.org/drawingml/2006/main" xmlns:p="http://schemas.openxmlformats.org/presentationml/2006/main" xmlns:r="http://schemas.openxmlformats.org/officeDocument/2006/relationships">
+<p:sld xmlns:a="http://schemas.openxmlformats.org/drawingml/2006/main" xmlns:r="http://schemas.openxmlformats.org/officeDocument/2006/relationships" xmlns:p="http://schemas.openxmlformats.org/presentationml/2006/main">
   <p:cSld>
     <p:bg>
       <p:bgPr>
@@ -11672,7 +12130,14 @@
         <p:cNvGrpSpPr/>
         <p:nvPr/>
       </p:nvGrpSpPr>
-      <p:grpSpPr/>
+      <p:grpSpPr>
+        <a:xfrm>
+          <a:off x="0" y="0"/>
+          <a:ext cx="0" cy="0"/>
+          <a:chOff x="0" y="0"/>
+          <a:chExt cx="0" cy="0"/>
+        </a:xfrm>
+      </p:grpSpPr>
       <p:sp>
         <p:nvSpPr>
           <p:cNvPr id="2" name="TextBox 1"/>
@@ -11690,7 +12155,7 @@
           <a:noFill/>
         </p:spPr>
         <p:txBody>
-          <a:bodyPr wrap="square" lIns="0" rIns="0" tIns="0" bIns="0" anchor="t">
+          <a:bodyPr wrap="square" lIns="0" tIns="0" rIns="0" bIns="0" anchor="t">
             <a:spAutoFit/>
           </a:bodyPr>
           <a:lstStyle/>
@@ -11729,7 +12194,7 @@
           <a:noFill/>
         </p:spPr>
         <p:txBody>
-          <a:bodyPr wrap="square" lIns="0" rIns="0" tIns="0" bIns="0" anchor="t">
+          <a:bodyPr wrap="square" lIns="0" tIns="0" rIns="0" bIns="0" anchor="t">
             <a:spAutoFit/>
           </a:bodyPr>
           <a:lstStyle/>
@@ -11794,6 +12259,7 @@
           <a:lstStyle/>
           <a:p>
             <a:pPr algn="ctr"/>
+            <a:endParaRPr/>
           </a:p>
         </p:txBody>
       </p:sp>
@@ -11814,7 +12280,7 @@
           <a:noFill/>
         </p:spPr>
         <p:txBody>
-          <a:bodyPr wrap="square" lIns="0" rIns="0" tIns="0" bIns="0" anchor="t">
+          <a:bodyPr wrap="square" lIns="0" tIns="0" rIns="0" bIns="0" anchor="t">
             <a:spAutoFit/>
           </a:bodyPr>
           <a:lstStyle/>
@@ -11853,7 +12319,7 @@
           <a:noFill/>
         </p:spPr>
         <p:txBody>
-          <a:bodyPr wrap="square" lIns="0" rIns="0" tIns="0" bIns="0" anchor="t">
+          <a:bodyPr wrap="square" lIns="0" tIns="0" rIns="0" bIns="0" anchor="t">
             <a:spAutoFit/>
           </a:bodyPr>
           <a:lstStyle/>
@@ -11918,6 +12384,7 @@
           <a:lstStyle/>
           <a:p>
             <a:pPr algn="ctr"/>
+            <a:endParaRPr/>
           </a:p>
         </p:txBody>
       </p:sp>
@@ -11938,7 +12405,7 @@
           <a:noFill/>
         </p:spPr>
         <p:txBody>
-          <a:bodyPr wrap="square" lIns="0" rIns="0" tIns="0" bIns="0" anchor="t">
+          <a:bodyPr wrap="square" lIns="0" tIns="0" rIns="0" bIns="0" anchor="t">
             <a:spAutoFit/>
           </a:bodyPr>
           <a:lstStyle/>
@@ -11977,7 +12444,7 @@
           <a:noFill/>
         </p:spPr>
         <p:txBody>
-          <a:bodyPr wrap="square" lIns="0" rIns="0" tIns="0" bIns="0" anchor="t">
+          <a:bodyPr wrap="square" lIns="0" tIns="0" rIns="0" bIns="0" anchor="t">
             <a:spAutoFit/>
           </a:bodyPr>
           <a:lstStyle/>
@@ -12042,6 +12509,7 @@
           <a:lstStyle/>
           <a:p>
             <a:pPr algn="ctr"/>
+            <a:endParaRPr/>
           </a:p>
         </p:txBody>
       </p:sp>
@@ -12062,7 +12530,7 @@
           <a:noFill/>
         </p:spPr>
         <p:txBody>
-          <a:bodyPr wrap="square" lIns="0" rIns="0" tIns="0" bIns="0" anchor="t">
+          <a:bodyPr wrap="square" lIns="0" tIns="0" rIns="0" bIns="0" anchor="t">
             <a:spAutoFit/>
           </a:bodyPr>
           <a:lstStyle/>
@@ -12101,7 +12569,7 @@
           <a:noFill/>
         </p:spPr>
         <p:txBody>
-          <a:bodyPr wrap="square" lIns="0" rIns="0" tIns="0" bIns="0" anchor="t">
+          <a:bodyPr wrap="square" lIns="0" tIns="0" rIns="0" bIns="0" anchor="t">
             <a:spAutoFit/>
           </a:bodyPr>
           <a:lstStyle/>
@@ -12140,7 +12608,7 @@
           <a:noFill/>
         </p:spPr>
         <p:txBody>
-          <a:bodyPr wrap="square" lIns="0" rIns="0" tIns="0" bIns="0" anchor="t">
+          <a:bodyPr wrap="square" lIns="0" tIns="0" rIns="0" bIns="0" anchor="t">
             <a:spAutoFit/>
           </a:bodyPr>
           <a:lstStyle/>
@@ -12171,7 +12639,7 @@
 </file>
 
 <file path=ppt/slides/slide19.xml><?xml version="1.0" encoding="utf-8"?>
-<p:sld xmlns:a="http://schemas.openxmlformats.org/drawingml/2006/main" xmlns:p="http://schemas.openxmlformats.org/presentationml/2006/main" xmlns:r="http://schemas.openxmlformats.org/officeDocument/2006/relationships">
+<p:sld xmlns:a="http://schemas.openxmlformats.org/drawingml/2006/main" xmlns:r="http://schemas.openxmlformats.org/officeDocument/2006/relationships" xmlns:p="http://schemas.openxmlformats.org/presentationml/2006/main">
   <p:cSld>
     <p:bg>
       <p:bgPr>
@@ -12187,7 +12655,14 @@
         <p:cNvGrpSpPr/>
         <p:nvPr/>
       </p:nvGrpSpPr>
-      <p:grpSpPr/>
+      <p:grpSpPr>
+        <a:xfrm>
+          <a:off x="0" y="0"/>
+          <a:ext cx="0" cy="0"/>
+          <a:chOff x="0" y="0"/>
+          <a:chExt cx="0" cy="0"/>
+        </a:xfrm>
+      </p:grpSpPr>
       <p:sp>
         <p:nvSpPr>
           <p:cNvPr id="2" name="Oval 1"/>
@@ -12229,6 +12704,7 @@
           <a:lstStyle/>
           <a:p>
             <a:pPr algn="ctr"/>
+            <a:endParaRPr/>
           </a:p>
         </p:txBody>
       </p:sp>
@@ -12273,6 +12749,7 @@
           <a:lstStyle/>
           <a:p>
             <a:pPr algn="ctr"/>
+            <a:endParaRPr/>
           </a:p>
         </p:txBody>
       </p:sp>
@@ -12293,7 +12770,7 @@
           <a:noFill/>
         </p:spPr>
         <p:txBody>
-          <a:bodyPr wrap="square" lIns="0" rIns="0" tIns="0" bIns="0" anchor="t">
+          <a:bodyPr wrap="square" lIns="0" tIns="0" rIns="0" bIns="0" anchor="t">
             <a:spAutoFit/>
           </a:bodyPr>
           <a:lstStyle/>
@@ -12332,7 +12809,7 @@
           <a:noFill/>
         </p:spPr>
         <p:txBody>
-          <a:bodyPr wrap="square" lIns="0" rIns="0" tIns="0" bIns="0" anchor="t">
+          <a:bodyPr wrap="square" lIns="0" tIns="0" rIns="0" bIns="0" anchor="t">
             <a:spAutoFit/>
           </a:bodyPr>
           <a:lstStyle/>
@@ -12362,8 +12839,8 @@
         </p:nvSpPr>
         <p:spPr>
           <a:xfrm>
-            <a:off x="731520" y="4389120"/>
-            <a:ext cx="7315200" cy="1097280"/>
+            <a:off x="623365" y="4389120"/>
+            <a:ext cx="7315200" cy="246221"/>
           </a:xfrm>
           <a:prstGeom prst="rect">
             <a:avLst/>
@@ -12371,7 +12848,7 @@
           <a:noFill/>
         </p:spPr>
         <p:txBody>
-          <a:bodyPr wrap="square" lIns="0" rIns="0" tIns="0" bIns="0" anchor="t">
+          <a:bodyPr wrap="square" lIns="0" tIns="0" rIns="0" bIns="0" anchor="t">
             <a:spAutoFit/>
           </a:bodyPr>
           <a:lstStyle/>
@@ -12382,29 +12859,13 @@
               </a:spcAft>
             </a:pPr>
             <a:r>
-              <a:rPr sz="1600" b="0" i="0">
+              <a:rPr sz="1600" b="0" i="0" dirty="0">
                 <a:solidFill>
                   <a:srgbClr val="FFFFFF"/>
                 </a:solidFill>
                 <a:latin typeface="Calibri"/>
               </a:rPr>
               <a:t>GitHub: github.com/hahmed1936/Mid-Project</a:t>
-            </a:r>
-          </a:p>
-          <a:p>
-            <a:pPr algn="l">
-              <a:spcAft>
-                <a:spcPts val="0"/>
-              </a:spcAft>
-            </a:pPr>
-            <a:r>
-              <a:rPr sz="1600" b="0" i="0">
-                <a:solidFill>
-                  <a:srgbClr val="FFFFFF"/>
-                </a:solidFill>
-                <a:latin typeface="Calibri"/>
-              </a:rPr>
-              <a:t>Interactive dashboard: Streamlit (link in the repository README)</a:t>
             </a:r>
           </a:p>
         </p:txBody>
@@ -12418,7 +12879,7 @@
 </file>
 
 <file path=ppt/slides/slide2.xml><?xml version="1.0" encoding="utf-8"?>
-<p:sld xmlns:a="http://schemas.openxmlformats.org/drawingml/2006/main" xmlns:p="http://schemas.openxmlformats.org/presentationml/2006/main" xmlns:r="http://schemas.openxmlformats.org/officeDocument/2006/relationships">
+<p:sld xmlns:a="http://schemas.openxmlformats.org/drawingml/2006/main" xmlns:r="http://schemas.openxmlformats.org/officeDocument/2006/relationships" xmlns:p="http://schemas.openxmlformats.org/presentationml/2006/main">
   <p:cSld>
     <p:bg>
       <p:bgPr>
@@ -12434,7 +12895,14 @@
         <p:cNvGrpSpPr/>
         <p:nvPr/>
       </p:nvGrpSpPr>
-      <p:grpSpPr/>
+      <p:grpSpPr>
+        <a:xfrm>
+          <a:off x="0" y="0"/>
+          <a:ext cx="0" cy="0"/>
+          <a:chOff x="0" y="0"/>
+          <a:chExt cx="0" cy="0"/>
+        </a:xfrm>
+      </p:grpSpPr>
       <p:sp>
         <p:nvSpPr>
           <p:cNvPr id="2" name="TextBox 1"/>
@@ -12452,7 +12920,7 @@
           <a:noFill/>
         </p:spPr>
         <p:txBody>
-          <a:bodyPr wrap="square" lIns="0" rIns="0" tIns="0" bIns="0" anchor="t">
+          <a:bodyPr wrap="square" lIns="0" tIns="0" rIns="0" bIns="0" anchor="t">
             <a:spAutoFit/>
           </a:bodyPr>
           <a:lstStyle/>
@@ -12491,7 +12959,7 @@
           <a:noFill/>
         </p:spPr>
         <p:txBody>
-          <a:bodyPr wrap="square" lIns="0" rIns="0" tIns="0" bIns="0" anchor="t">
+          <a:bodyPr wrap="square" lIns="0" tIns="0" rIns="0" bIns="0" anchor="t">
             <a:spAutoFit/>
           </a:bodyPr>
           <a:lstStyle/>
@@ -12530,7 +12998,7 @@
           <a:noFill/>
         </p:spPr>
         <p:txBody>
-          <a:bodyPr wrap="square" lIns="0" rIns="0" tIns="0" bIns="0" anchor="t">
+          <a:bodyPr wrap="square" lIns="0" tIns="0" rIns="0" bIns="0" anchor="t">
             <a:spAutoFit/>
           </a:bodyPr>
           <a:lstStyle/>
@@ -12569,7 +13037,7 @@
           <a:noFill/>
         </p:spPr>
         <p:txBody>
-          <a:bodyPr wrap="square" lIns="0" rIns="0" tIns="0" bIns="0" anchor="t">
+          <a:bodyPr wrap="square" lIns="0" tIns="0" rIns="0" bIns="0" anchor="t">
             <a:spAutoFit/>
           </a:bodyPr>
           <a:lstStyle/>
@@ -12628,7 +13096,7 @@
           </a:fontRef>
         </p:style>
         <p:txBody>
-          <a:bodyPr rtlCol="0" anchor="ctr" lIns="0" rIns="0" tIns="0" bIns="0"/>
+          <a:bodyPr lIns="0" tIns="0" rIns="0" bIns="0" rtlCol="0" anchor="ctr"/>
           <a:lstStyle/>
           <a:p>
             <a:pPr algn="ctr"/>
@@ -12661,7 +13129,7 @@
           <a:noFill/>
         </p:spPr>
         <p:txBody>
-          <a:bodyPr wrap="square" lIns="0" rIns="0" tIns="0" bIns="0" anchor="t">
+          <a:bodyPr wrap="square" lIns="0" tIns="0" rIns="0" bIns="0" anchor="t">
             <a:spAutoFit/>
           </a:bodyPr>
           <a:lstStyle/>
@@ -12700,7 +13168,7 @@
           <a:noFill/>
         </p:spPr>
         <p:txBody>
-          <a:bodyPr wrap="square" lIns="0" rIns="0" tIns="0" bIns="0" anchor="t">
+          <a:bodyPr wrap="square" lIns="0" tIns="0" rIns="0" bIns="0" anchor="t">
             <a:spAutoFit/>
           </a:bodyPr>
           <a:lstStyle/>
@@ -12759,7 +13227,7 @@
           </a:fontRef>
         </p:style>
         <p:txBody>
-          <a:bodyPr rtlCol="0" anchor="ctr" lIns="0" rIns="0" tIns="0" bIns="0"/>
+          <a:bodyPr lIns="0" tIns="0" rIns="0" bIns="0" rtlCol="0" anchor="ctr"/>
           <a:lstStyle/>
           <a:p>
             <a:pPr algn="ctr"/>
@@ -12792,7 +13260,7 @@
           <a:noFill/>
         </p:spPr>
         <p:txBody>
-          <a:bodyPr wrap="square" lIns="0" rIns="0" tIns="0" bIns="0" anchor="t">
+          <a:bodyPr wrap="square" lIns="0" tIns="0" rIns="0" bIns="0" anchor="t">
             <a:spAutoFit/>
           </a:bodyPr>
           <a:lstStyle/>
@@ -12831,7 +13299,7 @@
           <a:noFill/>
         </p:spPr>
         <p:txBody>
-          <a:bodyPr wrap="square" lIns="0" rIns="0" tIns="0" bIns="0" anchor="t">
+          <a:bodyPr wrap="square" lIns="0" tIns="0" rIns="0" bIns="0" anchor="t">
             <a:spAutoFit/>
           </a:bodyPr>
           <a:lstStyle/>
@@ -12890,7 +13358,7 @@
           </a:fontRef>
         </p:style>
         <p:txBody>
-          <a:bodyPr rtlCol="0" anchor="ctr" lIns="0" rIns="0" tIns="0" bIns="0"/>
+          <a:bodyPr lIns="0" tIns="0" rIns="0" bIns="0" rtlCol="0" anchor="ctr"/>
           <a:lstStyle/>
           <a:p>
             <a:pPr algn="ctr"/>
@@ -12923,7 +13391,7 @@
           <a:noFill/>
         </p:spPr>
         <p:txBody>
-          <a:bodyPr wrap="square" lIns="0" rIns="0" tIns="0" bIns="0" anchor="t">
+          <a:bodyPr wrap="square" lIns="0" tIns="0" rIns="0" bIns="0" anchor="t">
             <a:spAutoFit/>
           </a:bodyPr>
           <a:lstStyle/>
@@ -12962,7 +13430,7 @@
           <a:noFill/>
         </p:spPr>
         <p:txBody>
-          <a:bodyPr wrap="square" lIns="0" rIns="0" tIns="0" bIns="0" anchor="t">
+          <a:bodyPr wrap="square" lIns="0" tIns="0" rIns="0" bIns="0" anchor="t">
             <a:spAutoFit/>
           </a:bodyPr>
           <a:lstStyle/>
@@ -13021,7 +13489,7 @@
           </a:fontRef>
         </p:style>
         <p:txBody>
-          <a:bodyPr rtlCol="0" anchor="ctr" lIns="0" rIns="0" tIns="0" bIns="0"/>
+          <a:bodyPr lIns="0" tIns="0" rIns="0" bIns="0" rtlCol="0" anchor="ctr"/>
           <a:lstStyle/>
           <a:p>
             <a:pPr algn="ctr"/>
@@ -13054,7 +13522,7 @@
           <a:noFill/>
         </p:spPr>
         <p:txBody>
-          <a:bodyPr wrap="square" lIns="0" rIns="0" tIns="0" bIns="0" anchor="t">
+          <a:bodyPr wrap="square" lIns="0" tIns="0" rIns="0" bIns="0" anchor="t">
             <a:spAutoFit/>
           </a:bodyPr>
           <a:lstStyle/>
@@ -13093,7 +13561,7 @@
           <a:noFill/>
         </p:spPr>
         <p:txBody>
-          <a:bodyPr wrap="square" lIns="0" rIns="0" tIns="0" bIns="0" anchor="t">
+          <a:bodyPr wrap="square" lIns="0" tIns="0" rIns="0" bIns="0" anchor="t">
             <a:spAutoFit/>
           </a:bodyPr>
           <a:lstStyle/>
@@ -13152,7 +13620,7 @@
           </a:fontRef>
         </p:style>
         <p:txBody>
-          <a:bodyPr rtlCol="0" anchor="ctr" lIns="0" rIns="0" tIns="0" bIns="0"/>
+          <a:bodyPr lIns="0" tIns="0" rIns="0" bIns="0" rtlCol="0" anchor="ctr"/>
           <a:lstStyle/>
           <a:p>
             <a:pPr algn="ctr"/>
@@ -13185,7 +13653,7 @@
           <a:noFill/>
         </p:spPr>
         <p:txBody>
-          <a:bodyPr wrap="square" lIns="0" rIns="0" tIns="0" bIns="0" anchor="t">
+          <a:bodyPr wrap="square" lIns="0" tIns="0" rIns="0" bIns="0" anchor="t">
             <a:spAutoFit/>
           </a:bodyPr>
           <a:lstStyle/>
@@ -13224,7 +13692,7 @@
           <a:noFill/>
         </p:spPr>
         <p:txBody>
-          <a:bodyPr wrap="square" lIns="0" rIns="0" tIns="0" bIns="0" anchor="t">
+          <a:bodyPr wrap="square" lIns="0" tIns="0" rIns="0" bIns="0" anchor="t">
             <a:spAutoFit/>
           </a:bodyPr>
           <a:lstStyle/>
@@ -13287,6 +13755,7 @@
           <a:lstStyle/>
           <a:p>
             <a:pPr algn="ctr"/>
+            <a:endParaRPr/>
           </a:p>
         </p:txBody>
       </p:sp>
@@ -13307,7 +13776,7 @@
           <a:noFill/>
         </p:spPr>
         <p:txBody>
-          <a:bodyPr wrap="square" lIns="0" rIns="0" tIns="0" bIns="0" anchor="t">
+          <a:bodyPr wrap="square" lIns="0" tIns="0" rIns="0" bIns="0" anchor="t">
             <a:spAutoFit/>
           </a:bodyPr>
           <a:lstStyle/>
@@ -13346,7 +13815,7 @@
           <a:noFill/>
         </p:spPr>
         <p:txBody>
-          <a:bodyPr wrap="square" lIns="0" rIns="0" tIns="0" bIns="0" anchor="t">
+          <a:bodyPr wrap="square" lIns="0" tIns="0" rIns="0" bIns="0" anchor="t">
             <a:spAutoFit/>
           </a:bodyPr>
           <a:lstStyle/>
@@ -13377,7 +13846,7 @@
 </file>
 
 <file path=ppt/slides/slide3.xml><?xml version="1.0" encoding="utf-8"?>
-<p:sld xmlns:a="http://schemas.openxmlformats.org/drawingml/2006/main" xmlns:p="http://schemas.openxmlformats.org/presentationml/2006/main" xmlns:r="http://schemas.openxmlformats.org/officeDocument/2006/relationships">
+<p:sld xmlns:a="http://schemas.openxmlformats.org/drawingml/2006/main" xmlns:r="http://schemas.openxmlformats.org/officeDocument/2006/relationships" xmlns:p="http://schemas.openxmlformats.org/presentationml/2006/main">
   <p:cSld>
     <p:bg>
       <p:bgPr>
@@ -13393,7 +13862,14 @@
         <p:cNvGrpSpPr/>
         <p:nvPr/>
       </p:nvGrpSpPr>
-      <p:grpSpPr/>
+      <p:grpSpPr>
+        <a:xfrm>
+          <a:off x="0" y="0"/>
+          <a:ext cx="0" cy="0"/>
+          <a:chOff x="0" y="0"/>
+          <a:chExt cx="0" cy="0"/>
+        </a:xfrm>
+      </p:grpSpPr>
       <p:sp>
         <p:nvSpPr>
           <p:cNvPr id="2" name="TextBox 1"/>
@@ -13411,7 +13887,7 @@
           <a:noFill/>
         </p:spPr>
         <p:txBody>
-          <a:bodyPr wrap="square" lIns="0" rIns="0" tIns="0" bIns="0" anchor="t">
+          <a:bodyPr wrap="square" lIns="0" tIns="0" rIns="0" bIns="0" anchor="t">
             <a:spAutoFit/>
           </a:bodyPr>
           <a:lstStyle/>
@@ -13450,7 +13926,7 @@
           <a:noFill/>
         </p:spPr>
         <p:txBody>
-          <a:bodyPr wrap="square" lIns="0" rIns="0" tIns="0" bIns="0" anchor="t">
+          <a:bodyPr wrap="square" lIns="0" tIns="0" rIns="0" bIns="0" anchor="t">
             <a:spAutoFit/>
           </a:bodyPr>
           <a:lstStyle/>
@@ -13489,7 +13965,7 @@
           <a:noFill/>
         </p:spPr>
         <p:txBody>
-          <a:bodyPr wrap="square" lIns="0" rIns="0" tIns="0" bIns="0" anchor="t">
+          <a:bodyPr wrap="square" lIns="0" tIns="0" rIns="0" bIns="0" anchor="t">
             <a:spAutoFit/>
           </a:bodyPr>
           <a:lstStyle/>
@@ -13528,7 +14004,7 @@
           <a:noFill/>
         </p:spPr>
         <p:txBody>
-          <a:bodyPr wrap="square" lIns="0" rIns="0" tIns="0" bIns="0" anchor="t">
+          <a:bodyPr wrap="square" lIns="0" tIns="0" rIns="0" bIns="0" anchor="t">
             <a:spAutoFit/>
           </a:bodyPr>
           <a:lstStyle/>
@@ -13567,7 +14043,7 @@
           <a:noFill/>
         </p:spPr>
         <p:txBody>
-          <a:bodyPr wrap="square" lIns="0" rIns="0" tIns="0" bIns="0" anchor="t">
+          <a:bodyPr wrap="square" lIns="0" tIns="0" rIns="0" bIns="0" anchor="t">
             <a:spAutoFit/>
           </a:bodyPr>
           <a:lstStyle/>
@@ -13748,6 +14224,7 @@
           <a:lstStyle/>
           <a:p>
             <a:pPr algn="ctr"/>
+            <a:endParaRPr/>
           </a:p>
         </p:txBody>
       </p:sp>
@@ -13768,7 +14245,7 @@
           <a:noFill/>
         </p:spPr>
         <p:txBody>
-          <a:bodyPr wrap="square" lIns="0" rIns="0" tIns="0" bIns="0" anchor="t">
+          <a:bodyPr wrap="square" lIns="0" tIns="0" rIns="0" bIns="0" anchor="t">
             <a:spAutoFit/>
           </a:bodyPr>
           <a:lstStyle/>
@@ -13807,7 +14284,7 @@
           <a:noFill/>
         </p:spPr>
         <p:txBody>
-          <a:bodyPr wrap="square" lIns="0" rIns="0" tIns="0" bIns="0" anchor="t">
+          <a:bodyPr wrap="square" lIns="0" tIns="0" rIns="0" bIns="0" anchor="t">
             <a:spAutoFit/>
           </a:bodyPr>
           <a:lstStyle/>
@@ -13872,6 +14349,7 @@
           <a:lstStyle/>
           <a:p>
             <a:pPr algn="ctr"/>
+            <a:endParaRPr/>
           </a:p>
         </p:txBody>
       </p:sp>
@@ -13892,7 +14370,7 @@
           <a:noFill/>
         </p:spPr>
         <p:txBody>
-          <a:bodyPr wrap="square" lIns="0" rIns="0" tIns="0" bIns="0" anchor="t">
+          <a:bodyPr wrap="square" lIns="0" tIns="0" rIns="0" bIns="0" anchor="t">
             <a:spAutoFit/>
           </a:bodyPr>
           <a:lstStyle/>
@@ -13931,7 +14409,7 @@
           <a:noFill/>
         </p:spPr>
         <p:txBody>
-          <a:bodyPr wrap="square" lIns="0" rIns="0" tIns="0" bIns="0" anchor="t">
+          <a:bodyPr wrap="square" lIns="0" tIns="0" rIns="0" bIns="0" anchor="t">
             <a:spAutoFit/>
           </a:bodyPr>
           <a:lstStyle/>
@@ -13996,6 +14474,7 @@
           <a:lstStyle/>
           <a:p>
             <a:pPr algn="ctr"/>
+            <a:endParaRPr/>
           </a:p>
         </p:txBody>
       </p:sp>
@@ -14016,7 +14495,7 @@
           <a:noFill/>
         </p:spPr>
         <p:txBody>
-          <a:bodyPr wrap="square" lIns="0" rIns="0" tIns="0" bIns="0" anchor="t">
+          <a:bodyPr wrap="square" lIns="0" tIns="0" rIns="0" bIns="0" anchor="t">
             <a:spAutoFit/>
           </a:bodyPr>
           <a:lstStyle/>
@@ -14055,7 +14534,7 @@
           <a:noFill/>
         </p:spPr>
         <p:txBody>
-          <a:bodyPr wrap="square" lIns="0" rIns="0" tIns="0" bIns="0" anchor="t">
+          <a:bodyPr wrap="square" lIns="0" tIns="0" rIns="0" bIns="0" anchor="t">
             <a:spAutoFit/>
           </a:bodyPr>
           <a:lstStyle/>
@@ -14120,6 +14599,7 @@
           <a:lstStyle/>
           <a:p>
             <a:pPr algn="ctr"/>
+            <a:endParaRPr/>
           </a:p>
         </p:txBody>
       </p:sp>
@@ -14140,7 +14620,7 @@
           <a:noFill/>
         </p:spPr>
         <p:txBody>
-          <a:bodyPr wrap="square" lIns="0" rIns="0" tIns="0" bIns="0" anchor="t">
+          <a:bodyPr wrap="square" lIns="0" tIns="0" rIns="0" bIns="0" anchor="t">
             <a:spAutoFit/>
           </a:bodyPr>
           <a:lstStyle/>
@@ -14179,7 +14659,7 @@
           <a:noFill/>
         </p:spPr>
         <p:txBody>
-          <a:bodyPr wrap="square" lIns="0" rIns="0" tIns="0" bIns="0" anchor="t">
+          <a:bodyPr wrap="square" lIns="0" tIns="0" rIns="0" bIns="0" anchor="t">
             <a:spAutoFit/>
           </a:bodyPr>
           <a:lstStyle/>
@@ -14210,7 +14690,7 @@
 </file>
 
 <file path=ppt/slides/slide4.xml><?xml version="1.0" encoding="utf-8"?>
-<p:sld xmlns:a="http://schemas.openxmlformats.org/drawingml/2006/main" xmlns:p="http://schemas.openxmlformats.org/presentationml/2006/main" xmlns:r="http://schemas.openxmlformats.org/officeDocument/2006/relationships">
+<p:sld xmlns:a="http://schemas.openxmlformats.org/drawingml/2006/main" xmlns:r="http://schemas.openxmlformats.org/officeDocument/2006/relationships" xmlns:p="http://schemas.openxmlformats.org/presentationml/2006/main">
   <p:cSld>
     <p:bg>
       <p:bgPr>
@@ -14226,7 +14706,14 @@
         <p:cNvGrpSpPr/>
         <p:nvPr/>
       </p:nvGrpSpPr>
-      <p:grpSpPr/>
+      <p:grpSpPr>
+        <a:xfrm>
+          <a:off x="0" y="0"/>
+          <a:ext cx="0" cy="0"/>
+          <a:chOff x="0" y="0"/>
+          <a:chExt cx="0" cy="0"/>
+        </a:xfrm>
+      </p:grpSpPr>
       <p:sp>
         <p:nvSpPr>
           <p:cNvPr id="2" name="TextBox 1"/>
@@ -14244,7 +14731,7 @@
           <a:noFill/>
         </p:spPr>
         <p:txBody>
-          <a:bodyPr wrap="square" lIns="0" rIns="0" tIns="0" bIns="0" anchor="t">
+          <a:bodyPr wrap="square" lIns="0" tIns="0" rIns="0" bIns="0" anchor="t">
             <a:spAutoFit/>
           </a:bodyPr>
           <a:lstStyle/>
@@ -14283,7 +14770,7 @@
           <a:noFill/>
         </p:spPr>
         <p:txBody>
-          <a:bodyPr wrap="square" lIns="0" rIns="0" tIns="0" bIns="0" anchor="t">
+          <a:bodyPr wrap="square" lIns="0" tIns="0" rIns="0" bIns="0" anchor="t">
             <a:spAutoFit/>
           </a:bodyPr>
           <a:lstStyle/>
@@ -14322,7 +14809,7 @@
           <a:noFill/>
         </p:spPr>
         <p:txBody>
-          <a:bodyPr wrap="square" lIns="0" rIns="0" tIns="0" bIns="0" anchor="t">
+          <a:bodyPr wrap="square" lIns="0" tIns="0" rIns="0" bIns="0" anchor="t">
             <a:spAutoFit/>
           </a:bodyPr>
           <a:lstStyle/>
@@ -14361,7 +14848,7 @@
           <a:noFill/>
         </p:spPr>
         <p:txBody>
-          <a:bodyPr wrap="square" lIns="0" rIns="0" tIns="0" bIns="0" anchor="t">
+          <a:bodyPr wrap="square" lIns="0" tIns="0" rIns="0" bIns="0" anchor="t">
             <a:spAutoFit/>
           </a:bodyPr>
           <a:lstStyle/>
@@ -14426,6 +14913,7 @@
           <a:lstStyle/>
           <a:p>
             <a:pPr algn="ctr"/>
+            <a:endParaRPr/>
           </a:p>
         </p:txBody>
       </p:sp>
@@ -14470,6 +14958,7 @@
           <a:lstStyle/>
           <a:p>
             <a:pPr algn="ctr"/>
+            <a:endParaRPr/>
           </a:p>
         </p:txBody>
       </p:sp>
@@ -14490,7 +14979,7 @@
           <a:noFill/>
         </p:spPr>
         <p:txBody>
-          <a:bodyPr wrap="square" lIns="0" rIns="0" tIns="0" bIns="0" anchor="t">
+          <a:bodyPr wrap="square" lIns="0" tIns="0" rIns="0" bIns="0" anchor="t">
             <a:spAutoFit/>
           </a:bodyPr>
           <a:lstStyle/>
@@ -14529,7 +15018,7 @@
           <a:noFill/>
         </p:spPr>
         <p:txBody>
-          <a:bodyPr wrap="square" lIns="0" rIns="0" tIns="0" bIns="0" anchor="t">
+          <a:bodyPr wrap="square" lIns="0" tIns="0" rIns="0" bIns="0" anchor="t">
             <a:spAutoFit/>
           </a:bodyPr>
           <a:lstStyle/>
@@ -14642,6 +15131,7 @@
           <a:lstStyle/>
           <a:p>
             <a:pPr algn="ctr"/>
+            <a:endParaRPr/>
           </a:p>
         </p:txBody>
       </p:sp>
@@ -14686,6 +15176,7 @@
           <a:lstStyle/>
           <a:p>
             <a:pPr algn="ctr"/>
+            <a:endParaRPr/>
           </a:p>
         </p:txBody>
       </p:sp>
@@ -14706,7 +15197,7 @@
           <a:noFill/>
         </p:spPr>
         <p:txBody>
-          <a:bodyPr wrap="square" lIns="0" rIns="0" tIns="0" bIns="0" anchor="t">
+          <a:bodyPr wrap="square" lIns="0" tIns="0" rIns="0" bIns="0" anchor="t">
             <a:spAutoFit/>
           </a:bodyPr>
           <a:lstStyle/>
@@ -14745,7 +15236,7 @@
           <a:noFill/>
         </p:spPr>
         <p:txBody>
-          <a:bodyPr wrap="square" lIns="0" rIns="0" tIns="0" bIns="0" anchor="t">
+          <a:bodyPr wrap="square" lIns="0" tIns="0" rIns="0" bIns="0" anchor="t">
             <a:spAutoFit/>
           </a:bodyPr>
           <a:lstStyle/>
@@ -14858,6 +15349,7 @@
           <a:lstStyle/>
           <a:p>
             <a:pPr algn="ctr"/>
+            <a:endParaRPr/>
           </a:p>
         </p:txBody>
       </p:sp>
@@ -14902,6 +15394,7 @@
           <a:lstStyle/>
           <a:p>
             <a:pPr algn="ctr"/>
+            <a:endParaRPr/>
           </a:p>
         </p:txBody>
       </p:sp>
@@ -14922,7 +15415,7 @@
           <a:noFill/>
         </p:spPr>
         <p:txBody>
-          <a:bodyPr wrap="square" lIns="0" rIns="0" tIns="0" bIns="0" anchor="t">
+          <a:bodyPr wrap="square" lIns="0" tIns="0" rIns="0" bIns="0" anchor="t">
             <a:spAutoFit/>
           </a:bodyPr>
           <a:lstStyle/>
@@ -14961,7 +15454,7 @@
           <a:noFill/>
         </p:spPr>
         <p:txBody>
-          <a:bodyPr wrap="square" lIns="0" rIns="0" tIns="0" bIns="0" anchor="t">
+          <a:bodyPr wrap="square" lIns="0" tIns="0" rIns="0" bIns="0" anchor="t">
             <a:spAutoFit/>
           </a:bodyPr>
           <a:lstStyle/>
@@ -15106,6 +15599,7 @@
           <a:lstStyle/>
           <a:p>
             <a:pPr algn="ctr"/>
+            <a:endParaRPr/>
           </a:p>
         </p:txBody>
       </p:sp>
@@ -15150,6 +15644,7 @@
           <a:lstStyle/>
           <a:p>
             <a:pPr algn="ctr"/>
+            <a:endParaRPr/>
           </a:p>
         </p:txBody>
       </p:sp>
@@ -15170,7 +15665,7 @@
           <a:noFill/>
         </p:spPr>
         <p:txBody>
-          <a:bodyPr wrap="square" lIns="0" rIns="0" tIns="0" bIns="0" anchor="t">
+          <a:bodyPr wrap="square" lIns="0" tIns="0" rIns="0" bIns="0" anchor="t">
             <a:spAutoFit/>
           </a:bodyPr>
           <a:lstStyle/>
@@ -15209,7 +15704,7 @@
           <a:noFill/>
         </p:spPr>
         <p:txBody>
-          <a:bodyPr wrap="square" lIns="0" rIns="0" tIns="0" bIns="0" anchor="t">
+          <a:bodyPr wrap="square" lIns="0" tIns="0" rIns="0" bIns="0" anchor="t">
             <a:spAutoFit/>
           </a:bodyPr>
           <a:lstStyle/>
@@ -15272,7 +15767,7 @@
 </file>
 
 <file path=ppt/slides/slide5.xml><?xml version="1.0" encoding="utf-8"?>
-<p:sld xmlns:a="http://schemas.openxmlformats.org/drawingml/2006/main" xmlns:p="http://schemas.openxmlformats.org/presentationml/2006/main" xmlns:r="http://schemas.openxmlformats.org/officeDocument/2006/relationships">
+<p:sld xmlns:a="http://schemas.openxmlformats.org/drawingml/2006/main" xmlns:r="http://schemas.openxmlformats.org/officeDocument/2006/relationships" xmlns:p="http://schemas.openxmlformats.org/presentationml/2006/main">
   <p:cSld>
     <p:bg>
       <p:bgPr>
@@ -15288,7 +15783,14 @@
         <p:cNvGrpSpPr/>
         <p:nvPr/>
       </p:nvGrpSpPr>
-      <p:grpSpPr/>
+      <p:grpSpPr>
+        <a:xfrm>
+          <a:off x="0" y="0"/>
+          <a:ext cx="0" cy="0"/>
+          <a:chOff x="0" y="0"/>
+          <a:chExt cx="0" cy="0"/>
+        </a:xfrm>
+      </p:grpSpPr>
       <p:sp>
         <p:nvSpPr>
           <p:cNvPr id="2" name="TextBox 1"/>
@@ -15306,7 +15808,7 @@
           <a:noFill/>
         </p:spPr>
         <p:txBody>
-          <a:bodyPr wrap="square" lIns="0" rIns="0" tIns="0" bIns="0" anchor="t">
+          <a:bodyPr wrap="square" lIns="0" tIns="0" rIns="0" bIns="0" anchor="t">
             <a:spAutoFit/>
           </a:bodyPr>
           <a:lstStyle/>
@@ -15345,7 +15847,7 @@
           <a:noFill/>
         </p:spPr>
         <p:txBody>
-          <a:bodyPr wrap="square" lIns="0" rIns="0" tIns="0" bIns="0" anchor="t">
+          <a:bodyPr wrap="square" lIns="0" tIns="0" rIns="0" bIns="0" anchor="t">
             <a:spAutoFit/>
           </a:bodyPr>
           <a:lstStyle/>
@@ -15384,7 +15886,7 @@
           <a:noFill/>
         </p:spPr>
         <p:txBody>
-          <a:bodyPr wrap="square" lIns="0" rIns="0" tIns="0" bIns="0" anchor="t">
+          <a:bodyPr wrap="square" lIns="0" tIns="0" rIns="0" bIns="0" anchor="t">
             <a:spAutoFit/>
           </a:bodyPr>
           <a:lstStyle/>
@@ -15423,7 +15925,7 @@
           <a:noFill/>
         </p:spPr>
         <p:txBody>
-          <a:bodyPr wrap="square" lIns="0" rIns="0" tIns="0" bIns="0" anchor="t">
+          <a:bodyPr wrap="square" lIns="0" tIns="0" rIns="0" bIns="0" anchor="t">
             <a:spAutoFit/>
           </a:bodyPr>
           <a:lstStyle/>
@@ -15488,6 +15990,7 @@
           <a:lstStyle/>
           <a:p>
             <a:pPr algn="ctr"/>
+            <a:endParaRPr/>
           </a:p>
         </p:txBody>
       </p:sp>
@@ -15508,7 +16011,7 @@
           <a:noFill/>
         </p:spPr>
         <p:txBody>
-          <a:bodyPr wrap="square" lIns="0" rIns="0" tIns="0" bIns="0" anchor="t">
+          <a:bodyPr wrap="square" lIns="0" tIns="0" rIns="0" bIns="0" anchor="t">
             <a:spAutoFit/>
           </a:bodyPr>
           <a:lstStyle/>
@@ -15547,7 +16050,7 @@
           <a:noFill/>
         </p:spPr>
         <p:txBody>
-          <a:bodyPr wrap="square" lIns="0" rIns="0" tIns="0" bIns="0" anchor="t">
+          <a:bodyPr wrap="square" lIns="0" tIns="0" rIns="0" bIns="0" anchor="t">
             <a:spAutoFit/>
           </a:bodyPr>
           <a:lstStyle/>
@@ -15586,7 +16089,7 @@
           <a:noFill/>
         </p:spPr>
         <p:txBody>
-          <a:bodyPr wrap="square" lIns="0" rIns="0" tIns="0" bIns="0" anchor="t">
+          <a:bodyPr wrap="square" lIns="0" tIns="0" rIns="0" bIns="0" anchor="t">
             <a:spAutoFit/>
           </a:bodyPr>
           <a:lstStyle/>
@@ -15651,6 +16154,7 @@
           <a:lstStyle/>
           <a:p>
             <a:pPr algn="ctr"/>
+            <a:endParaRPr/>
           </a:p>
         </p:txBody>
       </p:sp>
@@ -15671,7 +16175,7 @@
           <a:noFill/>
         </p:spPr>
         <p:txBody>
-          <a:bodyPr wrap="square" lIns="0" rIns="0" tIns="0" bIns="0" anchor="t">
+          <a:bodyPr wrap="square" lIns="0" tIns="0" rIns="0" bIns="0" anchor="t">
             <a:spAutoFit/>
           </a:bodyPr>
           <a:lstStyle/>
@@ -15710,7 +16214,7 @@
           <a:noFill/>
         </p:spPr>
         <p:txBody>
-          <a:bodyPr wrap="square" lIns="0" rIns="0" tIns="0" bIns="0" anchor="t">
+          <a:bodyPr wrap="square" lIns="0" tIns="0" rIns="0" bIns="0" anchor="t">
             <a:spAutoFit/>
           </a:bodyPr>
           <a:lstStyle/>
@@ -15749,7 +16253,7 @@
           <a:noFill/>
         </p:spPr>
         <p:txBody>
-          <a:bodyPr wrap="square" lIns="0" rIns="0" tIns="0" bIns="0" anchor="t">
+          <a:bodyPr wrap="square" lIns="0" tIns="0" rIns="0" bIns="0" anchor="t">
             <a:spAutoFit/>
           </a:bodyPr>
           <a:lstStyle/>
@@ -15814,6 +16318,7 @@
           <a:lstStyle/>
           <a:p>
             <a:pPr algn="ctr"/>
+            <a:endParaRPr/>
           </a:p>
         </p:txBody>
       </p:sp>
@@ -15834,7 +16339,7 @@
           <a:noFill/>
         </p:spPr>
         <p:txBody>
-          <a:bodyPr wrap="square" lIns="0" rIns="0" tIns="0" bIns="0" anchor="t">
+          <a:bodyPr wrap="square" lIns="0" tIns="0" rIns="0" bIns="0" anchor="t">
             <a:spAutoFit/>
           </a:bodyPr>
           <a:lstStyle/>
@@ -15873,7 +16378,7 @@
           <a:noFill/>
         </p:spPr>
         <p:txBody>
-          <a:bodyPr wrap="square" lIns="0" rIns="0" tIns="0" bIns="0" anchor="t">
+          <a:bodyPr wrap="square" lIns="0" tIns="0" rIns="0" bIns="0" anchor="t">
             <a:spAutoFit/>
           </a:bodyPr>
           <a:lstStyle/>
@@ -15912,7 +16417,7 @@
           <a:noFill/>
         </p:spPr>
         <p:txBody>
-          <a:bodyPr wrap="square" lIns="0" rIns="0" tIns="0" bIns="0" anchor="t">
+          <a:bodyPr wrap="square" lIns="0" tIns="0" rIns="0" bIns="0" anchor="t">
             <a:spAutoFit/>
           </a:bodyPr>
           <a:lstStyle/>
@@ -15977,6 +16482,7 @@
           <a:lstStyle/>
           <a:p>
             <a:pPr algn="ctr"/>
+            <a:endParaRPr/>
           </a:p>
         </p:txBody>
       </p:sp>
@@ -15997,7 +16503,7 @@
           <a:noFill/>
         </p:spPr>
         <p:txBody>
-          <a:bodyPr wrap="square" lIns="0" rIns="0" tIns="0" bIns="0" anchor="t">
+          <a:bodyPr wrap="square" lIns="0" tIns="0" rIns="0" bIns="0" anchor="t">
             <a:spAutoFit/>
           </a:bodyPr>
           <a:lstStyle/>
@@ -16036,7 +16542,7 @@
           <a:noFill/>
         </p:spPr>
         <p:txBody>
-          <a:bodyPr wrap="square" lIns="0" rIns="0" tIns="0" bIns="0" anchor="t">
+          <a:bodyPr wrap="square" lIns="0" tIns="0" rIns="0" bIns="0" anchor="t">
             <a:spAutoFit/>
           </a:bodyPr>
           <a:lstStyle/>
@@ -16075,7 +16581,7 @@
           <a:noFill/>
         </p:spPr>
         <p:txBody>
-          <a:bodyPr wrap="square" lIns="0" rIns="0" tIns="0" bIns="0" anchor="t">
+          <a:bodyPr wrap="square" lIns="0" tIns="0" rIns="0" bIns="0" anchor="t">
             <a:spAutoFit/>
           </a:bodyPr>
           <a:lstStyle/>
@@ -16140,6 +16646,7 @@
           <a:lstStyle/>
           <a:p>
             <a:pPr algn="ctr"/>
+            <a:endParaRPr/>
           </a:p>
         </p:txBody>
       </p:sp>
@@ -16160,7 +16667,7 @@
           <a:noFill/>
         </p:spPr>
         <p:txBody>
-          <a:bodyPr wrap="square" lIns="0" rIns="0" tIns="0" bIns="0" anchor="t">
+          <a:bodyPr wrap="square" lIns="0" tIns="0" rIns="0" bIns="0" anchor="t">
             <a:spAutoFit/>
           </a:bodyPr>
           <a:lstStyle/>
@@ -16199,7 +16706,7 @@
           <a:noFill/>
         </p:spPr>
         <p:txBody>
-          <a:bodyPr wrap="square" lIns="0" rIns="0" tIns="0" bIns="0" anchor="t">
+          <a:bodyPr wrap="square" lIns="0" tIns="0" rIns="0" bIns="0" anchor="t">
             <a:spAutoFit/>
           </a:bodyPr>
           <a:lstStyle/>
@@ -16238,7 +16745,7 @@
           <a:noFill/>
         </p:spPr>
         <p:txBody>
-          <a:bodyPr wrap="square" lIns="0" rIns="0" tIns="0" bIns="0" anchor="t">
+          <a:bodyPr wrap="square" lIns="0" tIns="0" rIns="0" bIns="0" anchor="t">
             <a:spAutoFit/>
           </a:bodyPr>
           <a:lstStyle/>
@@ -16303,6 +16810,7 @@
           <a:lstStyle/>
           <a:p>
             <a:pPr algn="ctr"/>
+            <a:endParaRPr/>
           </a:p>
         </p:txBody>
       </p:sp>
@@ -16323,7 +16831,7 @@
           <a:noFill/>
         </p:spPr>
         <p:txBody>
-          <a:bodyPr wrap="square" lIns="0" rIns="0" tIns="0" bIns="0" anchor="t">
+          <a:bodyPr wrap="square" lIns="0" tIns="0" rIns="0" bIns="0" anchor="t">
             <a:spAutoFit/>
           </a:bodyPr>
           <a:lstStyle/>
@@ -16362,7 +16870,7 @@
           <a:noFill/>
         </p:spPr>
         <p:txBody>
-          <a:bodyPr wrap="square" lIns="0" rIns="0" tIns="0" bIns="0" anchor="t">
+          <a:bodyPr wrap="square" lIns="0" tIns="0" rIns="0" bIns="0" anchor="t">
             <a:spAutoFit/>
           </a:bodyPr>
           <a:lstStyle/>
@@ -16401,7 +16909,7 @@
           <a:noFill/>
         </p:spPr>
         <p:txBody>
-          <a:bodyPr wrap="square" lIns="0" rIns="0" tIns="0" bIns="0" anchor="t">
+          <a:bodyPr wrap="square" lIns="0" tIns="0" rIns="0" bIns="0" anchor="t">
             <a:spAutoFit/>
           </a:bodyPr>
           <a:lstStyle/>
@@ -16432,7 +16940,7 @@
 </file>
 
 <file path=ppt/slides/slide6.xml><?xml version="1.0" encoding="utf-8"?>
-<p:sld xmlns:a="http://schemas.openxmlformats.org/drawingml/2006/main" xmlns:p="http://schemas.openxmlformats.org/presentationml/2006/main" xmlns:r="http://schemas.openxmlformats.org/officeDocument/2006/relationships">
+<p:sld xmlns:a="http://schemas.openxmlformats.org/drawingml/2006/main" xmlns:r="http://schemas.openxmlformats.org/officeDocument/2006/relationships" xmlns:p="http://schemas.openxmlformats.org/presentationml/2006/main">
   <p:cSld>
     <p:bg>
       <p:bgPr>
@@ -16448,7 +16956,14 @@
         <p:cNvGrpSpPr/>
         <p:nvPr/>
       </p:nvGrpSpPr>
-      <p:grpSpPr/>
+      <p:grpSpPr>
+        <a:xfrm>
+          <a:off x="0" y="0"/>
+          <a:ext cx="0" cy="0"/>
+          <a:chOff x="0" y="0"/>
+          <a:chExt cx="0" cy="0"/>
+        </a:xfrm>
+      </p:grpSpPr>
       <p:sp>
         <p:nvSpPr>
           <p:cNvPr id="2" name="TextBox 1"/>
@@ -16466,7 +16981,7 @@
           <a:noFill/>
         </p:spPr>
         <p:txBody>
-          <a:bodyPr wrap="square" lIns="0" rIns="0" tIns="0" bIns="0" anchor="t">
+          <a:bodyPr wrap="square" lIns="0" tIns="0" rIns="0" bIns="0" anchor="t">
             <a:spAutoFit/>
           </a:bodyPr>
           <a:lstStyle/>
@@ -16505,7 +17020,7 @@
           <a:noFill/>
         </p:spPr>
         <p:txBody>
-          <a:bodyPr wrap="square" lIns="0" rIns="0" tIns="0" bIns="0" anchor="t">
+          <a:bodyPr wrap="square" lIns="0" tIns="0" rIns="0" bIns="0" anchor="t">
             <a:spAutoFit/>
           </a:bodyPr>
           <a:lstStyle/>
@@ -16544,7 +17059,7 @@
           <a:noFill/>
         </p:spPr>
         <p:txBody>
-          <a:bodyPr wrap="square" lIns="0" rIns="0" tIns="0" bIns="0" anchor="t">
+          <a:bodyPr wrap="square" lIns="0" tIns="0" rIns="0" bIns="0" anchor="t">
             <a:spAutoFit/>
           </a:bodyPr>
           <a:lstStyle/>
@@ -16583,7 +17098,7 @@
           <a:noFill/>
         </p:spPr>
         <p:txBody>
-          <a:bodyPr wrap="square" lIns="0" rIns="0" tIns="0" bIns="0" anchor="t">
+          <a:bodyPr wrap="square" lIns="0" tIns="0" rIns="0" bIns="0" anchor="t">
             <a:spAutoFit/>
           </a:bodyPr>
           <a:lstStyle/>
@@ -16624,8 +17139,20 @@
                 <a:tableStyleId>{5C22544A-7EE6-4342-B048-85BDC9FD1C3A}</a:tableStyleId>
               </a:tblPr>
               <a:tblGrid>
-                <a:gridCol w="3657600"/>
-                <a:gridCol w="7406640"/>
+                <a:gridCol w="3657600">
+                  <a:extLst>
+                    <a:ext uri="{9D8B030D-6E8A-4147-A177-3AD203B41FA5}">
+                      <a16:colId xmlns:a16="http://schemas.microsoft.com/office/drawing/2014/main" val="20000"/>
+                    </a:ext>
+                  </a:extLst>
+                </a:gridCol>
+                <a:gridCol w="7406640">
+                  <a:extLst>
+                    <a:ext uri="{9D8B030D-6E8A-4147-A177-3AD203B41FA5}">
+                      <a16:colId xmlns:a16="http://schemas.microsoft.com/office/drawing/2014/main" val="20001"/>
+                    </a:ext>
+                  </a:extLst>
+                </a:gridCol>
               </a:tblGrid>
               <a:tr h="560070">
                 <a:tc>
@@ -16672,6 +17199,11 @@
                     </a:solidFill>
                   </a:tcPr>
                 </a:tc>
+                <a:extLst>
+                  <a:ext uri="{0D108BD9-81ED-4DB2-BD59-A6C34878D82A}">
+                    <a16:rowId xmlns:a16="http://schemas.microsoft.com/office/drawing/2014/main" val="10000"/>
+                  </a:ext>
+                </a:extLst>
               </a:tr>
               <a:tr h="560070">
                 <a:tc>
@@ -16718,6 +17250,11 @@
                     </a:solidFill>
                   </a:tcPr>
                 </a:tc>
+                <a:extLst>
+                  <a:ext uri="{0D108BD9-81ED-4DB2-BD59-A6C34878D82A}">
+                    <a16:rowId xmlns:a16="http://schemas.microsoft.com/office/drawing/2014/main" val="10001"/>
+                  </a:ext>
+                </a:extLst>
               </a:tr>
               <a:tr h="560070">
                 <a:tc>
@@ -16764,6 +17301,11 @@
                     </a:solidFill>
                   </a:tcPr>
                 </a:tc>
+                <a:extLst>
+                  <a:ext uri="{0D108BD9-81ED-4DB2-BD59-A6C34878D82A}">
+                    <a16:rowId xmlns:a16="http://schemas.microsoft.com/office/drawing/2014/main" val="10002"/>
+                  </a:ext>
+                </a:extLst>
               </a:tr>
               <a:tr h="560070">
                 <a:tc>
@@ -16810,6 +17352,11 @@
                     </a:solidFill>
                   </a:tcPr>
                 </a:tc>
+                <a:extLst>
+                  <a:ext uri="{0D108BD9-81ED-4DB2-BD59-A6C34878D82A}">
+                    <a16:rowId xmlns:a16="http://schemas.microsoft.com/office/drawing/2014/main" val="10003"/>
+                  </a:ext>
+                </a:extLst>
               </a:tr>
               <a:tr h="560070">
                 <a:tc>
@@ -16856,6 +17403,11 @@
                     </a:solidFill>
                   </a:tcPr>
                 </a:tc>
+                <a:extLst>
+                  <a:ext uri="{0D108BD9-81ED-4DB2-BD59-A6C34878D82A}">
+                    <a16:rowId xmlns:a16="http://schemas.microsoft.com/office/drawing/2014/main" val="10004"/>
+                  </a:ext>
+                </a:extLst>
               </a:tr>
               <a:tr h="560070">
                 <a:tc>
@@ -16902,6 +17454,11 @@
                     </a:solidFill>
                   </a:tcPr>
                 </a:tc>
+                <a:extLst>
+                  <a:ext uri="{0D108BD9-81ED-4DB2-BD59-A6C34878D82A}">
+                    <a16:rowId xmlns:a16="http://schemas.microsoft.com/office/drawing/2014/main" val="10005"/>
+                  </a:ext>
+                </a:extLst>
               </a:tr>
               <a:tr h="560070">
                 <a:tc>
@@ -16948,6 +17505,11 @@
                     </a:solidFill>
                   </a:tcPr>
                 </a:tc>
+                <a:extLst>
+                  <a:ext uri="{0D108BD9-81ED-4DB2-BD59-A6C34878D82A}">
+                    <a16:rowId xmlns:a16="http://schemas.microsoft.com/office/drawing/2014/main" val="10006"/>
+                  </a:ext>
+                </a:extLst>
               </a:tr>
               <a:tr h="560070">
                 <a:tc>
@@ -16994,6 +17556,11 @@
                     </a:solidFill>
                   </a:tcPr>
                 </a:tc>
+                <a:extLst>
+                  <a:ext uri="{0D108BD9-81ED-4DB2-BD59-A6C34878D82A}">
+                    <a16:rowId xmlns:a16="http://schemas.microsoft.com/office/drawing/2014/main" val="10007"/>
+                  </a:ext>
+                </a:extLst>
               </a:tr>
             </a:tbl>
           </a:graphicData>
@@ -17008,7 +17575,7 @@
 </file>
 
 <file path=ppt/slides/slide7.xml><?xml version="1.0" encoding="utf-8"?>
-<p:sld xmlns:a="http://schemas.openxmlformats.org/drawingml/2006/main" xmlns:p="http://schemas.openxmlformats.org/presentationml/2006/main" xmlns:r="http://schemas.openxmlformats.org/officeDocument/2006/relationships">
+<p:sld xmlns:a="http://schemas.openxmlformats.org/drawingml/2006/main" xmlns:r="http://schemas.openxmlformats.org/officeDocument/2006/relationships" xmlns:p="http://schemas.openxmlformats.org/presentationml/2006/main">
   <p:cSld>
     <p:bg>
       <p:bgPr>
@@ -17024,7 +17591,14 @@
         <p:cNvGrpSpPr/>
         <p:nvPr/>
       </p:nvGrpSpPr>
-      <p:grpSpPr/>
+      <p:grpSpPr>
+        <a:xfrm>
+          <a:off x="0" y="0"/>
+          <a:ext cx="0" cy="0"/>
+          <a:chOff x="0" y="0"/>
+          <a:chExt cx="0" cy="0"/>
+        </a:xfrm>
+      </p:grpSpPr>
       <p:sp>
         <p:nvSpPr>
           <p:cNvPr id="2" name="TextBox 1"/>
@@ -17042,7 +17616,7 @@
           <a:noFill/>
         </p:spPr>
         <p:txBody>
-          <a:bodyPr wrap="square" lIns="0" rIns="0" tIns="0" bIns="0" anchor="t">
+          <a:bodyPr wrap="square" lIns="0" tIns="0" rIns="0" bIns="0" anchor="t">
             <a:spAutoFit/>
           </a:bodyPr>
           <a:lstStyle/>
@@ -17081,7 +17655,7 @@
           <a:noFill/>
         </p:spPr>
         <p:txBody>
-          <a:bodyPr wrap="square" lIns="0" rIns="0" tIns="0" bIns="0" anchor="t">
+          <a:bodyPr wrap="square" lIns="0" tIns="0" rIns="0" bIns="0" anchor="t">
             <a:spAutoFit/>
           </a:bodyPr>
           <a:lstStyle/>
@@ -17120,7 +17694,7 @@
           <a:noFill/>
         </p:spPr>
         <p:txBody>
-          <a:bodyPr wrap="square" lIns="0" rIns="0" tIns="0" bIns="0" anchor="t">
+          <a:bodyPr wrap="square" lIns="0" tIns="0" rIns="0" bIns="0" anchor="t">
             <a:spAutoFit/>
           </a:bodyPr>
           <a:lstStyle/>
@@ -17159,7 +17733,7 @@
           <a:noFill/>
         </p:spPr>
         <p:txBody>
-          <a:bodyPr wrap="square" lIns="0" rIns="0" tIns="0" bIns="0" anchor="t">
+          <a:bodyPr wrap="square" lIns="0" tIns="0" rIns="0" bIns="0" anchor="t">
             <a:spAutoFit/>
           </a:bodyPr>
           <a:lstStyle/>
@@ -17224,6 +17798,7 @@
           <a:lstStyle/>
           <a:p>
             <a:pPr algn="ctr"/>
+            <a:endParaRPr/>
           </a:p>
         </p:txBody>
       </p:sp>
@@ -17264,7 +17839,7 @@
           </a:fontRef>
         </p:style>
         <p:txBody>
-          <a:bodyPr rtlCol="0" anchor="ctr" lIns="0" rIns="0" tIns="0" bIns="0"/>
+          <a:bodyPr lIns="0" tIns="0" rIns="0" bIns="0" rtlCol="0" anchor="ctr"/>
           <a:lstStyle/>
           <a:p>
             <a:pPr algn="ctr"/>
@@ -17297,7 +17872,7 @@
           <a:noFill/>
         </p:spPr>
         <p:txBody>
-          <a:bodyPr wrap="square" lIns="0" rIns="0" tIns="0" bIns="0" anchor="ctr">
+          <a:bodyPr wrap="square" lIns="0" tIns="0" rIns="0" bIns="0" anchor="ctr">
             <a:spAutoFit/>
           </a:bodyPr>
           <a:lstStyle/>
@@ -17362,6 +17937,7 @@
           <a:lstStyle/>
           <a:p>
             <a:pPr algn="ctr"/>
+            <a:endParaRPr/>
           </a:p>
         </p:txBody>
       </p:sp>
@@ -17402,7 +17978,7 @@
           </a:fontRef>
         </p:style>
         <p:txBody>
-          <a:bodyPr rtlCol="0" anchor="ctr" lIns="0" rIns="0" tIns="0" bIns="0"/>
+          <a:bodyPr lIns="0" tIns="0" rIns="0" bIns="0" rtlCol="0" anchor="ctr"/>
           <a:lstStyle/>
           <a:p>
             <a:pPr algn="ctr"/>
@@ -17435,7 +18011,7 @@
           <a:noFill/>
         </p:spPr>
         <p:txBody>
-          <a:bodyPr wrap="square" lIns="0" rIns="0" tIns="0" bIns="0" anchor="ctr">
+          <a:bodyPr wrap="square" lIns="0" tIns="0" rIns="0" bIns="0" anchor="ctr">
             <a:spAutoFit/>
           </a:bodyPr>
           <a:lstStyle/>
@@ -17500,6 +18076,7 @@
           <a:lstStyle/>
           <a:p>
             <a:pPr algn="ctr"/>
+            <a:endParaRPr/>
           </a:p>
         </p:txBody>
       </p:sp>
@@ -17540,7 +18117,7 @@
           </a:fontRef>
         </p:style>
         <p:txBody>
-          <a:bodyPr rtlCol="0" anchor="ctr" lIns="0" rIns="0" tIns="0" bIns="0"/>
+          <a:bodyPr lIns="0" tIns="0" rIns="0" bIns="0" rtlCol="0" anchor="ctr"/>
           <a:lstStyle/>
           <a:p>
             <a:pPr algn="ctr"/>
@@ -17573,7 +18150,7 @@
           <a:noFill/>
         </p:spPr>
         <p:txBody>
-          <a:bodyPr wrap="square" lIns="0" rIns="0" tIns="0" bIns="0" anchor="ctr">
+          <a:bodyPr wrap="square" lIns="0" tIns="0" rIns="0" bIns="0" anchor="ctr">
             <a:spAutoFit/>
           </a:bodyPr>
           <a:lstStyle/>
@@ -17638,6 +18215,7 @@
           <a:lstStyle/>
           <a:p>
             <a:pPr algn="ctr"/>
+            <a:endParaRPr/>
           </a:p>
         </p:txBody>
       </p:sp>
@@ -17678,7 +18256,7 @@
           </a:fontRef>
         </p:style>
         <p:txBody>
-          <a:bodyPr rtlCol="0" anchor="ctr" lIns="0" rIns="0" tIns="0" bIns="0"/>
+          <a:bodyPr lIns="0" tIns="0" rIns="0" bIns="0" rtlCol="0" anchor="ctr"/>
           <a:lstStyle/>
           <a:p>
             <a:pPr algn="ctr"/>
@@ -17711,7 +18289,7 @@
           <a:noFill/>
         </p:spPr>
         <p:txBody>
-          <a:bodyPr wrap="square" lIns="0" rIns="0" tIns="0" bIns="0" anchor="ctr">
+          <a:bodyPr wrap="square" lIns="0" tIns="0" rIns="0" bIns="0" anchor="ctr">
             <a:spAutoFit/>
           </a:bodyPr>
           <a:lstStyle/>
@@ -17776,6 +18354,7 @@
           <a:lstStyle/>
           <a:p>
             <a:pPr algn="ctr"/>
+            <a:endParaRPr/>
           </a:p>
         </p:txBody>
       </p:sp>
@@ -17816,7 +18395,7 @@
           </a:fontRef>
         </p:style>
         <p:txBody>
-          <a:bodyPr rtlCol="0" anchor="ctr" lIns="0" rIns="0" tIns="0" bIns="0"/>
+          <a:bodyPr lIns="0" tIns="0" rIns="0" bIns="0" rtlCol="0" anchor="ctr"/>
           <a:lstStyle/>
           <a:p>
             <a:pPr algn="ctr"/>
@@ -17849,7 +18428,7 @@
           <a:noFill/>
         </p:spPr>
         <p:txBody>
-          <a:bodyPr wrap="square" lIns="0" rIns="0" tIns="0" bIns="0" anchor="ctr">
+          <a:bodyPr wrap="square" lIns="0" tIns="0" rIns="0" bIns="0" anchor="ctr">
             <a:spAutoFit/>
           </a:bodyPr>
           <a:lstStyle/>
@@ -17914,6 +18493,7 @@
           <a:lstStyle/>
           <a:p>
             <a:pPr algn="ctr"/>
+            <a:endParaRPr/>
           </a:p>
         </p:txBody>
       </p:sp>
@@ -17954,7 +18534,7 @@
           </a:fontRef>
         </p:style>
         <p:txBody>
-          <a:bodyPr rtlCol="0" anchor="ctr" lIns="0" rIns="0" tIns="0" bIns="0"/>
+          <a:bodyPr lIns="0" tIns="0" rIns="0" bIns="0" rtlCol="0" anchor="ctr"/>
           <a:lstStyle/>
           <a:p>
             <a:pPr algn="ctr"/>
@@ -17987,7 +18567,7 @@
           <a:noFill/>
         </p:spPr>
         <p:txBody>
-          <a:bodyPr wrap="square" lIns="0" rIns="0" tIns="0" bIns="0" anchor="ctr">
+          <a:bodyPr wrap="square" lIns="0" tIns="0" rIns="0" bIns="0" anchor="ctr">
             <a:spAutoFit/>
           </a:bodyPr>
           <a:lstStyle/>
@@ -18018,7 +18598,7 @@
 </file>
 
 <file path=ppt/slides/slide8.xml><?xml version="1.0" encoding="utf-8"?>
-<p:sld xmlns:a="http://schemas.openxmlformats.org/drawingml/2006/main" xmlns:p="http://schemas.openxmlformats.org/presentationml/2006/main" xmlns:r="http://schemas.openxmlformats.org/officeDocument/2006/relationships">
+<p:sld xmlns:a="http://schemas.openxmlformats.org/drawingml/2006/main" xmlns:r="http://schemas.openxmlformats.org/officeDocument/2006/relationships" xmlns:p="http://schemas.openxmlformats.org/presentationml/2006/main">
   <p:cSld>
     <p:bg>
       <p:bgPr>
@@ -18034,7 +18614,14 @@
         <p:cNvGrpSpPr/>
         <p:nvPr/>
       </p:nvGrpSpPr>
-      <p:grpSpPr/>
+      <p:grpSpPr>
+        <a:xfrm>
+          <a:off x="0" y="0"/>
+          <a:ext cx="0" cy="0"/>
+          <a:chOff x="0" y="0"/>
+          <a:chExt cx="0" cy="0"/>
+        </a:xfrm>
+      </p:grpSpPr>
       <p:sp>
         <p:nvSpPr>
           <p:cNvPr id="2" name="Oval 1"/>
@@ -18076,6 +18663,7 @@
           <a:lstStyle/>
           <a:p>
             <a:pPr algn="ctr"/>
+            <a:endParaRPr/>
           </a:p>
         </p:txBody>
       </p:sp>
@@ -18096,7 +18684,7 @@
           <a:noFill/>
         </p:spPr>
         <p:txBody>
-          <a:bodyPr wrap="square" lIns="0" rIns="0" tIns="0" bIns="0" anchor="t">
+          <a:bodyPr wrap="square" lIns="0" tIns="0" rIns="0" bIns="0" anchor="t">
             <a:spAutoFit/>
           </a:bodyPr>
           <a:lstStyle/>
@@ -18135,7 +18723,7 @@
           <a:noFill/>
         </p:spPr>
         <p:txBody>
-          <a:bodyPr wrap="square" lIns="0" rIns="0" tIns="0" bIns="0" anchor="t">
+          <a:bodyPr wrap="square" lIns="0" tIns="0" rIns="0" bIns="0" anchor="t">
             <a:spAutoFit/>
           </a:bodyPr>
           <a:lstStyle/>
@@ -18174,7 +18762,7 @@
           <a:noFill/>
         </p:spPr>
         <p:txBody>
-          <a:bodyPr wrap="square" lIns="0" rIns="0" tIns="0" bIns="0" anchor="t">
+          <a:bodyPr wrap="square" lIns="0" tIns="0" rIns="0" bIns="0" anchor="t">
             <a:spAutoFit/>
           </a:bodyPr>
           <a:lstStyle/>
@@ -18205,7 +18793,7 @@
 </file>
 
 <file path=ppt/slides/slide9.xml><?xml version="1.0" encoding="utf-8"?>
-<p:sld xmlns:a="http://schemas.openxmlformats.org/drawingml/2006/main" xmlns:p="http://schemas.openxmlformats.org/presentationml/2006/main" xmlns:r="http://schemas.openxmlformats.org/officeDocument/2006/relationships">
+<p:sld xmlns:a="http://schemas.openxmlformats.org/drawingml/2006/main" xmlns:r="http://schemas.openxmlformats.org/officeDocument/2006/relationships" xmlns:p="http://schemas.openxmlformats.org/presentationml/2006/main">
   <p:cSld>
     <p:bg>
       <p:bgPr>
@@ -18221,7 +18809,14 @@
         <p:cNvGrpSpPr/>
         <p:nvPr/>
       </p:nvGrpSpPr>
-      <p:grpSpPr/>
+      <p:grpSpPr>
+        <a:xfrm>
+          <a:off x="0" y="0"/>
+          <a:ext cx="0" cy="0"/>
+          <a:chOff x="0" y="0"/>
+          <a:chExt cx="0" cy="0"/>
+        </a:xfrm>
+      </p:grpSpPr>
       <p:sp>
         <p:nvSpPr>
           <p:cNvPr id="2" name="TextBox 1"/>
@@ -18239,7 +18834,7 @@
           <a:noFill/>
         </p:spPr>
         <p:txBody>
-          <a:bodyPr wrap="square" lIns="0" rIns="0" tIns="0" bIns="0" anchor="t">
+          <a:bodyPr wrap="square" lIns="0" tIns="0" rIns="0" bIns="0" anchor="t">
             <a:spAutoFit/>
           </a:bodyPr>
           <a:lstStyle/>
@@ -18278,7 +18873,7 @@
           <a:noFill/>
         </p:spPr>
         <p:txBody>
-          <a:bodyPr wrap="square" lIns="0" rIns="0" tIns="0" bIns="0" anchor="t">
+          <a:bodyPr wrap="square" lIns="0" tIns="0" rIns="0" bIns="0" anchor="t">
             <a:spAutoFit/>
           </a:bodyPr>
           <a:lstStyle/>
@@ -18317,7 +18912,7 @@
           <a:noFill/>
         </p:spPr>
         <p:txBody>
-          <a:bodyPr wrap="square" lIns="0" rIns="0" tIns="0" bIns="0" anchor="t">
+          <a:bodyPr wrap="square" lIns="0" tIns="0" rIns="0" bIns="0" anchor="t">
             <a:spAutoFit/>
           </a:bodyPr>
           <a:lstStyle/>
@@ -18356,7 +18951,7 @@
           <a:noFill/>
         </p:spPr>
         <p:txBody>
-          <a:bodyPr wrap="square" lIns="0" rIns="0" tIns="0" bIns="0" anchor="t">
+          <a:bodyPr wrap="square" lIns="0" tIns="0" rIns="0" bIns="0" anchor="t">
             <a:spAutoFit/>
           </a:bodyPr>
           <a:lstStyle/>
@@ -18392,7 +18987,7 @@
         </p:xfrm>
         <a:graphic>
           <a:graphicData uri="http://schemas.openxmlformats.org/drawingml/2006/chart">
-            <c:chart xmlns:c="http://schemas.openxmlformats.org/drawingml/2006/chart" r:id="rId2"/>
+            <c:chart xmlns:c="http://schemas.openxmlformats.org/drawingml/2006/chart" xmlns:r="http://schemas.openxmlformats.org/officeDocument/2006/relationships" r:id="rId3"/>
           </a:graphicData>
         </a:graphic>
       </p:graphicFrame>
@@ -18413,7 +19008,7 @@
           <a:noFill/>
         </p:spPr>
         <p:txBody>
-          <a:bodyPr wrap="square" lIns="0" rIns="0" tIns="0" bIns="0" anchor="t">
+          <a:bodyPr wrap="square" lIns="0" tIns="0" rIns="0" bIns="0" anchor="t">
             <a:spAutoFit/>
           </a:bodyPr>
           <a:lstStyle/>
@@ -18452,7 +19047,7 @@
           <a:noFill/>
         </p:spPr>
         <p:txBody>
-          <a:bodyPr wrap="square" lIns="0" rIns="0" tIns="0" bIns="0" anchor="t">
+          <a:bodyPr wrap="square" lIns="0" tIns="0" rIns="0" bIns="0" anchor="t">
             <a:spAutoFit/>
           </a:bodyPr>
           <a:lstStyle/>
@@ -18491,7 +19086,7 @@
           <a:noFill/>
         </p:spPr>
         <p:txBody>
-          <a:bodyPr wrap="square" lIns="0" rIns="0" tIns="0" bIns="0" anchor="t">
+          <a:bodyPr wrap="square" lIns="0" tIns="0" rIns="0" bIns="0" anchor="t">
             <a:spAutoFit/>
           </a:bodyPr>
           <a:lstStyle/>
@@ -18868,44 +19463,44 @@
         <a:sysClr val="window" lastClr="FFFFFF"/>
       </a:lt1>
       <a:dk2>
-        <a:srgbClr val="1F497D"/>
+        <a:srgbClr val="0E2841"/>
       </a:dk2>
       <a:lt2>
-        <a:srgbClr val="EEECE1"/>
+        <a:srgbClr val="E8E8E8"/>
       </a:lt2>
       <a:accent1>
-        <a:srgbClr val="4F81BD"/>
+        <a:srgbClr val="156082"/>
       </a:accent1>
       <a:accent2>
-        <a:srgbClr val="C0504D"/>
+        <a:srgbClr val="E97132"/>
       </a:accent2>
       <a:accent3>
-        <a:srgbClr val="9BBB59"/>
+        <a:srgbClr val="196B24"/>
       </a:accent3>
       <a:accent4>
-        <a:srgbClr val="8064A2"/>
+        <a:srgbClr val="0F9ED5"/>
       </a:accent4>
       <a:accent5>
-        <a:srgbClr val="4BACC6"/>
+        <a:srgbClr val="A02B93"/>
       </a:accent5>
       <a:accent6>
-        <a:srgbClr val="F79646"/>
+        <a:srgbClr val="4EA72E"/>
       </a:accent6>
       <a:hlink>
-        <a:srgbClr val="0000FF"/>
+        <a:srgbClr val="467886"/>
       </a:hlink>
       <a:folHlink>
-        <a:srgbClr val="800080"/>
+        <a:srgbClr val="96607D"/>
       </a:folHlink>
     </a:clrScheme>
     <a:fontScheme name="Office">
       <a:majorFont>
-        <a:latin typeface="Calibri"/>
+        <a:latin typeface="Aptos Display" panose="02110004020202020204"/>
         <a:ea typeface=""/>
         <a:cs typeface=""/>
-        <a:font script="Jpan" typeface="ＭＳ Ｐゴシック"/>
+        <a:font script="Jpan" typeface="游ゴシック Light"/>
         <a:font script="Hang" typeface="맑은 고딕"/>
-        <a:font script="Hans" typeface="宋体"/>
+        <a:font script="Hans" typeface="等线 Light"/>
         <a:font script="Hant" typeface="新細明體"/>
         <a:font script="Arab" typeface="Times New Roman"/>
         <a:font script="Hebr" typeface="Times New Roman"/>
@@ -18933,14 +19528,31 @@
         <a:font script="Viet" typeface="Times New Roman"/>
         <a:font script="Uigh" typeface="Microsoft Uighur"/>
         <a:font script="Geor" typeface="Sylfaen"/>
+        <a:font script="Armn" typeface="Arial"/>
+        <a:font script="Bugi" typeface="Leelawadee UI"/>
+        <a:font script="Bopo" typeface="Microsoft JhengHei"/>
+        <a:font script="Java" typeface="Javanese Text"/>
+        <a:font script="Lisu" typeface="Segoe UI"/>
+        <a:font script="Mymr" typeface="Myanmar Text"/>
+        <a:font script="Nkoo" typeface="Ebrima"/>
+        <a:font script="Olck" typeface="Nirmala UI"/>
+        <a:font script="Osma" typeface="Ebrima"/>
+        <a:font script="Phag" typeface="Phagspa"/>
+        <a:font script="Syrn" typeface="Estrangelo Edessa"/>
+        <a:font script="Syrj" typeface="Estrangelo Edessa"/>
+        <a:font script="Syre" typeface="Estrangelo Edessa"/>
+        <a:font script="Sora" typeface="Nirmala UI"/>
+        <a:font script="Tale" typeface="Microsoft Tai Le"/>
+        <a:font script="Talu" typeface="Microsoft New Tai Lue"/>
+        <a:font script="Tfng" typeface="Ebrima"/>
       </a:majorFont>
       <a:minorFont>
-        <a:latin typeface="Calibri"/>
+        <a:latin typeface="Aptos" panose="02110004020202020204"/>
         <a:ea typeface=""/>
         <a:cs typeface=""/>
-        <a:font script="Jpan" typeface="ＭＳ Ｐゴシック"/>
+        <a:font script="Jpan" typeface="游ゴシック"/>
         <a:font script="Hang" typeface="맑은 고딕"/>
-        <a:font script="Hans" typeface="宋体"/>
+        <a:font script="Hans" typeface="等线"/>
         <a:font script="Hant" typeface="新細明體"/>
         <a:font script="Arab" typeface="Arial"/>
         <a:font script="Hebr" typeface="Arial"/>
@@ -18968,6 +19580,23 @@
         <a:font script="Viet" typeface="Arial"/>
         <a:font script="Uigh" typeface="Microsoft Uighur"/>
         <a:font script="Geor" typeface="Sylfaen"/>
+        <a:font script="Armn" typeface="Arial"/>
+        <a:font script="Bugi" typeface="Leelawadee UI"/>
+        <a:font script="Bopo" typeface="Microsoft JhengHei"/>
+        <a:font script="Java" typeface="Javanese Text"/>
+        <a:font script="Lisu" typeface="Segoe UI"/>
+        <a:font script="Mymr" typeface="Myanmar Text"/>
+        <a:font script="Nkoo" typeface="Ebrima"/>
+        <a:font script="Olck" typeface="Nirmala UI"/>
+        <a:font script="Osma" typeface="Ebrima"/>
+        <a:font script="Phag" typeface="Phagspa"/>
+        <a:font script="Syrn" typeface="Estrangelo Edessa"/>
+        <a:font script="Syrj" typeface="Estrangelo Edessa"/>
+        <a:font script="Syre" typeface="Estrangelo Edessa"/>
+        <a:font script="Sora" typeface="Nirmala UI"/>
+        <a:font script="Tale" typeface="Microsoft Tai Le"/>
+        <a:font script="Talu" typeface="Microsoft New Tai Lue"/>
+        <a:font script="Tfng" typeface="Ebrima"/>
       </a:minorFont>
     </a:fontScheme>
     <a:fmtScheme name="Office">
@@ -18979,180 +19608,136 @@
           <a:gsLst>
             <a:gs pos="0">
               <a:schemeClr val="phClr">
-                <a:tint val="50000"/>
-                <a:satMod val="300000"/>
+                <a:lumMod val="110000"/>
+                <a:satMod val="105000"/>
+                <a:tint val="67000"/>
               </a:schemeClr>
             </a:gs>
-            <a:gs pos="35000">
+            <a:gs pos="50000">
               <a:schemeClr val="phClr">
-                <a:tint val="37000"/>
-                <a:satMod val="300000"/>
+                <a:lumMod val="105000"/>
+                <a:satMod val="103000"/>
+                <a:tint val="73000"/>
               </a:schemeClr>
             </a:gs>
             <a:gs pos="100000">
               <a:schemeClr val="phClr">
-                <a:tint val="15000"/>
-                <a:satMod val="350000"/>
+                <a:lumMod val="105000"/>
+                <a:satMod val="109000"/>
+                <a:tint val="81000"/>
               </a:schemeClr>
             </a:gs>
           </a:gsLst>
-          <a:lin ang="16200000" scaled="1"/>
+          <a:lin ang="5400000" scaled="0"/>
         </a:gradFill>
         <a:gradFill rotWithShape="1">
           <a:gsLst>
             <a:gs pos="0">
               <a:schemeClr val="phClr">
-                <a:tint val="100000"/>
+                <a:satMod val="103000"/>
+                <a:lumMod val="102000"/>
+                <a:tint val="94000"/>
+              </a:schemeClr>
+            </a:gs>
+            <a:gs pos="50000">
+              <a:schemeClr val="phClr">
+                <a:satMod val="110000"/>
+                <a:lumMod val="100000"/>
                 <a:shade val="100000"/>
-                <a:satMod val="130000"/>
               </a:schemeClr>
             </a:gs>
             <a:gs pos="100000">
               <a:schemeClr val="phClr">
-                <a:tint val="50000"/>
-                <a:shade val="100000"/>
-                <a:satMod val="350000"/>
+                <a:lumMod val="99000"/>
+                <a:satMod val="120000"/>
+                <a:shade val="78000"/>
               </a:schemeClr>
             </a:gs>
           </a:gsLst>
-          <a:lin ang="16200000" scaled="0"/>
+          <a:lin ang="5400000" scaled="0"/>
         </a:gradFill>
       </a:fillStyleLst>
       <a:lnStyleLst>
-        <a:ln w="9525" cap="flat" cmpd="sng" algn="ctr">
+        <a:ln w="12700" cap="flat" cmpd="sng" algn="ctr">
           <a:solidFill>
-            <a:schemeClr val="phClr">
-              <a:shade val="95000"/>
-              <a:satMod val="105000"/>
-            </a:schemeClr>
+            <a:schemeClr val="phClr"/>
           </a:solidFill>
           <a:prstDash val="solid"/>
+          <a:miter lim="800000"/>
+        </a:ln>
+        <a:ln w="19050" cap="flat" cmpd="sng" algn="ctr">
+          <a:solidFill>
+            <a:schemeClr val="phClr"/>
+          </a:solidFill>
+          <a:prstDash val="solid"/>
+          <a:miter lim="800000"/>
         </a:ln>
         <a:ln w="25400" cap="flat" cmpd="sng" algn="ctr">
           <a:solidFill>
             <a:schemeClr val="phClr"/>
           </a:solidFill>
           <a:prstDash val="solid"/>
-        </a:ln>
-        <a:ln w="38100" cap="flat" cmpd="sng" algn="ctr">
-          <a:solidFill>
-            <a:schemeClr val="phClr"/>
-          </a:solidFill>
-          <a:prstDash val="solid"/>
+          <a:miter lim="800000"/>
         </a:ln>
       </a:lnStyleLst>
       <a:effectStyleLst>
         <a:effectStyle>
+          <a:effectLst/>
+        </a:effectStyle>
+        <a:effectStyle>
+          <a:effectLst/>
+        </a:effectStyle>
+        <a:effectStyle>
           <a:effectLst>
-            <a:outerShdw blurRad="40000" dist="20000" dir="5400000" rotWithShape="0">
+            <a:outerShdw blurRad="57150" dist="19050" dir="5400000" algn="ctr" rotWithShape="0">
               <a:srgbClr val="000000">
-                <a:alpha val="38000"/>
+                <a:alpha val="63000"/>
               </a:srgbClr>
             </a:outerShdw>
           </a:effectLst>
-        </a:effectStyle>
-        <a:effectStyle>
-          <a:effectLst>
-            <a:outerShdw blurRad="40000" dist="23000" dir="5400000" rotWithShape="0">
-              <a:srgbClr val="000000">
-                <a:alpha val="35000"/>
-              </a:srgbClr>
-            </a:outerShdw>
-          </a:effectLst>
-        </a:effectStyle>
-        <a:effectStyle>
-          <a:effectLst>
-            <a:outerShdw blurRad="40000" dist="23000" dir="5400000" rotWithShape="0">
-              <a:srgbClr val="000000">
-                <a:alpha val="35000"/>
-              </a:srgbClr>
-            </a:outerShdw>
-          </a:effectLst>
-          <a:scene3d>
-            <a:camera prst="orthographicFront">
-              <a:rot lat="0" lon="0" rev="0"/>
-            </a:camera>
-            <a:lightRig rig="threePt" dir="t">
-              <a:rot lat="0" lon="0" rev="1200000"/>
-            </a:lightRig>
-          </a:scene3d>
-          <a:sp3d>
-            <a:bevelT w="63500" h="25400"/>
-          </a:sp3d>
         </a:effectStyle>
       </a:effectStyleLst>
       <a:bgFillStyleLst>
         <a:solidFill>
           <a:schemeClr val="phClr"/>
         </a:solidFill>
+        <a:solidFill>
+          <a:schemeClr val="phClr">
+            <a:tint val="95000"/>
+            <a:satMod val="170000"/>
+          </a:schemeClr>
+        </a:solidFill>
         <a:gradFill rotWithShape="1">
           <a:gsLst>
             <a:gs pos="0">
               <a:schemeClr val="phClr">
-                <a:tint val="40000"/>
-                <a:satMod val="350000"/>
+                <a:tint val="93000"/>
+                <a:satMod val="150000"/>
+                <a:shade val="98000"/>
+                <a:lumMod val="102000"/>
               </a:schemeClr>
             </a:gs>
-            <a:gs pos="40000">
+            <a:gs pos="50000">
               <a:schemeClr val="phClr">
-                <a:tint val="45000"/>
-                <a:shade val="99000"/>
-                <a:satMod val="350000"/>
+                <a:tint val="98000"/>
+                <a:satMod val="130000"/>
+                <a:shade val="90000"/>
+                <a:lumMod val="103000"/>
               </a:schemeClr>
             </a:gs>
             <a:gs pos="100000">
               <a:schemeClr val="phClr">
-                <a:shade val="20000"/>
-                <a:satMod val="255000"/>
+                <a:shade val="63000"/>
+                <a:satMod val="120000"/>
               </a:schemeClr>
             </a:gs>
           </a:gsLst>
-          <a:path path="circle">
-            <a:fillToRect l="50000" t="-80000" r="50000" b="180000"/>
-          </a:path>
-        </a:gradFill>
-        <a:gradFill rotWithShape="1">
-          <a:gsLst>
-            <a:gs pos="0">
-              <a:schemeClr val="phClr">
-                <a:tint val="80000"/>
-                <a:satMod val="300000"/>
-              </a:schemeClr>
-            </a:gs>
-            <a:gs pos="100000">
-              <a:schemeClr val="phClr">
-                <a:shade val="30000"/>
-                <a:satMod val="200000"/>
-              </a:schemeClr>
-            </a:gs>
-          </a:gsLst>
-          <a:path path="circle">
-            <a:fillToRect l="50000" t="50000" r="50000" b="50000"/>
-          </a:path>
+          <a:lin ang="5400000" scaled="0"/>
         </a:gradFill>
       </a:bgFillStyleLst>
     </a:fmtScheme>
   </a:themeElements>
   <a:objectDefaults>
-    <a:spDef>
-      <a:spPr/>
-      <a:bodyPr/>
-      <a:lstStyle/>
-      <a:style>
-        <a:lnRef idx="1">
-          <a:schemeClr val="accent1"/>
-        </a:lnRef>
-        <a:fillRef idx="3">
-          <a:schemeClr val="accent1"/>
-        </a:fillRef>
-        <a:effectRef idx="2">
-          <a:schemeClr val="accent1"/>
-        </a:effectRef>
-        <a:fontRef idx="minor">
-          <a:schemeClr val="lt1"/>
-        </a:fontRef>
-      </a:style>
-    </a:spDef>
     <a:lnDef>
       <a:spPr/>
       <a:bodyPr/>
@@ -19174,5 +19759,10 @@
     </a:lnDef>
   </a:objectDefaults>
   <a:extraClrSchemeLst/>
+  <a:extLst>
+    <a:ext uri="{05A4C25C-085E-4340-85A3-A5531E510DB2}">
+      <thm15:themeFamily xmlns:thm15="http://schemas.microsoft.com/office/thememl/2012/main" name="Office Theme" id="{2E142A2C-CD16-42D6-873A-C26D2A0506FA}" vid="{1BDDFF52-6CD6-40A5-AB3C-68EB2F1E4D0A}"/>
+    </a:ext>
+  </a:extLst>
 </a:theme>
 </file>
--- a/Airline_Satisfaction_Presentation.pptx
+++ b/Airline_Satisfaction_Presentation.pptx
@@ -12625,7 +12625,7 @@
                 </a:solidFill>
                 <a:latin typeface="Calibri"/>
               </a:rPr>
-              <a:t>The data was cleaned (N/A ratings, missing delays, inconsistent labels), explored across 10+ variables with 6 kinds of charts, and every insight was verified with a statistical test.</a:t>
+              <a:t>The data was cleaned (N/A ratings, missing delays, inconsistent labels), explored across 8 variables with 6 kinds of charts, and every insight was verified with a statistical test.</a:t>
             </a:r>
           </a:p>
         </p:txBody>
